--- a/Проект «Маникюрная студия».pptx
+++ b/Проект «Маникюрная студия».pptx
@@ -8,6 +8,8 @@
     <p:sldId id="256" r:id="rId2"/>
     <p:sldId id="257" r:id="rId3"/>
     <p:sldId id="258" r:id="rId4"/>
+    <p:sldId id="259" r:id="rId5"/>
+    <p:sldId id="260" r:id="rId6"/>
   </p:sldIdLst>
   <p:sldSz cx="9144000" cy="6858000" type="screen4x3"/>
   <p:notesSz cx="6858000" cy="9144000"/>
@@ -290,7 +292,8 @@
           <a:p>
             <a:fld id="{6940DC67-C7F6-414D-9708-96C5B560FED9}" type="datetimeFigureOut">
               <a:rPr lang="ru-RU" smtClean="0"/>
-              <a:t>05.06.2026</a:t>
+              <a:pPr/>
+              <a:t>06.06.2026</a:t>
             </a:fld>
             <a:endParaRPr lang="ru-RU"/>
           </a:p>
@@ -332,6 +335,7 @@
           <a:p>
             <a:fld id="{CC37BBF5-46A8-4B2E-946B-D12CFA3CFC41}" type="slidenum">
               <a:rPr lang="ru-RU" smtClean="0"/>
+              <a:pPr/>
               <a:t>‹#›</a:t>
             </a:fld>
             <a:endParaRPr lang="ru-RU"/>
@@ -455,7 +459,8 @@
           <a:p>
             <a:fld id="{6940DC67-C7F6-414D-9708-96C5B560FED9}" type="datetimeFigureOut">
               <a:rPr lang="ru-RU" smtClean="0"/>
-              <a:t>05.06.2026</a:t>
+              <a:pPr/>
+              <a:t>06.06.2026</a:t>
             </a:fld>
             <a:endParaRPr lang="ru-RU"/>
           </a:p>
@@ -497,6 +502,7 @@
           <a:p>
             <a:fld id="{CC37BBF5-46A8-4B2E-946B-D12CFA3CFC41}" type="slidenum">
               <a:rPr lang="ru-RU" smtClean="0"/>
+              <a:pPr/>
               <a:t>‹#›</a:t>
             </a:fld>
             <a:endParaRPr lang="ru-RU"/>
@@ -630,7 +636,8 @@
           <a:p>
             <a:fld id="{6940DC67-C7F6-414D-9708-96C5B560FED9}" type="datetimeFigureOut">
               <a:rPr lang="ru-RU" smtClean="0"/>
-              <a:t>05.06.2026</a:t>
+              <a:pPr/>
+              <a:t>06.06.2026</a:t>
             </a:fld>
             <a:endParaRPr lang="ru-RU"/>
           </a:p>
@@ -672,6 +679,7 @@
           <a:p>
             <a:fld id="{CC37BBF5-46A8-4B2E-946B-D12CFA3CFC41}" type="slidenum">
               <a:rPr lang="ru-RU" smtClean="0"/>
+              <a:pPr/>
               <a:t>‹#›</a:t>
             </a:fld>
             <a:endParaRPr lang="ru-RU"/>
@@ -795,7 +803,8 @@
           <a:p>
             <a:fld id="{6940DC67-C7F6-414D-9708-96C5B560FED9}" type="datetimeFigureOut">
               <a:rPr lang="ru-RU" smtClean="0"/>
-              <a:t>05.06.2026</a:t>
+              <a:pPr/>
+              <a:t>06.06.2026</a:t>
             </a:fld>
             <a:endParaRPr lang="ru-RU"/>
           </a:p>
@@ -837,6 +846,7 @@
           <a:p>
             <a:fld id="{CC37BBF5-46A8-4B2E-946B-D12CFA3CFC41}" type="slidenum">
               <a:rPr lang="ru-RU" smtClean="0"/>
+              <a:pPr/>
               <a:t>‹#›</a:t>
             </a:fld>
             <a:endParaRPr lang="ru-RU"/>
@@ -1036,7 +1046,8 @@
           <a:p>
             <a:fld id="{6940DC67-C7F6-414D-9708-96C5B560FED9}" type="datetimeFigureOut">
               <a:rPr lang="ru-RU" smtClean="0"/>
-              <a:t>05.06.2026</a:t>
+              <a:pPr/>
+              <a:t>06.06.2026</a:t>
             </a:fld>
             <a:endParaRPr lang="ru-RU"/>
           </a:p>
@@ -1078,6 +1089,7 @@
           <a:p>
             <a:fld id="{CC37BBF5-46A8-4B2E-946B-D12CFA3CFC41}" type="slidenum">
               <a:rPr lang="ru-RU" smtClean="0"/>
+              <a:pPr/>
               <a:t>‹#›</a:t>
             </a:fld>
             <a:endParaRPr lang="ru-RU"/>
@@ -1319,7 +1331,8 @@
           <a:p>
             <a:fld id="{6940DC67-C7F6-414D-9708-96C5B560FED9}" type="datetimeFigureOut">
               <a:rPr lang="ru-RU" smtClean="0"/>
-              <a:t>05.06.2026</a:t>
+              <a:pPr/>
+              <a:t>06.06.2026</a:t>
             </a:fld>
             <a:endParaRPr lang="ru-RU"/>
           </a:p>
@@ -1361,6 +1374,7 @@
           <a:p>
             <a:fld id="{CC37BBF5-46A8-4B2E-946B-D12CFA3CFC41}" type="slidenum">
               <a:rPr lang="ru-RU" smtClean="0"/>
+              <a:pPr/>
               <a:t>‹#›</a:t>
             </a:fld>
             <a:endParaRPr lang="ru-RU"/>
@@ -1736,7 +1750,8 @@
           <a:p>
             <a:fld id="{6940DC67-C7F6-414D-9708-96C5B560FED9}" type="datetimeFigureOut">
               <a:rPr lang="ru-RU" smtClean="0"/>
-              <a:t>05.06.2026</a:t>
+              <a:pPr/>
+              <a:t>06.06.2026</a:t>
             </a:fld>
             <a:endParaRPr lang="ru-RU"/>
           </a:p>
@@ -1778,6 +1793,7 @@
           <a:p>
             <a:fld id="{CC37BBF5-46A8-4B2E-946B-D12CFA3CFC41}" type="slidenum">
               <a:rPr lang="ru-RU" smtClean="0"/>
+              <a:pPr/>
               <a:t>‹#›</a:t>
             </a:fld>
             <a:endParaRPr lang="ru-RU"/>
@@ -1849,7 +1865,8 @@
           <a:p>
             <a:fld id="{6940DC67-C7F6-414D-9708-96C5B560FED9}" type="datetimeFigureOut">
               <a:rPr lang="ru-RU" smtClean="0"/>
-              <a:t>05.06.2026</a:t>
+              <a:pPr/>
+              <a:t>06.06.2026</a:t>
             </a:fld>
             <a:endParaRPr lang="ru-RU"/>
           </a:p>
@@ -1891,6 +1908,7 @@
           <a:p>
             <a:fld id="{CC37BBF5-46A8-4B2E-946B-D12CFA3CFC41}" type="slidenum">
               <a:rPr lang="ru-RU" smtClean="0"/>
+              <a:pPr/>
               <a:t>‹#›</a:t>
             </a:fld>
             <a:endParaRPr lang="ru-RU"/>
@@ -1939,7 +1957,8 @@
           <a:p>
             <a:fld id="{6940DC67-C7F6-414D-9708-96C5B560FED9}" type="datetimeFigureOut">
               <a:rPr lang="ru-RU" smtClean="0"/>
-              <a:t>05.06.2026</a:t>
+              <a:pPr/>
+              <a:t>06.06.2026</a:t>
             </a:fld>
             <a:endParaRPr lang="ru-RU"/>
           </a:p>
@@ -1981,6 +2000,7 @@
           <a:p>
             <a:fld id="{CC37BBF5-46A8-4B2E-946B-D12CFA3CFC41}" type="slidenum">
               <a:rPr lang="ru-RU" smtClean="0"/>
+              <a:pPr/>
               <a:t>‹#›</a:t>
             </a:fld>
             <a:endParaRPr lang="ru-RU"/>
@@ -2211,7 +2231,8 @@
           <a:p>
             <a:fld id="{6940DC67-C7F6-414D-9708-96C5B560FED9}" type="datetimeFigureOut">
               <a:rPr lang="ru-RU" smtClean="0"/>
-              <a:t>05.06.2026</a:t>
+              <a:pPr/>
+              <a:t>06.06.2026</a:t>
             </a:fld>
             <a:endParaRPr lang="ru-RU"/>
           </a:p>
@@ -2253,6 +2274,7 @@
           <a:p>
             <a:fld id="{CC37BBF5-46A8-4B2E-946B-D12CFA3CFC41}" type="slidenum">
               <a:rPr lang="ru-RU" smtClean="0"/>
+              <a:pPr/>
               <a:t>‹#›</a:t>
             </a:fld>
             <a:endParaRPr lang="ru-RU"/>
@@ -2459,7 +2481,8 @@
           <a:p>
             <a:fld id="{6940DC67-C7F6-414D-9708-96C5B560FED9}" type="datetimeFigureOut">
               <a:rPr lang="ru-RU" smtClean="0"/>
-              <a:t>05.06.2026</a:t>
+              <a:pPr/>
+              <a:t>06.06.2026</a:t>
             </a:fld>
             <a:endParaRPr lang="ru-RU"/>
           </a:p>
@@ -2501,6 +2524,7 @@
           <a:p>
             <a:fld id="{CC37BBF5-46A8-4B2E-946B-D12CFA3CFC41}" type="slidenum">
               <a:rPr lang="ru-RU" smtClean="0"/>
+              <a:pPr/>
               <a:t>‹#›</a:t>
             </a:fld>
             <a:endParaRPr lang="ru-RU"/>
@@ -2691,7 +2715,8 @@
           <a:p>
             <a:fld id="{6940DC67-C7F6-414D-9708-96C5B560FED9}" type="datetimeFigureOut">
               <a:rPr lang="ru-RU" smtClean="0"/>
-              <a:t>05.06.2026</a:t>
+              <a:pPr/>
+              <a:t>06.06.2026</a:t>
             </a:fld>
             <a:endParaRPr lang="ru-RU"/>
           </a:p>
@@ -2769,6 +2794,7 @@
           <a:p>
             <a:fld id="{CC37BBF5-46A8-4B2E-946B-D12CFA3CFC41}" type="slidenum">
               <a:rPr lang="ru-RU" smtClean="0"/>
+              <a:pPr/>
               <a:t>‹#›</a:t>
             </a:fld>
             <a:endParaRPr lang="ru-RU"/>
@@ -3171,18 +3197,7 @@
                 <a:ea typeface="+mj-ea"/>
                 <a:cs typeface="Times New Roman" pitchFamily="18" charset="0"/>
               </a:rPr>
-              <a:t>. </a:t>
-            </a:r>
-            <a:r>
-              <a:rPr lang="ru-RU" sz="2400" dirty="0">
-                <a:solidFill>
-                  <a:schemeClr val="tx1"/>
-                </a:solidFill>
-                <a:latin typeface="+mj-lt"/>
-                <a:ea typeface="+mj-ea"/>
-                <a:cs typeface="Times New Roman" pitchFamily="18" charset="0"/>
-              </a:rPr>
-              <a:t>Платформа предназначена для учёта клиентов, мастеров, услуг и записей, </a:t>
+              <a:t>. Платформа предназначена для учёта клиентов, мастеров, услуг и записей, </a:t>
             </a:r>
             <a:r>
               <a:rPr lang="ru-RU" sz="2400" dirty="0" smtClean="0">
@@ -3506,14 +3521,7 @@
                 <a:latin typeface="Arial" pitchFamily="34" charset="0"/>
                 <a:cs typeface="Arial" pitchFamily="34" charset="0"/>
               </a:rPr>
-              <a:t>: </a:t>
-            </a:r>
-            <a:r>
-              <a:rPr lang="ru-RU" dirty="0" smtClean="0">
-                <a:latin typeface="Arial" pitchFamily="34" charset="0"/>
-                <a:cs typeface="Arial" pitchFamily="34" charset="0"/>
-              </a:rPr>
-              <a:t>Расписание и клиенты всегда под рукой.</a:t>
+              <a:t>: Расписание и клиенты всегда под рукой.</a:t>
             </a:r>
             <a:endParaRPr lang="en-US" dirty="0" smtClean="0">
               <a:latin typeface="Arial" pitchFamily="34" charset="0"/>
@@ -3526,14 +3534,7 @@
                 <a:latin typeface="Arial" pitchFamily="34" charset="0"/>
                 <a:cs typeface="Arial" pitchFamily="34" charset="0"/>
               </a:rPr>
-              <a:t>Возможность </a:t>
-            </a:r>
-            <a:r>
-              <a:rPr lang="ru-RU" b="1" dirty="0" smtClean="0">
-                <a:latin typeface="Arial" pitchFamily="34" charset="0"/>
-                <a:cs typeface="Arial" pitchFamily="34" charset="0"/>
-              </a:rPr>
-              <a:t>переориентации приложения</a:t>
+              <a:t>Возможность переориентации приложения</a:t>
             </a:r>
             <a:r>
               <a:rPr lang="ru-RU" dirty="0" smtClean="0">
@@ -3771,6 +3772,7 @@
           <a:bodyPr/>
           <a:lstStyle/>
           <a:p>
+            <a:pPr algn="ctr"/>
             <a:r>
               <a:rPr lang="ru-RU" dirty="0" smtClean="0">
                 <a:latin typeface="Arial" pitchFamily="34" charset="0"/>
@@ -3801,12 +3803,31 @@
             <p:ph idx="1"/>
           </p:nvPr>
         </p:nvSpPr>
-        <p:spPr/>
+        <p:spPr>
+          <a:xfrm>
+            <a:off x="3575050" y="836712"/>
+            <a:ext cx="5111750" cy="5289451"/>
+          </a:xfrm>
+        </p:spPr>
         <p:txBody>
           <a:bodyPr/>
           <a:lstStyle/>
           <a:p>
-            <a:endParaRPr lang="ru-RU" dirty="0">
+            <a:r>
+              <a:rPr lang="ru-RU" sz="2000" b="1" dirty="0" smtClean="0">
+                <a:latin typeface="Arial" pitchFamily="34" charset="0"/>
+                <a:cs typeface="Arial" pitchFamily="34" charset="0"/>
+              </a:rPr>
+              <a:t>БАЗА </a:t>
+            </a:r>
+            <a:r>
+              <a:rPr lang="ru-RU" sz="2000" b="1" dirty="0" smtClean="0">
+                <a:latin typeface="Arial" pitchFamily="34" charset="0"/>
+                <a:cs typeface="Arial" pitchFamily="34" charset="0"/>
+              </a:rPr>
+              <a:t>ДАННЫХ</a:t>
+            </a:r>
+            <a:endParaRPr lang="en-US" sz="2000" b="1" dirty="0" smtClean="0">
               <a:latin typeface="Arial" pitchFamily="34" charset="0"/>
               <a:cs typeface="Arial" pitchFamily="34" charset="0"/>
             </a:endParaRPr>
@@ -3835,15 +3856,13 @@
           </a:bodyPr>
           <a:lstStyle/>
           <a:p>
-            <a:pPr marL="342900" indent="-342900">
-              <a:buAutoNum type="arabicParenR"/>
-            </a:pPr>
-            <a:r>
-              <a:rPr lang="ru-RU" sz="1800" b="1" dirty="0" smtClean="0">
-                <a:latin typeface="Arial" pitchFamily="34" charset="0"/>
-                <a:cs typeface="Arial" pitchFamily="34" charset="0"/>
-              </a:rPr>
-              <a:t>БАЗА ДАННЫХ</a:t>
+            <a:pPr marL="342900" indent="-342900" algn="ctr"/>
+            <a:r>
+              <a:rPr lang="ru-RU" sz="2400" b="1" dirty="0" smtClean="0">
+                <a:latin typeface="Arial" pitchFamily="34" charset="0"/>
+                <a:cs typeface="Arial" pitchFamily="34" charset="0"/>
+              </a:rPr>
+              <a:t>Сущности</a:t>
             </a:r>
             <a:endParaRPr lang="en-US" sz="1800" b="1" dirty="0" smtClean="0">
               <a:latin typeface="Arial" pitchFamily="34" charset="0"/>
@@ -3855,13 +3874,1181 @@
               <a:buFont typeface="Arial" pitchFamily="34" charset="0"/>
               <a:buChar char="•"/>
             </a:pPr>
-            <a:endParaRPr lang="ru-RU" sz="1800" b="1" dirty="0" smtClean="0">
+            <a:r>
+              <a:rPr lang="en-US" sz="1800" b="1" dirty="0" err="1" smtClean="0">
+                <a:latin typeface="Arial" pitchFamily="34" charset="0"/>
+                <a:cs typeface="Arial" pitchFamily="34" charset="0"/>
+              </a:rPr>
+              <a:t>BaseEntity</a:t>
+            </a:r>
+            <a:endParaRPr lang="en-US" sz="1800" b="1" dirty="0" smtClean="0">
               <a:latin typeface="Arial" pitchFamily="34" charset="0"/>
               <a:cs typeface="Arial" pitchFamily="34" charset="0"/>
             </a:endParaRPr>
           </a:p>
-        </p:txBody>
-      </p:sp>
+          <a:p>
+            <a:pPr marL="342900" indent="-342900">
+              <a:buFont typeface="Arial" pitchFamily="34" charset="0"/>
+              <a:buChar char="•"/>
+            </a:pPr>
+            <a:endParaRPr lang="en-US" sz="1800" b="1" dirty="0" smtClean="0">
+              <a:latin typeface="Arial" pitchFamily="34" charset="0"/>
+              <a:cs typeface="Arial" pitchFamily="34" charset="0"/>
+            </a:endParaRPr>
+          </a:p>
+          <a:p>
+            <a:pPr marL="342900" indent="-342900">
+              <a:buFont typeface="Arial" pitchFamily="34" charset="0"/>
+              <a:buChar char="•"/>
+            </a:pPr>
+            <a:endParaRPr lang="en-US" sz="1800" b="1" dirty="0" smtClean="0">
+              <a:latin typeface="Arial" pitchFamily="34" charset="0"/>
+              <a:cs typeface="Arial" pitchFamily="34" charset="0"/>
+            </a:endParaRPr>
+          </a:p>
+          <a:p>
+            <a:pPr marL="342900" indent="-342900">
+              <a:buFont typeface="Arial" pitchFamily="34" charset="0"/>
+              <a:buChar char="•"/>
+            </a:pPr>
+            <a:endParaRPr lang="en-US" sz="1800" b="1" dirty="0" smtClean="0">
+              <a:latin typeface="Arial" pitchFamily="34" charset="0"/>
+              <a:cs typeface="Arial" pitchFamily="34" charset="0"/>
+            </a:endParaRPr>
+          </a:p>
+          <a:p>
+            <a:pPr marL="342900" indent="-342900">
+              <a:buFont typeface="Arial" pitchFamily="34" charset="0"/>
+              <a:buChar char="•"/>
+            </a:pPr>
+            <a:r>
+              <a:rPr lang="en-US" sz="1800" b="1" dirty="0" smtClean="0">
+                <a:latin typeface="Arial" pitchFamily="34" charset="0"/>
+                <a:cs typeface="Arial" pitchFamily="34" charset="0"/>
+              </a:rPr>
+              <a:t>Client</a:t>
+            </a:r>
+          </a:p>
+          <a:p>
+            <a:pPr marL="342900" indent="-342900">
+              <a:buFont typeface="Arial" pitchFamily="34" charset="0"/>
+              <a:buChar char="•"/>
+            </a:pPr>
+            <a:endParaRPr lang="en-US" sz="1800" b="1" dirty="0" smtClean="0">
+              <a:latin typeface="Arial" pitchFamily="34" charset="0"/>
+              <a:cs typeface="Arial" pitchFamily="34" charset="0"/>
+            </a:endParaRPr>
+          </a:p>
+          <a:p>
+            <a:pPr marL="342900" indent="-342900">
+              <a:buFont typeface="Arial" pitchFamily="34" charset="0"/>
+              <a:buChar char="•"/>
+            </a:pPr>
+            <a:endParaRPr lang="en-US" sz="1800" b="1" dirty="0" smtClean="0">
+              <a:latin typeface="Arial" pitchFamily="34" charset="0"/>
+              <a:cs typeface="Arial" pitchFamily="34" charset="0"/>
+            </a:endParaRPr>
+          </a:p>
+          <a:p>
+            <a:pPr marL="342900" indent="-342900">
+              <a:buFont typeface="Arial" pitchFamily="34" charset="0"/>
+              <a:buChar char="•"/>
+            </a:pPr>
+            <a:endParaRPr lang="en-US" sz="1800" b="1" dirty="0" smtClean="0">
+              <a:latin typeface="Arial" pitchFamily="34" charset="0"/>
+              <a:cs typeface="Arial" pitchFamily="34" charset="0"/>
+            </a:endParaRPr>
+          </a:p>
+          <a:p>
+            <a:pPr marL="342900" indent="-342900">
+              <a:buFont typeface="Arial" pitchFamily="34" charset="0"/>
+              <a:buChar char="•"/>
+            </a:pPr>
+            <a:endParaRPr lang="en-US" sz="1800" b="1" dirty="0" smtClean="0">
+              <a:latin typeface="Arial" pitchFamily="34" charset="0"/>
+              <a:cs typeface="Arial" pitchFamily="34" charset="0"/>
+            </a:endParaRPr>
+          </a:p>
+          <a:p>
+            <a:pPr marL="342900" indent="-342900">
+              <a:buFont typeface="Arial" pitchFamily="34" charset="0"/>
+              <a:buChar char="•"/>
+            </a:pPr>
+            <a:r>
+              <a:rPr lang="en-US" sz="1800" b="1" dirty="0" smtClean="0">
+                <a:latin typeface="Arial" pitchFamily="34" charset="0"/>
+                <a:cs typeface="Arial" pitchFamily="34" charset="0"/>
+              </a:rPr>
+              <a:t>Master</a:t>
+            </a:r>
+            <a:endParaRPr lang="en-US" sz="1800" b="1" dirty="0" smtClean="0">
+              <a:latin typeface="Arial" pitchFamily="34" charset="0"/>
+              <a:cs typeface="Arial" pitchFamily="34" charset="0"/>
+            </a:endParaRPr>
+          </a:p>
+          <a:p>
+            <a:pPr marL="342900" indent="-342900">
+              <a:buFont typeface="Arial" pitchFamily="34" charset="0"/>
+              <a:buChar char="•"/>
+            </a:pPr>
+            <a:endParaRPr lang="en-US" sz="1800" b="1" dirty="0" smtClean="0">
+              <a:latin typeface="Arial" pitchFamily="34" charset="0"/>
+              <a:cs typeface="Arial" pitchFamily="34" charset="0"/>
+            </a:endParaRPr>
+          </a:p>
+          <a:p>
+            <a:pPr marL="342900" indent="-342900">
+              <a:buFont typeface="Arial" pitchFamily="34" charset="0"/>
+              <a:buChar char="•"/>
+            </a:pPr>
+            <a:endParaRPr lang="en-US" sz="1800" b="1" dirty="0" smtClean="0">
+              <a:latin typeface="Arial" pitchFamily="34" charset="0"/>
+              <a:cs typeface="Arial" pitchFamily="34" charset="0"/>
+            </a:endParaRPr>
+          </a:p>
+        </p:txBody>
+      </p:sp>
+      <p:pic>
+        <p:nvPicPr>
+          <p:cNvPr id="1026" name="Picture 2"/>
+          <p:cNvPicPr>
+            <a:picLocks noChangeAspect="1" noChangeArrowheads="1"/>
+          </p:cNvPicPr>
+          <p:nvPr/>
+        </p:nvPicPr>
+        <p:blipFill>
+          <a:blip r:embed="rId2" cstate="print"/>
+          <a:srcRect/>
+          <a:stretch>
+            <a:fillRect/>
+          </a:stretch>
+        </p:blipFill>
+        <p:spPr bwMode="auto">
+          <a:xfrm>
+            <a:off x="3779912" y="2636912"/>
+            <a:ext cx="4889831" cy="1538708"/>
+          </a:xfrm>
+          <a:prstGeom prst="rect">
+            <a:avLst/>
+          </a:prstGeom>
+          <a:noFill/>
+          <a:ln w="9525">
+            <a:noFill/>
+            <a:miter lim="800000"/>
+            <a:headEnd/>
+            <a:tailEnd/>
+          </a:ln>
+          <a:effectLst/>
+        </p:spPr>
+      </p:pic>
+      <p:pic>
+        <p:nvPicPr>
+          <p:cNvPr id="1027" name="Picture 3"/>
+          <p:cNvPicPr>
+            <a:picLocks noChangeAspect="1" noChangeArrowheads="1"/>
+          </p:cNvPicPr>
+          <p:nvPr/>
+        </p:nvPicPr>
+        <p:blipFill>
+          <a:blip r:embed="rId3" cstate="print"/>
+          <a:srcRect/>
+          <a:stretch>
+            <a:fillRect/>
+          </a:stretch>
+        </p:blipFill>
+        <p:spPr bwMode="auto">
+          <a:xfrm>
+            <a:off x="3131840" y="4293096"/>
+            <a:ext cx="5873652" cy="2154573"/>
+          </a:xfrm>
+          <a:prstGeom prst="rect">
+            <a:avLst/>
+          </a:prstGeom>
+          <a:noFill/>
+          <a:ln w="9525">
+            <a:noFill/>
+            <a:miter lim="800000"/>
+            <a:headEnd/>
+            <a:tailEnd/>
+          </a:ln>
+          <a:effectLst/>
+        </p:spPr>
+      </p:pic>
+      <p:pic>
+        <p:nvPicPr>
+          <p:cNvPr id="1028" name="Picture 4"/>
+          <p:cNvPicPr>
+            <a:picLocks noChangeAspect="1" noChangeArrowheads="1"/>
+          </p:cNvPicPr>
+          <p:nvPr/>
+        </p:nvPicPr>
+        <p:blipFill>
+          <a:blip r:embed="rId4" cstate="print"/>
+          <a:srcRect/>
+          <a:stretch>
+            <a:fillRect/>
+          </a:stretch>
+        </p:blipFill>
+        <p:spPr bwMode="auto">
+          <a:xfrm>
+            <a:off x="3779912" y="1268760"/>
+            <a:ext cx="4645249" cy="1090158"/>
+          </a:xfrm>
+          <a:prstGeom prst="rect">
+            <a:avLst/>
+          </a:prstGeom>
+          <a:noFill/>
+          <a:ln w="9525">
+            <a:noFill/>
+            <a:miter lim="800000"/>
+            <a:headEnd/>
+            <a:tailEnd/>
+          </a:ln>
+          <a:effectLst/>
+        </p:spPr>
+      </p:pic>
+    </p:spTree>
+  </p:cSld>
+  <p:clrMapOvr>
+    <a:masterClrMapping/>
+  </p:clrMapOvr>
+</p:sld>
+</file>
+
+<file path=ppt/slides/slide4.xml><?xml version="1.0" encoding="utf-8"?>
+<p:sld xmlns:a="http://schemas.openxmlformats.org/drawingml/2006/main" xmlns:r="http://schemas.openxmlformats.org/officeDocument/2006/relationships" xmlns:p="http://schemas.openxmlformats.org/presentationml/2006/main">
+  <p:cSld>
+    <p:spTree>
+      <p:nvGrpSpPr>
+        <p:cNvPr id="1" name=""/>
+        <p:cNvGrpSpPr/>
+        <p:nvPr/>
+      </p:nvGrpSpPr>
+      <p:grpSpPr>
+        <a:xfrm>
+          <a:off x="0" y="0"/>
+          <a:ext cx="0" cy="0"/>
+          <a:chOff x="0" y="0"/>
+          <a:chExt cx="0" cy="0"/>
+        </a:xfrm>
+      </p:grpSpPr>
+      <p:sp>
+        <p:nvSpPr>
+          <p:cNvPr id="4" name="Текст 3"/>
+          <p:cNvSpPr>
+            <a:spLocks noGrp="1"/>
+          </p:cNvSpPr>
+          <p:nvPr>
+            <p:ph type="body" sz="half" idx="2"/>
+          </p:nvPr>
+        </p:nvSpPr>
+        <p:spPr>
+          <a:xfrm>
+            <a:off x="457201" y="332656"/>
+            <a:ext cx="2962672" cy="6336704"/>
+          </a:xfrm>
+        </p:spPr>
+        <p:txBody>
+          <a:bodyPr>
+            <a:noAutofit/>
+          </a:bodyPr>
+          <a:lstStyle/>
+          <a:p>
+            <a:pPr marL="342900" indent="-342900">
+              <a:buFont typeface="Arial" pitchFamily="34" charset="0"/>
+              <a:buChar char="•"/>
+            </a:pPr>
+            <a:r>
+              <a:rPr lang="en-US" sz="1800" b="1" dirty="0" smtClean="0">
+                <a:latin typeface="Arial" pitchFamily="34" charset="0"/>
+                <a:cs typeface="Arial" pitchFamily="34" charset="0"/>
+              </a:rPr>
+              <a:t>Service</a:t>
+            </a:r>
+          </a:p>
+          <a:p>
+            <a:pPr marL="342900" indent="-342900">
+              <a:buFont typeface="Arial" pitchFamily="34" charset="0"/>
+              <a:buChar char="•"/>
+            </a:pPr>
+            <a:endParaRPr lang="en-US" sz="1800" b="1" dirty="0" smtClean="0">
+              <a:latin typeface="Arial" pitchFamily="34" charset="0"/>
+              <a:cs typeface="Arial" pitchFamily="34" charset="0"/>
+            </a:endParaRPr>
+          </a:p>
+          <a:p>
+            <a:pPr marL="342900" indent="-342900">
+              <a:buFont typeface="Arial" pitchFamily="34" charset="0"/>
+              <a:buChar char="•"/>
+            </a:pPr>
+            <a:endParaRPr lang="en-US" sz="1800" b="1" dirty="0" smtClean="0">
+              <a:latin typeface="Arial" pitchFamily="34" charset="0"/>
+              <a:cs typeface="Arial" pitchFamily="34" charset="0"/>
+            </a:endParaRPr>
+          </a:p>
+          <a:p>
+            <a:pPr marL="342900" indent="-342900">
+              <a:buFont typeface="Arial" pitchFamily="34" charset="0"/>
+              <a:buChar char="•"/>
+            </a:pPr>
+            <a:endParaRPr lang="en-US" sz="1800" b="1" dirty="0" smtClean="0">
+              <a:latin typeface="Arial" pitchFamily="34" charset="0"/>
+              <a:cs typeface="Arial" pitchFamily="34" charset="0"/>
+            </a:endParaRPr>
+          </a:p>
+          <a:p>
+            <a:pPr marL="342900" indent="-342900">
+              <a:buFont typeface="Arial" pitchFamily="34" charset="0"/>
+              <a:buChar char="•"/>
+            </a:pPr>
+            <a:endParaRPr lang="en-US" sz="1800" b="1" dirty="0" smtClean="0">
+              <a:latin typeface="Arial" pitchFamily="34" charset="0"/>
+              <a:cs typeface="Arial" pitchFamily="34" charset="0"/>
+            </a:endParaRPr>
+          </a:p>
+          <a:p>
+            <a:pPr marL="342900" indent="-342900">
+              <a:buFont typeface="Arial" pitchFamily="34" charset="0"/>
+              <a:buChar char="•"/>
+            </a:pPr>
+            <a:r>
+              <a:rPr lang="en-US" sz="1800" b="1" dirty="0" smtClean="0">
+                <a:latin typeface="Arial" pitchFamily="34" charset="0"/>
+                <a:cs typeface="Arial" pitchFamily="34" charset="0"/>
+              </a:rPr>
+              <a:t>Appointment</a:t>
+            </a:r>
+          </a:p>
+          <a:p>
+            <a:pPr marL="342900" indent="-342900">
+              <a:buFont typeface="Arial" pitchFamily="34" charset="0"/>
+              <a:buChar char="•"/>
+            </a:pPr>
+            <a:endParaRPr lang="en-US" sz="1800" b="1" dirty="0" smtClean="0">
+              <a:latin typeface="Arial" pitchFamily="34" charset="0"/>
+              <a:cs typeface="Arial" pitchFamily="34" charset="0"/>
+            </a:endParaRPr>
+          </a:p>
+          <a:p>
+            <a:pPr marL="342900" indent="-342900">
+              <a:buFont typeface="Arial" pitchFamily="34" charset="0"/>
+              <a:buChar char="•"/>
+            </a:pPr>
+            <a:endParaRPr lang="en-US" sz="1800" b="1" dirty="0" smtClean="0">
+              <a:latin typeface="Arial" pitchFamily="34" charset="0"/>
+              <a:cs typeface="Arial" pitchFamily="34" charset="0"/>
+            </a:endParaRPr>
+          </a:p>
+          <a:p>
+            <a:pPr marL="342900" indent="-342900">
+              <a:buFont typeface="Arial" pitchFamily="34" charset="0"/>
+              <a:buChar char="•"/>
+            </a:pPr>
+            <a:endParaRPr lang="en-US" sz="1800" b="1" dirty="0" smtClean="0">
+              <a:latin typeface="Arial" pitchFamily="34" charset="0"/>
+              <a:cs typeface="Arial" pitchFamily="34" charset="0"/>
+            </a:endParaRPr>
+          </a:p>
+          <a:p>
+            <a:pPr marL="342900" indent="-342900">
+              <a:buFont typeface="Arial" pitchFamily="34" charset="0"/>
+              <a:buChar char="•"/>
+            </a:pPr>
+            <a:endParaRPr lang="en-US" sz="1800" b="1" dirty="0" smtClean="0">
+              <a:latin typeface="Arial" pitchFamily="34" charset="0"/>
+              <a:cs typeface="Arial" pitchFamily="34" charset="0"/>
+            </a:endParaRPr>
+          </a:p>
+          <a:p>
+            <a:pPr marL="342900" indent="-342900">
+              <a:buFont typeface="Arial" pitchFamily="34" charset="0"/>
+              <a:buChar char="•"/>
+            </a:pPr>
+            <a:r>
+              <a:rPr lang="en-US" sz="1800" b="1" dirty="0" smtClean="0">
+                <a:latin typeface="Arial" pitchFamily="34" charset="0"/>
+                <a:cs typeface="Arial" pitchFamily="34" charset="0"/>
+              </a:rPr>
+              <a:t>Appointment</a:t>
+            </a:r>
+          </a:p>
+          <a:p>
+            <a:pPr marL="342900" indent="-342900"/>
+            <a:r>
+              <a:rPr lang="en-US" sz="1800" b="1" dirty="0" smtClean="0">
+                <a:latin typeface="Arial" pitchFamily="34" charset="0"/>
+                <a:cs typeface="Arial" pitchFamily="34" charset="0"/>
+              </a:rPr>
+              <a:t>Service</a:t>
+            </a:r>
+          </a:p>
+          <a:p>
+            <a:pPr marL="342900" indent="-342900"/>
+            <a:endParaRPr lang="en-US" sz="1800" b="1" dirty="0" smtClean="0">
+              <a:latin typeface="Arial" pitchFamily="34" charset="0"/>
+              <a:cs typeface="Arial" pitchFamily="34" charset="0"/>
+            </a:endParaRPr>
+          </a:p>
+          <a:p>
+            <a:pPr marL="342900" indent="-342900"/>
+            <a:endParaRPr lang="en-US" sz="1800" b="1" dirty="0" smtClean="0">
+              <a:latin typeface="Arial" pitchFamily="34" charset="0"/>
+              <a:cs typeface="Arial" pitchFamily="34" charset="0"/>
+            </a:endParaRPr>
+          </a:p>
+          <a:p>
+            <a:pPr marL="342900" indent="-342900">
+              <a:buFont typeface="Arial" pitchFamily="34" charset="0"/>
+              <a:buChar char="•"/>
+            </a:pPr>
+            <a:r>
+              <a:rPr lang="en-US" sz="1800" b="1" dirty="0" smtClean="0">
+                <a:latin typeface="Arial" pitchFamily="34" charset="0"/>
+                <a:cs typeface="Arial" pitchFamily="34" charset="0"/>
+              </a:rPr>
+              <a:t>Master</a:t>
+            </a:r>
+          </a:p>
+          <a:p>
+            <a:pPr marL="342900" indent="-342900"/>
+            <a:r>
+              <a:rPr lang="en-US" sz="1800" b="1" dirty="0" smtClean="0">
+                <a:latin typeface="Arial" pitchFamily="34" charset="0"/>
+                <a:cs typeface="Arial" pitchFamily="34" charset="0"/>
+              </a:rPr>
+              <a:t>Service</a:t>
+            </a:r>
+          </a:p>
+          <a:p>
+            <a:pPr marL="342900" indent="-342900"/>
+            <a:endParaRPr lang="en-US" sz="1800" b="1" dirty="0" smtClean="0">
+              <a:latin typeface="Arial" pitchFamily="34" charset="0"/>
+              <a:cs typeface="Arial" pitchFamily="34" charset="0"/>
+            </a:endParaRPr>
+          </a:p>
+          <a:p>
+            <a:pPr marL="342900" indent="-342900">
+              <a:buFont typeface="Arial" pitchFamily="34" charset="0"/>
+              <a:buChar char="•"/>
+            </a:pPr>
+            <a:r>
+              <a:rPr lang="en-US" sz="1800" b="1" dirty="0" smtClean="0">
+                <a:latin typeface="Arial" pitchFamily="34" charset="0"/>
+                <a:cs typeface="Arial" pitchFamily="34" charset="0"/>
+              </a:rPr>
+              <a:t>Service Category</a:t>
+            </a:r>
+          </a:p>
+        </p:txBody>
+      </p:sp>
+      <p:pic>
+        <p:nvPicPr>
+          <p:cNvPr id="2051" name="Picture 3"/>
+          <p:cNvPicPr>
+            <a:picLocks noChangeAspect="1" noChangeArrowheads="1"/>
+          </p:cNvPicPr>
+          <p:nvPr/>
+        </p:nvPicPr>
+        <p:blipFill>
+          <a:blip r:embed="rId2" cstate="print"/>
+          <a:srcRect/>
+          <a:stretch>
+            <a:fillRect/>
+          </a:stretch>
+        </p:blipFill>
+        <p:spPr bwMode="auto">
+          <a:xfrm>
+            <a:off x="2915816" y="188640"/>
+            <a:ext cx="5273429" cy="1390387"/>
+          </a:xfrm>
+          <a:prstGeom prst="rect">
+            <a:avLst/>
+          </a:prstGeom>
+          <a:noFill/>
+          <a:ln w="9525">
+            <a:noFill/>
+            <a:miter lim="800000"/>
+            <a:headEnd/>
+            <a:tailEnd/>
+          </a:ln>
+          <a:effectLst/>
+        </p:spPr>
+      </p:pic>
+      <p:pic>
+        <p:nvPicPr>
+          <p:cNvPr id="2052" name="Picture 4"/>
+          <p:cNvPicPr>
+            <a:picLocks noGrp="1" noChangeAspect="1" noChangeArrowheads="1"/>
+          </p:cNvPicPr>
+          <p:nvPr>
+            <p:ph idx="1"/>
+          </p:nvPr>
+        </p:nvPicPr>
+        <p:blipFill>
+          <a:blip r:embed="rId3" cstate="print"/>
+          <a:srcRect/>
+          <a:stretch>
+            <a:fillRect/>
+          </a:stretch>
+        </p:blipFill>
+        <p:spPr bwMode="auto">
+          <a:xfrm>
+            <a:off x="2915816" y="1628800"/>
+            <a:ext cx="5328592" cy="1611940"/>
+          </a:xfrm>
+          <a:prstGeom prst="rect">
+            <a:avLst/>
+          </a:prstGeom>
+          <a:noFill/>
+          <a:ln w="9525">
+            <a:noFill/>
+            <a:miter lim="800000"/>
+            <a:headEnd/>
+            <a:tailEnd/>
+          </a:ln>
+          <a:effectLst/>
+        </p:spPr>
+      </p:pic>
+      <p:pic>
+        <p:nvPicPr>
+          <p:cNvPr id="2053" name="Picture 5"/>
+          <p:cNvPicPr>
+            <a:picLocks noChangeAspect="1" noChangeArrowheads="1"/>
+          </p:cNvPicPr>
+          <p:nvPr/>
+        </p:nvPicPr>
+        <p:blipFill>
+          <a:blip r:embed="rId4" cstate="print"/>
+          <a:srcRect/>
+          <a:stretch>
+            <a:fillRect/>
+          </a:stretch>
+        </p:blipFill>
+        <p:spPr bwMode="auto">
+          <a:xfrm>
+            <a:off x="2915816" y="3284984"/>
+            <a:ext cx="4941153" cy="1220789"/>
+          </a:xfrm>
+          <a:prstGeom prst="rect">
+            <a:avLst/>
+          </a:prstGeom>
+          <a:noFill/>
+          <a:ln w="9525">
+            <a:noFill/>
+            <a:miter lim="800000"/>
+            <a:headEnd/>
+            <a:tailEnd/>
+          </a:ln>
+          <a:effectLst/>
+        </p:spPr>
+      </p:pic>
+      <p:pic>
+        <p:nvPicPr>
+          <p:cNvPr id="2054" name="Picture 6"/>
+          <p:cNvPicPr>
+            <a:picLocks noChangeAspect="1" noChangeArrowheads="1"/>
+          </p:cNvPicPr>
+          <p:nvPr/>
+        </p:nvPicPr>
+        <p:blipFill>
+          <a:blip r:embed="rId5" cstate="print"/>
+          <a:srcRect/>
+          <a:stretch>
+            <a:fillRect/>
+          </a:stretch>
+        </p:blipFill>
+        <p:spPr bwMode="auto">
+          <a:xfrm>
+            <a:off x="2915816" y="4581128"/>
+            <a:ext cx="2546797" cy="1059287"/>
+          </a:xfrm>
+          <a:prstGeom prst="rect">
+            <a:avLst/>
+          </a:prstGeom>
+          <a:noFill/>
+          <a:ln w="9525">
+            <a:noFill/>
+            <a:miter lim="800000"/>
+            <a:headEnd/>
+            <a:tailEnd/>
+          </a:ln>
+          <a:effectLst/>
+        </p:spPr>
+      </p:pic>
+      <p:pic>
+        <p:nvPicPr>
+          <p:cNvPr id="2055" name="Picture 7"/>
+          <p:cNvPicPr>
+            <a:picLocks noChangeAspect="1" noChangeArrowheads="1"/>
+          </p:cNvPicPr>
+          <p:nvPr/>
+        </p:nvPicPr>
+        <p:blipFill>
+          <a:blip r:embed="rId6" cstate="print"/>
+          <a:srcRect/>
+          <a:stretch>
+            <a:fillRect/>
+          </a:stretch>
+        </p:blipFill>
+        <p:spPr bwMode="auto">
+          <a:xfrm>
+            <a:off x="2915816" y="5805264"/>
+            <a:ext cx="3460254" cy="792512"/>
+          </a:xfrm>
+          <a:prstGeom prst="rect">
+            <a:avLst/>
+          </a:prstGeom>
+          <a:noFill/>
+          <a:ln w="9525">
+            <a:noFill/>
+            <a:miter lim="800000"/>
+            <a:headEnd/>
+            <a:tailEnd/>
+          </a:ln>
+          <a:effectLst/>
+        </p:spPr>
+      </p:pic>
+    </p:spTree>
+  </p:cSld>
+  <p:clrMapOvr>
+    <a:masterClrMapping/>
+  </p:clrMapOvr>
+</p:sld>
+</file>
+
+<file path=ppt/slides/slide5.xml><?xml version="1.0" encoding="utf-8"?>
+<p:sld xmlns:a="http://schemas.openxmlformats.org/drawingml/2006/main" xmlns:r="http://schemas.openxmlformats.org/officeDocument/2006/relationships" xmlns:p="http://schemas.openxmlformats.org/presentationml/2006/main">
+  <p:cSld>
+    <p:spTree>
+      <p:nvGrpSpPr>
+        <p:cNvPr id="1" name=""/>
+        <p:cNvGrpSpPr/>
+        <p:nvPr/>
+      </p:nvGrpSpPr>
+      <p:grpSpPr>
+        <a:xfrm>
+          <a:off x="0" y="0"/>
+          <a:ext cx="0" cy="0"/>
+          <a:chOff x="0" y="0"/>
+          <a:chExt cx="0" cy="0"/>
+        </a:xfrm>
+      </p:grpSpPr>
+      <p:sp>
+        <p:nvSpPr>
+          <p:cNvPr id="2" name="Заголовок 1"/>
+          <p:cNvSpPr>
+            <a:spLocks noGrp="1"/>
+          </p:cNvSpPr>
+          <p:nvPr>
+            <p:ph type="title"/>
+          </p:nvPr>
+        </p:nvSpPr>
+        <p:spPr>
+          <a:xfrm>
+            <a:off x="457200" y="273050"/>
+            <a:ext cx="4402832" cy="779686"/>
+          </a:xfrm>
+        </p:spPr>
+        <p:txBody>
+          <a:bodyPr>
+            <a:noAutofit/>
+          </a:bodyPr>
+          <a:lstStyle/>
+          <a:p>
+            <a:pPr algn="ctr"/>
+            <a:r>
+              <a:rPr lang="ru-RU" sz="2800" dirty="0" smtClean="0">
+                <a:latin typeface="Arial" pitchFamily="34" charset="0"/>
+                <a:cs typeface="Arial" pitchFamily="34" charset="0"/>
+              </a:rPr>
+              <a:t>Схема базы данных</a:t>
+            </a:r>
+            <a:r>
+              <a:rPr lang="ru-RU" sz="2800" dirty="0" smtClean="0">
+                <a:latin typeface="Arial" pitchFamily="34" charset="0"/>
+                <a:cs typeface="Arial" pitchFamily="34" charset="0"/>
+              </a:rPr>
+              <a:t/>
+            </a:r>
+            <a:br>
+              <a:rPr lang="ru-RU" sz="2800" dirty="0" smtClean="0">
+                <a:latin typeface="Arial" pitchFamily="34" charset="0"/>
+                <a:cs typeface="Arial" pitchFamily="34" charset="0"/>
+              </a:rPr>
+            </a:br>
+            <a:endParaRPr lang="ru-RU" sz="2800" dirty="0"/>
+          </a:p>
+        </p:txBody>
+      </p:sp>
+      <p:sp>
+        <p:nvSpPr>
+          <p:cNvPr id="3" name="Содержимое 2"/>
+          <p:cNvSpPr>
+            <a:spLocks noGrp="1"/>
+          </p:cNvSpPr>
+          <p:nvPr>
+            <p:ph idx="1"/>
+          </p:nvPr>
+        </p:nvSpPr>
+        <p:spPr/>
+        <p:txBody>
+          <a:bodyPr/>
+          <a:lstStyle/>
+          <a:p>
+            <a:endParaRPr lang="ru-RU" sz="2400" dirty="0" smtClean="0"/>
+          </a:p>
+          <a:p>
+            <a:pPr algn="ctr"/>
+            <a:r>
+              <a:rPr lang="ru-RU" sz="2400" dirty="0" smtClean="0"/>
+              <a:t>Диаграмма БД</a:t>
+            </a:r>
+            <a:endParaRPr lang="ru-RU" dirty="0"/>
+          </a:p>
+        </p:txBody>
+      </p:sp>
+      <p:sp>
+        <p:nvSpPr>
+          <p:cNvPr id="4" name="Текст 3"/>
+          <p:cNvSpPr>
+            <a:spLocks noGrp="1"/>
+          </p:cNvSpPr>
+          <p:nvPr>
+            <p:ph type="body" sz="half" idx="2"/>
+          </p:nvPr>
+        </p:nvSpPr>
+        <p:spPr>
+          <a:xfrm>
+            <a:off x="179512" y="1124744"/>
+            <a:ext cx="4464496" cy="5051103"/>
+          </a:xfrm>
+        </p:spPr>
+        <p:txBody>
+          <a:bodyPr>
+            <a:normAutofit/>
+          </a:bodyPr>
+          <a:lstStyle/>
+          <a:p>
+            <a:r>
+              <a:rPr lang="ru-RU" dirty="0" smtClean="0">
+                <a:latin typeface="Arial" pitchFamily="34" charset="0"/>
+                <a:cs typeface="Arial" pitchFamily="34" charset="0"/>
+              </a:rPr>
+              <a:t>Таблица </a:t>
+            </a:r>
+            <a:r>
+              <a:rPr lang="en-US" dirty="0" smtClean="0">
+                <a:latin typeface="Arial" pitchFamily="34" charset="0"/>
+                <a:cs typeface="Arial" pitchFamily="34" charset="0"/>
+              </a:rPr>
+              <a:t>Clients</a:t>
+            </a:r>
+          </a:p>
+          <a:p>
+            <a:r>
+              <a:rPr lang="ru-RU" dirty="0" smtClean="0">
+                <a:latin typeface="Arial" pitchFamily="34" charset="0"/>
+                <a:cs typeface="Arial" pitchFamily="34" charset="0"/>
+              </a:rPr>
+              <a:t> (Клиенты)</a:t>
+            </a:r>
+          </a:p>
+          <a:p>
+            <a:r>
+              <a:rPr lang="ru-RU" dirty="0" smtClean="0">
+                <a:latin typeface="Arial" pitchFamily="34" charset="0"/>
+                <a:cs typeface="Arial" pitchFamily="34" charset="0"/>
+              </a:rPr>
+              <a:t>Таблица </a:t>
+            </a:r>
+            <a:r>
+              <a:rPr lang="en-US" dirty="0" smtClean="0">
+                <a:latin typeface="Arial" pitchFamily="34" charset="0"/>
+                <a:cs typeface="Arial" pitchFamily="34" charset="0"/>
+              </a:rPr>
+              <a:t>Masters</a:t>
+            </a:r>
+            <a:r>
+              <a:rPr lang="ru-RU" dirty="0" smtClean="0">
+                <a:latin typeface="Arial" pitchFamily="34" charset="0"/>
+                <a:cs typeface="Arial" pitchFamily="34" charset="0"/>
+              </a:rPr>
+              <a:t> </a:t>
+            </a:r>
+            <a:endParaRPr lang="en-US" dirty="0" smtClean="0">
+              <a:latin typeface="Arial" pitchFamily="34" charset="0"/>
+              <a:cs typeface="Arial" pitchFamily="34" charset="0"/>
+            </a:endParaRPr>
+          </a:p>
+          <a:p>
+            <a:r>
+              <a:rPr lang="ru-RU" dirty="0" smtClean="0">
+                <a:latin typeface="Arial" pitchFamily="34" charset="0"/>
+                <a:cs typeface="Arial" pitchFamily="34" charset="0"/>
+              </a:rPr>
+              <a:t>(Мастера)</a:t>
+            </a:r>
+          </a:p>
+          <a:p>
+            <a:r>
+              <a:rPr lang="ru-RU" dirty="0" smtClean="0">
+                <a:latin typeface="Arial" pitchFamily="34" charset="0"/>
+                <a:cs typeface="Arial" pitchFamily="34" charset="0"/>
+              </a:rPr>
+              <a:t>Таблица </a:t>
+            </a:r>
+            <a:r>
+              <a:rPr lang="en-US" dirty="0" smtClean="0">
+                <a:latin typeface="Arial" pitchFamily="34" charset="0"/>
+                <a:cs typeface="Arial" pitchFamily="34" charset="0"/>
+              </a:rPr>
+              <a:t>Services</a:t>
+            </a:r>
+          </a:p>
+          <a:p>
+            <a:r>
+              <a:rPr lang="ru-RU" dirty="0" smtClean="0">
+                <a:latin typeface="Arial" pitchFamily="34" charset="0"/>
+                <a:cs typeface="Arial" pitchFamily="34" charset="0"/>
+              </a:rPr>
+              <a:t> (Услуги)</a:t>
+            </a:r>
+          </a:p>
+          <a:p>
+            <a:r>
+              <a:rPr lang="ru-RU" dirty="0" smtClean="0">
+                <a:latin typeface="Arial" pitchFamily="34" charset="0"/>
+                <a:cs typeface="Arial" pitchFamily="34" charset="0"/>
+              </a:rPr>
+              <a:t>Таблица </a:t>
+            </a:r>
+            <a:r>
+              <a:rPr lang="en-US" dirty="0" smtClean="0">
+                <a:latin typeface="Arial" pitchFamily="34" charset="0"/>
+                <a:cs typeface="Arial" pitchFamily="34" charset="0"/>
+              </a:rPr>
+              <a:t>Appointments</a:t>
+            </a:r>
+            <a:r>
+              <a:rPr lang="ru-RU" dirty="0" smtClean="0">
+                <a:latin typeface="Arial" pitchFamily="34" charset="0"/>
+                <a:cs typeface="Arial" pitchFamily="34" charset="0"/>
+              </a:rPr>
+              <a:t> </a:t>
+            </a:r>
+            <a:endParaRPr lang="en-US" dirty="0" smtClean="0">
+              <a:latin typeface="Arial" pitchFamily="34" charset="0"/>
+              <a:cs typeface="Arial" pitchFamily="34" charset="0"/>
+            </a:endParaRPr>
+          </a:p>
+          <a:p>
+            <a:r>
+              <a:rPr lang="ru-RU" dirty="0" smtClean="0">
+                <a:latin typeface="Arial" pitchFamily="34" charset="0"/>
+                <a:cs typeface="Arial" pitchFamily="34" charset="0"/>
+              </a:rPr>
+              <a:t>(Записи </a:t>
+            </a:r>
+            <a:r>
+              <a:rPr lang="ru-RU" dirty="0" smtClean="0">
+                <a:latin typeface="Arial" pitchFamily="34" charset="0"/>
+                <a:cs typeface="Arial" pitchFamily="34" charset="0"/>
+              </a:rPr>
+              <a:t>на приём</a:t>
+            </a:r>
+            <a:r>
+              <a:rPr lang="ru-RU" dirty="0" smtClean="0">
+                <a:latin typeface="Arial" pitchFamily="34" charset="0"/>
+                <a:cs typeface="Arial" pitchFamily="34" charset="0"/>
+              </a:rPr>
+              <a:t>)</a:t>
+            </a:r>
+          </a:p>
+          <a:p>
+            <a:r>
+              <a:rPr lang="ru-RU" dirty="0" smtClean="0">
+                <a:latin typeface="Arial" pitchFamily="34" charset="0"/>
+                <a:cs typeface="Arial" pitchFamily="34" charset="0"/>
+              </a:rPr>
+              <a:t>Таблица </a:t>
+            </a:r>
+            <a:r>
+              <a:rPr lang="ru-RU" dirty="0" err="1" smtClean="0">
+                <a:latin typeface="Arial" pitchFamily="34" charset="0"/>
+                <a:cs typeface="Arial" pitchFamily="34" charset="0"/>
+              </a:rPr>
+              <a:t>AppointmentServices</a:t>
+            </a:r>
+            <a:r>
+              <a:rPr lang="ru-RU" dirty="0" smtClean="0">
+                <a:latin typeface="Arial" pitchFamily="34" charset="0"/>
+                <a:cs typeface="Arial" pitchFamily="34" charset="0"/>
+              </a:rPr>
+              <a:t> </a:t>
+            </a:r>
+            <a:endParaRPr lang="en-US" dirty="0" smtClean="0">
+              <a:latin typeface="Arial" pitchFamily="34" charset="0"/>
+              <a:cs typeface="Arial" pitchFamily="34" charset="0"/>
+            </a:endParaRPr>
+          </a:p>
+          <a:p>
+            <a:r>
+              <a:rPr lang="ru-RU" dirty="0" smtClean="0">
+                <a:latin typeface="Arial" pitchFamily="34" charset="0"/>
+                <a:cs typeface="Arial" pitchFamily="34" charset="0"/>
+              </a:rPr>
+              <a:t>(</a:t>
+            </a:r>
+            <a:r>
+              <a:rPr lang="ru-RU" dirty="0" smtClean="0">
+                <a:latin typeface="Arial" pitchFamily="34" charset="0"/>
+                <a:cs typeface="Arial" pitchFamily="34" charset="0"/>
+              </a:rPr>
+              <a:t>Услуги в </a:t>
+            </a:r>
+            <a:r>
+              <a:rPr lang="ru-RU" dirty="0" smtClean="0">
+                <a:latin typeface="Arial" pitchFamily="34" charset="0"/>
+                <a:cs typeface="Arial" pitchFamily="34" charset="0"/>
+              </a:rPr>
+              <a:t>записи)</a:t>
+            </a:r>
+          </a:p>
+          <a:p>
+            <a:r>
+              <a:rPr lang="ru-RU" dirty="0" smtClean="0">
+                <a:latin typeface="Arial" pitchFamily="34" charset="0"/>
+                <a:cs typeface="Arial" pitchFamily="34" charset="0"/>
+              </a:rPr>
+              <a:t>Таблица </a:t>
+            </a:r>
+            <a:r>
+              <a:rPr lang="ru-RU" dirty="0" err="1" smtClean="0">
+                <a:latin typeface="Arial" pitchFamily="34" charset="0"/>
+                <a:cs typeface="Arial" pitchFamily="34" charset="0"/>
+              </a:rPr>
+              <a:t>MasterServices</a:t>
+            </a:r>
+            <a:endParaRPr lang="en-US" dirty="0" smtClean="0">
+              <a:latin typeface="Arial" pitchFamily="34" charset="0"/>
+              <a:cs typeface="Arial" pitchFamily="34" charset="0"/>
+            </a:endParaRPr>
+          </a:p>
+          <a:p>
+            <a:r>
+              <a:rPr lang="ru-RU" dirty="0" smtClean="0">
+                <a:latin typeface="Arial" pitchFamily="34" charset="0"/>
+                <a:cs typeface="Arial" pitchFamily="34" charset="0"/>
+              </a:rPr>
+              <a:t> </a:t>
+            </a:r>
+            <a:r>
+              <a:rPr lang="ru-RU" dirty="0" smtClean="0">
+                <a:latin typeface="Arial" pitchFamily="34" charset="0"/>
+                <a:cs typeface="Arial" pitchFamily="34" charset="0"/>
+              </a:rPr>
+              <a:t>(Услуги </a:t>
+            </a:r>
+            <a:r>
+              <a:rPr lang="ru-RU" dirty="0" smtClean="0">
+                <a:latin typeface="Arial" pitchFamily="34" charset="0"/>
+                <a:cs typeface="Arial" pitchFamily="34" charset="0"/>
+              </a:rPr>
+              <a:t>мастера)</a:t>
+            </a:r>
+            <a:endParaRPr lang="en-US" dirty="0" smtClean="0">
+              <a:latin typeface="Arial" pitchFamily="34" charset="0"/>
+              <a:cs typeface="Arial" pitchFamily="34" charset="0"/>
+            </a:endParaRPr>
+          </a:p>
+          <a:p>
+            <a:r>
+              <a:rPr lang="ru-RU" dirty="0" smtClean="0">
+                <a:latin typeface="Arial" pitchFamily="34" charset="0"/>
+                <a:cs typeface="Arial" pitchFamily="34" charset="0"/>
+              </a:rPr>
+              <a:t>Таблица </a:t>
+            </a:r>
+            <a:r>
+              <a:rPr lang="en-US" dirty="0" err="1" smtClean="0">
+                <a:latin typeface="Arial" pitchFamily="34" charset="0"/>
+                <a:cs typeface="Arial" pitchFamily="34" charset="0"/>
+              </a:rPr>
+              <a:t>ServiceCategories</a:t>
+            </a:r>
+            <a:endParaRPr lang="en-US" dirty="0" smtClean="0">
+              <a:latin typeface="Arial" pitchFamily="34" charset="0"/>
+              <a:cs typeface="Arial" pitchFamily="34" charset="0"/>
+            </a:endParaRPr>
+          </a:p>
+          <a:p>
+            <a:r>
+              <a:rPr lang="en-US" dirty="0" smtClean="0">
+                <a:latin typeface="Arial" pitchFamily="34" charset="0"/>
+                <a:cs typeface="Arial" pitchFamily="34" charset="0"/>
+              </a:rPr>
+              <a:t>(</a:t>
+            </a:r>
+            <a:r>
+              <a:rPr lang="ru-RU" dirty="0" smtClean="0">
+                <a:latin typeface="Arial" pitchFamily="34" charset="0"/>
+                <a:cs typeface="Arial" pitchFamily="34" charset="0"/>
+              </a:rPr>
+              <a:t>Категории </a:t>
+            </a:r>
+            <a:r>
+              <a:rPr lang="ru-RU" dirty="0" smtClean="0">
+                <a:latin typeface="Arial" pitchFamily="34" charset="0"/>
+                <a:cs typeface="Arial" pitchFamily="34" charset="0"/>
+              </a:rPr>
+              <a:t>услуг</a:t>
+            </a:r>
+            <a:r>
+              <a:rPr lang="ru-RU" dirty="0" smtClean="0">
+                <a:latin typeface="Arial" pitchFamily="34" charset="0"/>
+                <a:cs typeface="Arial" pitchFamily="34" charset="0"/>
+              </a:rPr>
+              <a:t>)</a:t>
+            </a:r>
+            <a:endParaRPr lang="en-US" dirty="0" smtClean="0">
+              <a:latin typeface="Arial" pitchFamily="34" charset="0"/>
+              <a:cs typeface="Arial" pitchFamily="34" charset="0"/>
+            </a:endParaRPr>
+          </a:p>
+          <a:p>
+            <a:endParaRPr lang="ru-RU" dirty="0" smtClean="0">
+              <a:latin typeface="Arial" pitchFamily="34" charset="0"/>
+              <a:cs typeface="Arial" pitchFamily="34" charset="0"/>
+            </a:endParaRPr>
+          </a:p>
+          <a:p>
+            <a:r>
+              <a:rPr lang="en-US" dirty="0" smtClean="0">
+                <a:latin typeface="Arial" pitchFamily="34" charset="0"/>
+                <a:cs typeface="Arial" pitchFamily="34" charset="0"/>
+              </a:rPr>
+              <a:t>–&gt; </a:t>
+            </a:r>
+            <a:r>
+              <a:rPr lang="ru-RU" dirty="0" smtClean="0">
+                <a:latin typeface="Arial" pitchFamily="34" charset="0"/>
+                <a:cs typeface="Arial" pitchFamily="34" charset="0"/>
+              </a:rPr>
+              <a:t>далее </a:t>
+            </a:r>
+            <a:r>
+              <a:rPr lang="ru-RU" dirty="0" smtClean="0">
+                <a:latin typeface="Arial" pitchFamily="34" charset="0"/>
+                <a:cs typeface="Arial" pitchFamily="34" charset="0"/>
+              </a:rPr>
+              <a:t>для </a:t>
+            </a:r>
+            <a:r>
+              <a:rPr lang="en-US" dirty="0" smtClean="0">
+                <a:latin typeface="Arial" pitchFamily="34" charset="0"/>
+                <a:cs typeface="Arial" pitchFamily="34" charset="0"/>
+              </a:rPr>
+              <a:t>Telegram </a:t>
+            </a:r>
+          </a:p>
+          <a:p>
+            <a:r>
+              <a:rPr lang="ru-RU" dirty="0" smtClean="0">
+                <a:latin typeface="Arial" pitchFamily="34" charset="0"/>
+                <a:cs typeface="Arial" pitchFamily="34" charset="0"/>
+              </a:rPr>
+              <a:t>Таблица </a:t>
+            </a:r>
+            <a:r>
+              <a:rPr lang="en-US" dirty="0" smtClean="0">
+                <a:latin typeface="Arial" pitchFamily="34" charset="0"/>
+                <a:cs typeface="Arial" pitchFamily="34" charset="0"/>
+              </a:rPr>
+              <a:t>Users </a:t>
+            </a:r>
+            <a:endParaRPr lang="en-US" dirty="0" smtClean="0">
+              <a:latin typeface="Arial" pitchFamily="34" charset="0"/>
+              <a:cs typeface="Arial" pitchFamily="34" charset="0"/>
+            </a:endParaRPr>
+          </a:p>
+          <a:p>
+            <a:r>
+              <a:rPr lang="en-US" dirty="0" smtClean="0">
+                <a:latin typeface="Arial" pitchFamily="34" charset="0"/>
+                <a:cs typeface="Arial" pitchFamily="34" charset="0"/>
+              </a:rPr>
+              <a:t>(</a:t>
+            </a:r>
+            <a:r>
+              <a:rPr lang="ru-RU" dirty="0" smtClean="0">
+                <a:latin typeface="Arial" pitchFamily="34" charset="0"/>
+                <a:cs typeface="Arial" pitchFamily="34" charset="0"/>
+              </a:rPr>
+              <a:t>Пользователи </a:t>
+            </a:r>
+            <a:r>
+              <a:rPr lang="ru-RU" dirty="0" smtClean="0">
+                <a:latin typeface="Arial" pitchFamily="34" charset="0"/>
+                <a:cs typeface="Arial" pitchFamily="34" charset="0"/>
+              </a:rPr>
+              <a:t>системы</a:t>
+            </a:r>
+            <a:r>
+              <a:rPr lang="en-US" dirty="0" smtClean="0">
+                <a:latin typeface="Arial" pitchFamily="34" charset="0"/>
+                <a:cs typeface="Arial" pitchFamily="34" charset="0"/>
+              </a:rPr>
+              <a:t>)</a:t>
+            </a:r>
+          </a:p>
+          <a:p>
+            <a:r>
+              <a:rPr lang="ru-RU" dirty="0" smtClean="0">
+                <a:latin typeface="Arial" pitchFamily="34" charset="0"/>
+                <a:cs typeface="Arial" pitchFamily="34" charset="0"/>
+              </a:rPr>
+              <a:t> </a:t>
+            </a:r>
+            <a:endParaRPr lang="ru-RU" dirty="0">
+              <a:latin typeface="Arial" pitchFamily="34" charset="0"/>
+              <a:cs typeface="Arial" pitchFamily="34" charset="0"/>
+            </a:endParaRPr>
+          </a:p>
+        </p:txBody>
+      </p:sp>
+      <p:pic>
+        <p:nvPicPr>
+          <p:cNvPr id="3074" name="Picture 2"/>
+          <p:cNvPicPr>
+            <a:picLocks noChangeAspect="1" noChangeArrowheads="1"/>
+          </p:cNvPicPr>
+          <p:nvPr/>
+        </p:nvPicPr>
+        <p:blipFill>
+          <a:blip r:embed="rId2" cstate="print"/>
+          <a:srcRect/>
+          <a:stretch>
+            <a:fillRect/>
+          </a:stretch>
+        </p:blipFill>
+        <p:spPr bwMode="auto">
+          <a:xfrm>
+            <a:off x="3059832" y="1196752"/>
+            <a:ext cx="5688180" cy="4896544"/>
+          </a:xfrm>
+          <a:prstGeom prst="rect">
+            <a:avLst/>
+          </a:prstGeom>
+          <a:noFill/>
+          <a:ln w="9525">
+            <a:noFill/>
+            <a:miter lim="800000"/>
+            <a:headEnd/>
+            <a:tailEnd/>
+          </a:ln>
+          <a:effectLst/>
+        </p:spPr>
+      </p:pic>
     </p:spTree>
   </p:cSld>
   <p:clrMapOvr>

--- a/Проект «Маникюрная студия».pptx
+++ b/Проект «Маникюрная студия».pptx
@@ -7,9 +7,21 @@
   <p:sldIdLst>
     <p:sldId id="256" r:id="rId2"/>
     <p:sldId id="257" r:id="rId3"/>
-    <p:sldId id="258" r:id="rId4"/>
-    <p:sldId id="259" r:id="rId5"/>
-    <p:sldId id="260" r:id="rId6"/>
+    <p:sldId id="262" r:id="rId4"/>
+    <p:sldId id="263" r:id="rId5"/>
+    <p:sldId id="264" r:id="rId6"/>
+    <p:sldId id="258" r:id="rId7"/>
+    <p:sldId id="259" r:id="rId8"/>
+    <p:sldId id="260" r:id="rId9"/>
+    <p:sldId id="265" r:id="rId10"/>
+    <p:sldId id="266" r:id="rId11"/>
+    <p:sldId id="267" r:id="rId12"/>
+    <p:sldId id="268" r:id="rId13"/>
+    <p:sldId id="269" r:id="rId14"/>
+    <p:sldId id="270" r:id="rId15"/>
+    <p:sldId id="271" r:id="rId16"/>
+    <p:sldId id="272" r:id="rId17"/>
+    <p:sldId id="273" r:id="rId18"/>
   </p:sldIdLst>
   <p:sldSz cx="9144000" cy="6858000" type="screen4x3"/>
   <p:notesSz cx="6858000" cy="9144000"/>
@@ -293,7 +305,7 @@
             <a:fld id="{6940DC67-C7F6-414D-9708-96C5B560FED9}" type="datetimeFigureOut">
               <a:rPr lang="ru-RU" smtClean="0"/>
               <a:pPr/>
-              <a:t>06.06.2026</a:t>
+              <a:t>03.07.2026</a:t>
             </a:fld>
             <a:endParaRPr lang="ru-RU"/>
           </a:p>
@@ -460,7 +472,7 @@
             <a:fld id="{6940DC67-C7F6-414D-9708-96C5B560FED9}" type="datetimeFigureOut">
               <a:rPr lang="ru-RU" smtClean="0"/>
               <a:pPr/>
-              <a:t>06.06.2026</a:t>
+              <a:t>03.07.2026</a:t>
             </a:fld>
             <a:endParaRPr lang="ru-RU"/>
           </a:p>
@@ -637,7 +649,7 @@
             <a:fld id="{6940DC67-C7F6-414D-9708-96C5B560FED9}" type="datetimeFigureOut">
               <a:rPr lang="ru-RU" smtClean="0"/>
               <a:pPr/>
-              <a:t>06.06.2026</a:t>
+              <a:t>03.07.2026</a:t>
             </a:fld>
             <a:endParaRPr lang="ru-RU"/>
           </a:p>
@@ -804,7 +816,7 @@
             <a:fld id="{6940DC67-C7F6-414D-9708-96C5B560FED9}" type="datetimeFigureOut">
               <a:rPr lang="ru-RU" smtClean="0"/>
               <a:pPr/>
-              <a:t>06.06.2026</a:t>
+              <a:t>03.07.2026</a:t>
             </a:fld>
             <a:endParaRPr lang="ru-RU"/>
           </a:p>
@@ -1047,7 +1059,7 @@
             <a:fld id="{6940DC67-C7F6-414D-9708-96C5B560FED9}" type="datetimeFigureOut">
               <a:rPr lang="ru-RU" smtClean="0"/>
               <a:pPr/>
-              <a:t>06.06.2026</a:t>
+              <a:t>03.07.2026</a:t>
             </a:fld>
             <a:endParaRPr lang="ru-RU"/>
           </a:p>
@@ -1332,7 +1344,7 @@
             <a:fld id="{6940DC67-C7F6-414D-9708-96C5B560FED9}" type="datetimeFigureOut">
               <a:rPr lang="ru-RU" smtClean="0"/>
               <a:pPr/>
-              <a:t>06.06.2026</a:t>
+              <a:t>03.07.2026</a:t>
             </a:fld>
             <a:endParaRPr lang="ru-RU"/>
           </a:p>
@@ -1751,7 +1763,7 @@
             <a:fld id="{6940DC67-C7F6-414D-9708-96C5B560FED9}" type="datetimeFigureOut">
               <a:rPr lang="ru-RU" smtClean="0"/>
               <a:pPr/>
-              <a:t>06.06.2026</a:t>
+              <a:t>03.07.2026</a:t>
             </a:fld>
             <a:endParaRPr lang="ru-RU"/>
           </a:p>
@@ -1866,7 +1878,7 @@
             <a:fld id="{6940DC67-C7F6-414D-9708-96C5B560FED9}" type="datetimeFigureOut">
               <a:rPr lang="ru-RU" smtClean="0"/>
               <a:pPr/>
-              <a:t>06.06.2026</a:t>
+              <a:t>03.07.2026</a:t>
             </a:fld>
             <a:endParaRPr lang="ru-RU"/>
           </a:p>
@@ -1958,7 +1970,7 @@
             <a:fld id="{6940DC67-C7F6-414D-9708-96C5B560FED9}" type="datetimeFigureOut">
               <a:rPr lang="ru-RU" smtClean="0"/>
               <a:pPr/>
-              <a:t>06.06.2026</a:t>
+              <a:t>03.07.2026</a:t>
             </a:fld>
             <a:endParaRPr lang="ru-RU"/>
           </a:p>
@@ -2232,7 +2244,7 @@
             <a:fld id="{6940DC67-C7F6-414D-9708-96C5B560FED9}" type="datetimeFigureOut">
               <a:rPr lang="ru-RU" smtClean="0"/>
               <a:pPr/>
-              <a:t>06.06.2026</a:t>
+              <a:t>03.07.2026</a:t>
             </a:fld>
             <a:endParaRPr lang="ru-RU"/>
           </a:p>
@@ -2482,7 +2494,7 @@
             <a:fld id="{6940DC67-C7F6-414D-9708-96C5B560FED9}" type="datetimeFigureOut">
               <a:rPr lang="ru-RU" smtClean="0"/>
               <a:pPr/>
-              <a:t>06.06.2026</a:t>
+              <a:t>03.07.2026</a:t>
             </a:fld>
             <a:endParaRPr lang="ru-RU"/>
           </a:p>
@@ -2716,7 +2728,7 @@
             <a:fld id="{6940DC67-C7F6-414D-9708-96C5B560FED9}" type="datetimeFigureOut">
               <a:rPr lang="ru-RU" smtClean="0"/>
               <a:pPr/>
-              <a:t>06.06.2026</a:t>
+              <a:t>03.07.2026</a:t>
             </a:fld>
             <a:endParaRPr lang="ru-RU"/>
           </a:p>
@@ -3099,10 +3111,514 @@
         </p:nvSpPr>
         <p:spPr>
           <a:xfrm>
-            <a:off x="683568" y="1628800"/>
-            <a:ext cx="7772400" cy="1470025"/>
+            <a:off x="611560" y="0"/>
+            <a:ext cx="7772400" cy="1065361"/>
           </a:xfrm>
         </p:spPr>
+        <p:txBody>
+          <a:bodyPr>
+            <a:normAutofit fontScale="90000"/>
+          </a:bodyPr>
+          <a:lstStyle/>
+          <a:p>
+            <a:r>
+              <a:rPr lang="ru-RU" dirty="0" smtClean="0">
+                <a:latin typeface="Arial" pitchFamily="34" charset="0"/>
+                <a:cs typeface="Arial" pitchFamily="34" charset="0"/>
+              </a:rPr>
+              <a:t>Проект «Маникюрная студия»</a:t>
+            </a:r>
+            <a:endParaRPr lang="ru-RU" dirty="0">
+              <a:latin typeface="Arial" pitchFamily="34" charset="0"/>
+              <a:cs typeface="Arial" pitchFamily="34" charset="0"/>
+            </a:endParaRPr>
+          </a:p>
+        </p:txBody>
+      </p:sp>
+      <p:sp>
+        <p:nvSpPr>
+          <p:cNvPr id="3" name="Подзаголовок 2"/>
+          <p:cNvSpPr>
+            <a:spLocks noGrp="1"/>
+          </p:cNvSpPr>
+          <p:nvPr>
+            <p:ph type="subTitle" idx="1"/>
+          </p:nvPr>
+        </p:nvSpPr>
+        <p:spPr>
+          <a:xfrm>
+            <a:off x="323528" y="980728"/>
+            <a:ext cx="8568952" cy="5400600"/>
+          </a:xfrm>
+        </p:spPr>
+        <p:txBody>
+          <a:bodyPr>
+            <a:noAutofit/>
+          </a:bodyPr>
+          <a:lstStyle/>
+          <a:p>
+            <a:pPr algn="l"/>
+            <a:r>
+              <a:rPr lang="ru-RU" sz="2000" u="sng" dirty="0" smtClean="0">
+                <a:solidFill>
+                  <a:schemeClr val="tx1"/>
+                </a:solidFill>
+                <a:latin typeface="Arial" pitchFamily="34" charset="0"/>
+                <a:ea typeface="+mj-ea"/>
+                <a:cs typeface="Arial" pitchFamily="34" charset="0"/>
+              </a:rPr>
+              <a:t>Мой проект — это </a:t>
+            </a:r>
+            <a:r>
+              <a:rPr lang="en-US" sz="2000" u="sng" dirty="0" smtClean="0">
+                <a:solidFill>
+                  <a:schemeClr val="tx1"/>
+                </a:solidFill>
+                <a:latin typeface="Arial" pitchFamily="34" charset="0"/>
+                <a:ea typeface="+mj-ea"/>
+                <a:cs typeface="Arial" pitchFamily="34" charset="0"/>
+              </a:rPr>
+              <a:t>ASP.NET Core</a:t>
+            </a:r>
+            <a:r>
+              <a:rPr lang="ru-RU" sz="2000" u="sng" dirty="0" smtClean="0">
+                <a:solidFill>
+                  <a:schemeClr val="tx1"/>
+                </a:solidFill>
+                <a:latin typeface="Arial" pitchFamily="34" charset="0"/>
+                <a:ea typeface="+mj-ea"/>
+                <a:cs typeface="Arial" pitchFamily="34" charset="0"/>
+              </a:rPr>
+              <a:t> API и Telegram-бот</a:t>
+            </a:r>
+            <a:r>
+              <a:rPr lang="ru-RU" sz="2000" dirty="0" smtClean="0">
+                <a:solidFill>
+                  <a:schemeClr val="tx1"/>
+                </a:solidFill>
+                <a:latin typeface="Arial" pitchFamily="34" charset="0"/>
+                <a:ea typeface="+mj-ea"/>
+                <a:cs typeface="Arial" pitchFamily="34" charset="0"/>
+              </a:rPr>
+              <a:t>, которые вместе образуют систему для </a:t>
+            </a:r>
+            <a:r>
+              <a:rPr lang="ru-RU" sz="2000" dirty="0" err="1" smtClean="0">
+                <a:solidFill>
+                  <a:schemeClr val="tx1"/>
+                </a:solidFill>
+                <a:latin typeface="Arial" pitchFamily="34" charset="0"/>
+                <a:ea typeface="+mj-ea"/>
+                <a:cs typeface="Arial" pitchFamily="34" charset="0"/>
+              </a:rPr>
+              <a:t>бьюти-специалистов</a:t>
+            </a:r>
+            <a:r>
+              <a:rPr lang="ru-RU" sz="2000" dirty="0" smtClean="0">
+                <a:solidFill>
+                  <a:schemeClr val="tx1"/>
+                </a:solidFill>
+                <a:latin typeface="Arial" pitchFamily="34" charset="0"/>
+                <a:ea typeface="+mj-ea"/>
+                <a:cs typeface="Arial" pitchFamily="34" charset="0"/>
+              </a:rPr>
+              <a:t>. Актуальность продиктована тем, что в индустрии до сих пор большая часть записи происходит через телефон и </a:t>
+            </a:r>
+            <a:r>
+              <a:rPr lang="ru-RU" sz="2000" dirty="0" err="1" smtClean="0">
+                <a:solidFill>
+                  <a:schemeClr val="tx1"/>
+                </a:solidFill>
+                <a:latin typeface="Arial" pitchFamily="34" charset="0"/>
+                <a:ea typeface="+mj-ea"/>
+                <a:cs typeface="Arial" pitchFamily="34" charset="0"/>
+              </a:rPr>
+              <a:t>мессенджеры</a:t>
+            </a:r>
+            <a:r>
+              <a:rPr lang="ru-RU" sz="2000" dirty="0" smtClean="0">
+                <a:solidFill>
+                  <a:schemeClr val="tx1"/>
+                </a:solidFill>
+                <a:latin typeface="Arial" pitchFamily="34" charset="0"/>
+                <a:ea typeface="+mj-ea"/>
+                <a:cs typeface="Arial" pitchFamily="34" charset="0"/>
+              </a:rPr>
+              <a:t>, что отнимает массу времени у мастеров и клиентов. </a:t>
+            </a:r>
+          </a:p>
+          <a:p>
+            <a:pPr algn="l"/>
+            <a:r>
+              <a:rPr lang="ru-RU" sz="2000" dirty="0" smtClean="0">
+                <a:solidFill>
+                  <a:schemeClr val="tx1"/>
+                </a:solidFill>
+                <a:latin typeface="Arial" pitchFamily="34" charset="0"/>
+                <a:ea typeface="+mj-ea"/>
+                <a:cs typeface="Arial" pitchFamily="34" charset="0"/>
+              </a:rPr>
+              <a:t>На текущий момент платформа уже обеспечивает полный учет клиентов, мастеров, услуг и записей, а главное — позволяет клиенту записаться в один клик из Telegram.</a:t>
+            </a:r>
+            <a:endParaRPr lang="en-US" sz="2000" dirty="0" smtClean="0">
+              <a:solidFill>
+                <a:schemeClr val="tx1"/>
+              </a:solidFill>
+              <a:latin typeface="Arial" pitchFamily="34" charset="0"/>
+              <a:ea typeface="+mj-ea"/>
+              <a:cs typeface="Arial" pitchFamily="34" charset="0"/>
+            </a:endParaRPr>
+          </a:p>
+          <a:p>
+            <a:pPr algn="l"/>
+            <a:r>
+              <a:rPr lang="ru-RU" sz="2000" dirty="0" smtClean="0">
+                <a:solidFill>
+                  <a:schemeClr val="tx1"/>
+                </a:solidFill>
+                <a:latin typeface="Arial" pitchFamily="34" charset="0"/>
+                <a:ea typeface="+mj-ea"/>
+                <a:cs typeface="Arial" pitchFamily="34" charset="0"/>
+              </a:rPr>
+              <a:t>В ближайшем будущем </a:t>
+            </a:r>
+            <a:r>
+              <a:rPr lang="ru-RU" sz="2000" u="sng" dirty="0" smtClean="0">
+                <a:solidFill>
+                  <a:schemeClr val="tx1"/>
+                </a:solidFill>
+                <a:latin typeface="Arial" pitchFamily="34" charset="0"/>
+                <a:ea typeface="+mj-ea"/>
+                <a:cs typeface="Arial" pitchFamily="34" charset="0"/>
+              </a:rPr>
+              <a:t>функционал будет расширен</a:t>
+            </a:r>
+            <a:r>
+              <a:rPr lang="ru-RU" sz="2000" dirty="0" smtClean="0">
+                <a:solidFill>
+                  <a:schemeClr val="tx1"/>
+                </a:solidFill>
+                <a:latin typeface="Arial" pitchFamily="34" charset="0"/>
+                <a:ea typeface="+mj-ea"/>
+                <a:cs typeface="Arial" pitchFamily="34" charset="0"/>
+              </a:rPr>
+              <a:t>: </a:t>
+            </a:r>
+            <a:endParaRPr lang="en-US" sz="2000" dirty="0" smtClean="0">
+              <a:solidFill>
+                <a:schemeClr val="tx1"/>
+              </a:solidFill>
+              <a:latin typeface="Arial" pitchFamily="34" charset="0"/>
+              <a:ea typeface="+mj-ea"/>
+              <a:cs typeface="Arial" pitchFamily="34" charset="0"/>
+            </a:endParaRPr>
+          </a:p>
+          <a:p>
+            <a:pPr algn="l">
+              <a:buFontTx/>
+              <a:buChar char="-"/>
+            </a:pPr>
+            <a:r>
+              <a:rPr lang="ru-RU" sz="2000" dirty="0" smtClean="0">
+                <a:solidFill>
+                  <a:schemeClr val="tx1"/>
+                </a:solidFill>
+                <a:latin typeface="Arial" pitchFamily="34" charset="0"/>
+                <a:ea typeface="+mj-ea"/>
+                <a:cs typeface="Arial" pitchFamily="34" charset="0"/>
+              </a:rPr>
+              <a:t>добавятся автоматические уведомления, </a:t>
+            </a:r>
+            <a:endParaRPr lang="en-US" sz="2000" dirty="0" smtClean="0">
+              <a:solidFill>
+                <a:schemeClr val="tx1"/>
+              </a:solidFill>
+              <a:latin typeface="Arial" pitchFamily="34" charset="0"/>
+              <a:ea typeface="+mj-ea"/>
+              <a:cs typeface="Arial" pitchFamily="34" charset="0"/>
+            </a:endParaRPr>
+          </a:p>
+          <a:p>
+            <a:pPr algn="l">
+              <a:buFontTx/>
+              <a:buChar char="-"/>
+            </a:pPr>
+            <a:r>
+              <a:rPr lang="ru-RU" sz="2000" dirty="0" smtClean="0">
+                <a:solidFill>
+                  <a:schemeClr val="tx1"/>
+                </a:solidFill>
+                <a:latin typeface="Arial" pitchFamily="34" charset="0"/>
+                <a:ea typeface="+mj-ea"/>
+                <a:cs typeface="Arial" pitchFamily="34" charset="0"/>
+              </a:rPr>
+              <a:t>синхронизация с календарем</a:t>
+            </a:r>
+            <a:r>
+              <a:rPr lang="en-US" sz="2000" dirty="0" smtClean="0">
+                <a:solidFill>
+                  <a:schemeClr val="tx1"/>
+                </a:solidFill>
+                <a:latin typeface="Arial" pitchFamily="34" charset="0"/>
+                <a:ea typeface="+mj-ea"/>
+                <a:cs typeface="Arial" pitchFamily="34" charset="0"/>
+              </a:rPr>
+              <a:t>,</a:t>
+            </a:r>
+          </a:p>
+          <a:p>
+            <a:pPr algn="l">
+              <a:buFontTx/>
+              <a:buChar char="-"/>
+            </a:pPr>
+            <a:r>
+              <a:rPr lang="ru-RU" sz="2000" dirty="0" smtClean="0">
+                <a:solidFill>
+                  <a:schemeClr val="tx1"/>
+                </a:solidFill>
+                <a:latin typeface="Arial" pitchFamily="34" charset="0"/>
+                <a:ea typeface="+mj-ea"/>
+                <a:cs typeface="Arial" pitchFamily="34" charset="0"/>
+              </a:rPr>
+              <a:t>резервное копирование данных.</a:t>
+            </a:r>
+            <a:endParaRPr lang="en-US" sz="2000" dirty="0" smtClean="0">
+              <a:solidFill>
+                <a:schemeClr val="tx1"/>
+              </a:solidFill>
+              <a:latin typeface="Arial" pitchFamily="34" charset="0"/>
+              <a:ea typeface="+mj-ea"/>
+              <a:cs typeface="Arial" pitchFamily="34" charset="0"/>
+            </a:endParaRPr>
+          </a:p>
+          <a:p>
+            <a:pPr algn="l"/>
+            <a:r>
+              <a:rPr lang="ru-RU" sz="2000" b="1" dirty="0" smtClean="0">
+                <a:solidFill>
+                  <a:schemeClr val="tx1"/>
+                </a:solidFill>
+                <a:latin typeface="Arial" pitchFamily="34" charset="0"/>
+                <a:ea typeface="+mj-ea"/>
+                <a:cs typeface="Arial" pitchFamily="34" charset="0"/>
+              </a:rPr>
+              <a:t>Ключевым преимуществом </a:t>
+            </a:r>
+            <a:r>
+              <a:rPr lang="ru-RU" sz="2000" dirty="0" smtClean="0">
+                <a:solidFill>
+                  <a:schemeClr val="tx1"/>
+                </a:solidFill>
+                <a:latin typeface="Arial" pitchFamily="34" charset="0"/>
+                <a:ea typeface="+mj-ea"/>
+                <a:cs typeface="Arial" pitchFamily="34" charset="0"/>
+              </a:rPr>
+              <a:t>является REST API. Он позволяет легко интегрировать систему с внешними сервисами</a:t>
+            </a:r>
+          </a:p>
+          <a:p>
+            <a:pPr algn="l"/>
+            <a:r>
+              <a:rPr lang="ru-RU" sz="2000" dirty="0" smtClean="0">
+                <a:solidFill>
+                  <a:schemeClr val="tx1"/>
+                </a:solidFill>
+                <a:latin typeface="Arial" pitchFamily="34" charset="0"/>
+                <a:ea typeface="+mj-ea"/>
+                <a:cs typeface="Arial" pitchFamily="34" charset="0"/>
+              </a:rPr>
+              <a:t>(</a:t>
+            </a:r>
+            <a:r>
+              <a:rPr lang="ru-RU" sz="2000" dirty="0" err="1" smtClean="0">
+                <a:solidFill>
+                  <a:schemeClr val="tx1"/>
+                </a:solidFill>
+                <a:latin typeface="Arial" pitchFamily="34" charset="0"/>
+                <a:ea typeface="+mj-ea"/>
+                <a:cs typeface="Arial" pitchFamily="34" charset="0"/>
+              </a:rPr>
+              <a:t>веб-сайт</a:t>
+            </a:r>
+            <a:r>
+              <a:rPr lang="ru-RU" sz="2000" dirty="0" smtClean="0">
+                <a:solidFill>
+                  <a:schemeClr val="tx1"/>
+                </a:solidFill>
+                <a:latin typeface="Arial" pitchFamily="34" charset="0"/>
+                <a:ea typeface="+mj-ea"/>
+                <a:cs typeface="Arial" pitchFamily="34" charset="0"/>
+              </a:rPr>
+              <a:t>, </a:t>
+            </a:r>
+            <a:r>
+              <a:rPr lang="ru-RU" sz="2000" dirty="0" err="1" smtClean="0">
+                <a:solidFill>
+                  <a:schemeClr val="tx1"/>
+                </a:solidFill>
+                <a:latin typeface="Arial" pitchFamily="34" charset="0"/>
+                <a:ea typeface="+mj-ea"/>
+                <a:cs typeface="Arial" pitchFamily="34" charset="0"/>
+              </a:rPr>
+              <a:t>моб.приложение</a:t>
+            </a:r>
+            <a:r>
+              <a:rPr lang="ru-RU" sz="2000" dirty="0" smtClean="0">
+                <a:solidFill>
+                  <a:schemeClr val="tx1"/>
+                </a:solidFill>
+                <a:latin typeface="Arial" pitchFamily="34" charset="0"/>
+                <a:ea typeface="+mj-ea"/>
+                <a:cs typeface="Arial" pitchFamily="34" charset="0"/>
+              </a:rPr>
+              <a:t> и </a:t>
+            </a:r>
+            <a:r>
+              <a:rPr lang="ru-RU" sz="2000" dirty="0" err="1" smtClean="0">
+                <a:solidFill>
+                  <a:schemeClr val="tx1"/>
+                </a:solidFill>
+                <a:latin typeface="Arial" pitchFamily="34" charset="0"/>
+                <a:ea typeface="+mj-ea"/>
+                <a:cs typeface="Arial" pitchFamily="34" charset="0"/>
+              </a:rPr>
+              <a:t>тп</a:t>
+            </a:r>
+            <a:r>
+              <a:rPr lang="ru-RU" sz="2000" dirty="0" smtClean="0">
+                <a:solidFill>
+                  <a:schemeClr val="tx1"/>
+                </a:solidFill>
+                <a:latin typeface="Arial" pitchFamily="34" charset="0"/>
+                <a:ea typeface="+mj-ea"/>
+                <a:cs typeface="Arial" pitchFamily="34" charset="0"/>
+              </a:rPr>
+              <a:t>).</a:t>
+            </a:r>
+          </a:p>
+          <a:p>
+            <a:pPr algn="l"/>
+            <a:r>
+              <a:rPr lang="ru-RU" sz="2000" b="1" dirty="0" smtClean="0">
+                <a:solidFill>
+                  <a:schemeClr val="tx1"/>
+                </a:solidFill>
+                <a:latin typeface="Arial" pitchFamily="34" charset="0"/>
+                <a:ea typeface="+mj-ea"/>
+                <a:cs typeface="Arial" pitchFamily="34" charset="0"/>
+              </a:rPr>
+              <a:t>Главная цель </a:t>
+            </a:r>
+            <a:r>
+              <a:rPr lang="ru-RU" sz="2000" dirty="0" smtClean="0">
+                <a:solidFill>
+                  <a:schemeClr val="tx1"/>
+                </a:solidFill>
+                <a:latin typeface="Arial" pitchFamily="34" charset="0"/>
+                <a:ea typeface="+mj-ea"/>
+                <a:cs typeface="Arial" pitchFamily="34" charset="0"/>
+              </a:rPr>
+              <a:t>— дать клиенту возможность записаться самостоятельно, в любое время суток и разгрузить мастера.</a:t>
+            </a:r>
+            <a:endParaRPr lang="ru-RU" sz="2000" dirty="0">
+              <a:solidFill>
+                <a:schemeClr val="tx1"/>
+              </a:solidFill>
+              <a:latin typeface="Arial" pitchFamily="34" charset="0"/>
+              <a:ea typeface="+mj-ea"/>
+              <a:cs typeface="Arial" pitchFamily="34" charset="0"/>
+            </a:endParaRPr>
+          </a:p>
+        </p:txBody>
+      </p:sp>
+    </p:spTree>
+  </p:cSld>
+  <p:clrMapOvr>
+    <a:masterClrMapping/>
+  </p:clrMapOvr>
+</p:sld>
+</file>
+
+<file path=ppt/slides/slide10.xml><?xml version="1.0" encoding="utf-8"?>
+<p:sld xmlns:a="http://schemas.openxmlformats.org/drawingml/2006/main" xmlns:r="http://schemas.openxmlformats.org/officeDocument/2006/relationships" xmlns:p="http://schemas.openxmlformats.org/presentationml/2006/main">
+  <p:cSld>
+    <p:spTree>
+      <p:nvGrpSpPr>
+        <p:cNvPr id="1" name=""/>
+        <p:cNvGrpSpPr/>
+        <p:nvPr/>
+      </p:nvGrpSpPr>
+      <p:grpSpPr>
+        <a:xfrm>
+          <a:off x="0" y="0"/>
+          <a:ext cx="0" cy="0"/>
+          <a:chOff x="0" y="0"/>
+          <a:chExt cx="0" cy="0"/>
+        </a:xfrm>
+      </p:grpSpPr>
+      <p:sp>
+        <p:nvSpPr>
+          <p:cNvPr id="2" name="Заголовок 1"/>
+          <p:cNvSpPr>
+            <a:spLocks noGrp="1"/>
+          </p:cNvSpPr>
+          <p:nvPr>
+            <p:ph type="title"/>
+          </p:nvPr>
+        </p:nvSpPr>
+        <p:spPr>
+          <a:xfrm>
+            <a:off x="457200" y="273050"/>
+            <a:ext cx="3008313" cy="491654"/>
+          </a:xfrm>
+        </p:spPr>
+        <p:txBody>
+          <a:bodyPr/>
+          <a:lstStyle/>
+          <a:p>
+            <a:r>
+              <a:rPr lang="en-US" dirty="0" err="1" smtClean="0">
+                <a:latin typeface="Arial" pitchFamily="34" charset="0"/>
+                <a:cs typeface="Arial" pitchFamily="34" charset="0"/>
+              </a:rPr>
+              <a:t>ClientsController</a:t>
+            </a:r>
+            <a:endParaRPr lang="ru-RU" dirty="0">
+              <a:latin typeface="Arial" pitchFamily="34" charset="0"/>
+              <a:cs typeface="Arial" pitchFamily="34" charset="0"/>
+            </a:endParaRPr>
+          </a:p>
+        </p:txBody>
+      </p:sp>
+      <p:sp>
+        <p:nvSpPr>
+          <p:cNvPr id="3" name="Содержимое 2"/>
+          <p:cNvSpPr>
+            <a:spLocks noGrp="1"/>
+          </p:cNvSpPr>
+          <p:nvPr>
+            <p:ph idx="1"/>
+          </p:nvPr>
+        </p:nvSpPr>
+        <p:spPr>
+          <a:xfrm>
+            <a:off x="4788024" y="188640"/>
+            <a:ext cx="4104456" cy="6408712"/>
+          </a:xfrm>
+          <a:noFill/>
+        </p:spPr>
+        <p:style>
+          <a:lnRef idx="0">
+            <a:scrgbClr r="0" g="0" b="0"/>
+          </a:lnRef>
+          <a:fillRef idx="1003">
+            <a:schemeClr val="lt1"/>
+          </a:fillRef>
+          <a:effectRef idx="0">
+            <a:scrgbClr r="0" g="0" b="0"/>
+          </a:effectRef>
+          <a:fontRef idx="major"/>
+        </p:style>
         <p:txBody>
           <a:bodyPr>
             <a:normAutofit/>
@@ -3110,31 +3626,1988 @@
           <a:lstStyle/>
           <a:p>
             <a:r>
-              <a:rPr lang="ru-RU" dirty="0" smtClean="0">
-                <a:cs typeface="Times New Roman" pitchFamily="18" charset="0"/>
-              </a:rPr>
-              <a:t>Проект «Маникюрная студия»</a:t>
-            </a:r>
-            <a:endParaRPr lang="ru-RU" dirty="0">
-              <a:cs typeface="Times New Roman" pitchFamily="18" charset="0"/>
-            </a:endParaRPr>
-          </a:p>
-        </p:txBody>
-      </p:sp>
-      <p:sp>
-        <p:nvSpPr>
-          <p:cNvPr id="3" name="Подзаголовок 2"/>
+              <a:rPr lang="en-US" sz="1800" dirty="0" smtClean="0">
+                <a:latin typeface="Arial" pitchFamily="34" charset="0"/>
+                <a:cs typeface="Arial" pitchFamily="34" charset="0"/>
+                <a:hlinkClick r:id="rId2" action="ppaction://hlinkfile"/>
+              </a:rPr>
+              <a:t>Post</a:t>
+            </a:r>
+            <a:endParaRPr lang="en-US" sz="1800" dirty="0" smtClean="0">
+              <a:latin typeface="Arial" pitchFamily="34" charset="0"/>
+              <a:cs typeface="Arial" pitchFamily="34" charset="0"/>
+            </a:endParaRPr>
+          </a:p>
+          <a:p>
+            <a:endParaRPr lang="en-US" sz="1800" dirty="0" smtClean="0">
+              <a:latin typeface="Arial" pitchFamily="34" charset="0"/>
+              <a:cs typeface="Arial" pitchFamily="34" charset="0"/>
+            </a:endParaRPr>
+          </a:p>
+          <a:p>
+            <a:endParaRPr lang="en-US" sz="1800" dirty="0" smtClean="0">
+              <a:latin typeface="Arial" pitchFamily="34" charset="0"/>
+              <a:cs typeface="Arial" pitchFamily="34" charset="0"/>
+            </a:endParaRPr>
+          </a:p>
+          <a:p>
+            <a:endParaRPr lang="en-US" sz="1800" dirty="0" smtClean="0">
+              <a:latin typeface="Arial" pitchFamily="34" charset="0"/>
+              <a:cs typeface="Arial" pitchFamily="34" charset="0"/>
+            </a:endParaRPr>
+          </a:p>
+          <a:p>
+            <a:r>
+              <a:rPr lang="ru-RU" sz="1800" dirty="0" smtClean="0">
+                <a:latin typeface="Arial" pitchFamily="34" charset="0"/>
+                <a:cs typeface="Arial" pitchFamily="34" charset="0"/>
+                <a:hlinkClick r:id="rId3" action="ppaction://hlinkfile"/>
+              </a:rPr>
+              <a:t>Клиент 2</a:t>
+            </a:r>
+            <a:endParaRPr lang="en-US" sz="1800" dirty="0" smtClean="0">
+              <a:latin typeface="Arial" pitchFamily="34" charset="0"/>
+              <a:cs typeface="Arial" pitchFamily="34" charset="0"/>
+            </a:endParaRPr>
+          </a:p>
+          <a:p>
+            <a:pPr>
+              <a:buNone/>
+            </a:pPr>
+            <a:endParaRPr lang="en-US" sz="1800" dirty="0" smtClean="0">
+              <a:latin typeface="Arial" pitchFamily="34" charset="0"/>
+              <a:cs typeface="Arial" pitchFamily="34" charset="0"/>
+            </a:endParaRPr>
+          </a:p>
+          <a:p>
+            <a:r>
+              <a:rPr lang="en-US" sz="1800" dirty="0" smtClean="0">
+                <a:latin typeface="Arial" pitchFamily="34" charset="0"/>
+                <a:cs typeface="Arial" pitchFamily="34" charset="0"/>
+                <a:hlinkClick r:id="rId4" action="ppaction://hlinkfile"/>
+              </a:rPr>
+              <a:t>Put</a:t>
+            </a:r>
+            <a:endParaRPr lang="ru-RU" sz="1800" dirty="0" smtClean="0">
+              <a:latin typeface="Arial" pitchFamily="34" charset="0"/>
+              <a:cs typeface="Arial" pitchFamily="34" charset="0"/>
+            </a:endParaRPr>
+          </a:p>
+          <a:p>
+            <a:endParaRPr lang="ru-RU" sz="1800" dirty="0" smtClean="0">
+              <a:latin typeface="Arial" pitchFamily="34" charset="0"/>
+              <a:cs typeface="Arial" pitchFamily="34" charset="0"/>
+            </a:endParaRPr>
+          </a:p>
+          <a:p>
+            <a:r>
+              <a:rPr lang="en-US" sz="1800" dirty="0" smtClean="0">
+                <a:latin typeface="Arial" pitchFamily="34" charset="0"/>
+                <a:cs typeface="Arial" pitchFamily="34" charset="0"/>
+                <a:hlinkClick r:id="rId3" action="ppaction://hlinkfile"/>
+              </a:rPr>
+              <a:t>DELETE</a:t>
+            </a:r>
+            <a:endParaRPr lang="ru-RU" sz="1800" dirty="0" smtClean="0">
+              <a:latin typeface="Arial" pitchFamily="34" charset="0"/>
+              <a:cs typeface="Arial" pitchFamily="34" charset="0"/>
+            </a:endParaRPr>
+          </a:p>
+        </p:txBody>
+      </p:sp>
+      <p:sp>
+        <p:nvSpPr>
+          <p:cNvPr id="4" name="Текст 3"/>
           <p:cNvSpPr>
             <a:spLocks noGrp="1"/>
           </p:cNvSpPr>
           <p:nvPr>
-            <p:ph type="subTitle" idx="1"/>
+            <p:ph type="body" sz="half" idx="2"/>
           </p:nvPr>
         </p:nvSpPr>
         <p:spPr>
           <a:xfrm>
-            <a:off x="683568" y="3501008"/>
-            <a:ext cx="7848872" cy="2664296"/>
+            <a:off x="323528" y="836712"/>
+            <a:ext cx="4248472" cy="5289451"/>
+          </a:xfrm>
+        </p:spPr>
+        <p:txBody>
+          <a:bodyPr/>
+          <a:lstStyle/>
+          <a:p>
+            <a:pPr algn="just"/>
+            <a:r>
+              <a:rPr lang="en-US" sz="1600" dirty="0" err="1" smtClean="0">
+                <a:latin typeface="Arial" pitchFamily="34" charset="0"/>
+                <a:cs typeface="Arial" pitchFamily="34" charset="0"/>
+              </a:rPr>
+              <a:t>[HttpGet</a:t>
+            </a:r>
+            <a:r>
+              <a:rPr lang="en-US" sz="1600" dirty="0" smtClean="0">
+                <a:latin typeface="Arial" pitchFamily="34" charset="0"/>
+                <a:cs typeface="Arial" pitchFamily="34" charset="0"/>
+              </a:rPr>
+              <a:t>]</a:t>
+            </a:r>
+            <a:r>
+              <a:rPr lang="ru-RU" dirty="0" smtClean="0">
+                <a:latin typeface="Arial" pitchFamily="34" charset="0"/>
+                <a:cs typeface="Arial" pitchFamily="34" charset="0"/>
+              </a:rPr>
+              <a:t>		                  </a:t>
+            </a:r>
+            <a:r>
+              <a:rPr lang="en-US" dirty="0" smtClean="0">
+                <a:latin typeface="Arial" pitchFamily="34" charset="0"/>
+                <a:cs typeface="Arial" pitchFamily="34" charset="0"/>
+              </a:rPr>
+              <a:t>/</a:t>
+            </a:r>
+            <a:r>
+              <a:rPr lang="en-US" dirty="0" err="1" smtClean="0">
+                <a:latin typeface="Arial" pitchFamily="34" charset="0"/>
+                <a:cs typeface="Arial" pitchFamily="34" charset="0"/>
+              </a:rPr>
+              <a:t>api/Clients</a:t>
+            </a:r>
+            <a:endParaRPr lang="ru-RU" dirty="0" err="1" smtClean="0">
+              <a:latin typeface="Arial" pitchFamily="34" charset="0"/>
+              <a:cs typeface="Arial" pitchFamily="34" charset="0"/>
+            </a:endParaRPr>
+          </a:p>
+          <a:p>
+            <a:pPr algn="just"/>
+            <a:r>
+              <a:rPr lang="en-US" sz="1600" dirty="0" smtClean="0">
+                <a:latin typeface="Arial" pitchFamily="34" charset="0"/>
+                <a:cs typeface="Arial" pitchFamily="34" charset="0"/>
+              </a:rPr>
+              <a:t>[</a:t>
+            </a:r>
+            <a:r>
+              <a:rPr lang="en-US" sz="1600" dirty="0" err="1" smtClean="0">
+                <a:latin typeface="Arial" pitchFamily="34" charset="0"/>
+                <a:cs typeface="Arial" pitchFamily="34" charset="0"/>
+              </a:rPr>
+              <a:t>HttpGet</a:t>
+            </a:r>
+            <a:r>
+              <a:rPr lang="en-US" sz="1600" dirty="0" smtClean="0">
+                <a:latin typeface="Arial" pitchFamily="34" charset="0"/>
+                <a:cs typeface="Arial" pitchFamily="34" charset="0"/>
+              </a:rPr>
+              <a:t>("{</a:t>
+            </a:r>
+            <a:r>
+              <a:rPr lang="en-US" sz="1600" dirty="0" err="1" smtClean="0">
+                <a:latin typeface="Arial" pitchFamily="34" charset="0"/>
+                <a:cs typeface="Arial" pitchFamily="34" charset="0"/>
+              </a:rPr>
+              <a:t>id:int</a:t>
+            </a:r>
+            <a:r>
+              <a:rPr lang="en-US" sz="1600" dirty="0" smtClean="0">
+                <a:latin typeface="Arial" pitchFamily="34" charset="0"/>
+                <a:cs typeface="Arial" pitchFamily="34" charset="0"/>
+              </a:rPr>
+              <a:t>}")]</a:t>
+            </a:r>
+            <a:r>
+              <a:rPr lang="ru-RU" sz="1600" dirty="0" smtClean="0">
+                <a:latin typeface="Arial" pitchFamily="34" charset="0"/>
+                <a:cs typeface="Arial" pitchFamily="34" charset="0"/>
+              </a:rPr>
+              <a:t>   </a:t>
+            </a:r>
+            <a:r>
+              <a:rPr lang="ru-RU" dirty="0" smtClean="0">
+                <a:latin typeface="Arial" pitchFamily="34" charset="0"/>
+                <a:cs typeface="Arial" pitchFamily="34" charset="0"/>
+              </a:rPr>
+              <a:t>                 </a:t>
+            </a:r>
+            <a:r>
+              <a:rPr lang="en-US" dirty="0" smtClean="0">
+                <a:latin typeface="Arial" pitchFamily="34" charset="0"/>
+                <a:cs typeface="Arial" pitchFamily="34" charset="0"/>
+              </a:rPr>
+              <a:t> /</a:t>
+            </a:r>
+            <a:r>
+              <a:rPr lang="en-US" dirty="0" err="1" smtClean="0">
+                <a:latin typeface="Arial" pitchFamily="34" charset="0"/>
+                <a:cs typeface="Arial" pitchFamily="34" charset="0"/>
+              </a:rPr>
+              <a:t>api</a:t>
+            </a:r>
+            <a:r>
+              <a:rPr lang="en-US" dirty="0" smtClean="0">
+                <a:latin typeface="Arial" pitchFamily="34" charset="0"/>
+                <a:cs typeface="Arial" pitchFamily="34" charset="0"/>
+              </a:rPr>
+              <a:t>/Clients/1002</a:t>
+            </a:r>
+            <a:endParaRPr lang="ru-RU" dirty="0" err="1" smtClean="0">
+              <a:latin typeface="Arial" pitchFamily="34" charset="0"/>
+              <a:cs typeface="Arial" pitchFamily="34" charset="0"/>
+            </a:endParaRPr>
+          </a:p>
+          <a:p>
+            <a:r>
+              <a:rPr lang="ru-RU" sz="1600" dirty="0" smtClean="0">
+                <a:latin typeface="Arial" pitchFamily="34" charset="0"/>
+                <a:cs typeface="Arial" pitchFamily="34" charset="0"/>
+              </a:rPr>
+              <a:t> </a:t>
+            </a:r>
+            <a:r>
+              <a:rPr lang="en-US" sz="1600" dirty="0" smtClean="0">
+                <a:latin typeface="Arial" pitchFamily="34" charset="0"/>
+                <a:cs typeface="Arial" pitchFamily="34" charset="0"/>
+              </a:rPr>
+              <a:t>[</a:t>
+            </a:r>
+            <a:r>
+              <a:rPr lang="en-US" sz="1600" dirty="0" err="1" smtClean="0">
+                <a:latin typeface="Arial" pitchFamily="34" charset="0"/>
+                <a:cs typeface="Arial" pitchFamily="34" charset="0"/>
+              </a:rPr>
+              <a:t>HttpGet</a:t>
+            </a:r>
+            <a:r>
+              <a:rPr lang="en-US" sz="1600" dirty="0" smtClean="0">
+                <a:latin typeface="Arial" pitchFamily="34" charset="0"/>
+                <a:cs typeface="Arial" pitchFamily="34" charset="0"/>
+              </a:rPr>
+              <a:t>("phone/{phone}")]</a:t>
+            </a:r>
+            <a:r>
+              <a:rPr lang="ru-RU" sz="1600" dirty="0" smtClean="0">
+                <a:latin typeface="Arial" pitchFamily="34" charset="0"/>
+                <a:cs typeface="Arial" pitchFamily="34" charset="0"/>
+              </a:rPr>
+              <a:t> </a:t>
+            </a:r>
+          </a:p>
+          <a:p>
+            <a:pPr algn="r"/>
+            <a:r>
+              <a:rPr lang="en-US" dirty="0" smtClean="0">
+                <a:latin typeface="Arial" pitchFamily="34" charset="0"/>
+                <a:cs typeface="Arial" pitchFamily="34" charset="0"/>
+              </a:rPr>
+              <a:t>/</a:t>
+            </a:r>
+            <a:r>
+              <a:rPr lang="en-US" dirty="0" err="1" smtClean="0">
+                <a:latin typeface="Arial" pitchFamily="34" charset="0"/>
+                <a:cs typeface="Arial" pitchFamily="34" charset="0"/>
+              </a:rPr>
+              <a:t>api</a:t>
+            </a:r>
+            <a:r>
+              <a:rPr lang="en-US" dirty="0" smtClean="0">
+                <a:latin typeface="Arial" pitchFamily="34" charset="0"/>
+                <a:cs typeface="Arial" pitchFamily="34" charset="0"/>
+              </a:rPr>
+              <a:t>/Clients/phone/89214443321</a:t>
+            </a:r>
+            <a:endParaRPr lang="ru-RU" dirty="0" smtClean="0">
+              <a:latin typeface="Arial" pitchFamily="34" charset="0"/>
+              <a:cs typeface="Arial" pitchFamily="34" charset="0"/>
+            </a:endParaRPr>
+          </a:p>
+          <a:p>
+            <a:r>
+              <a:rPr lang="en-US" dirty="0" smtClean="0">
+                <a:latin typeface="Arial" pitchFamily="34" charset="0"/>
+                <a:cs typeface="Arial" pitchFamily="34" charset="0"/>
+              </a:rPr>
+              <a:t>[</a:t>
+            </a:r>
+            <a:r>
+              <a:rPr lang="en-US" sz="1600" dirty="0" err="1" smtClean="0">
+                <a:latin typeface="Arial" pitchFamily="34" charset="0"/>
+                <a:cs typeface="Arial" pitchFamily="34" charset="0"/>
+              </a:rPr>
+              <a:t>HttpPost</a:t>
+            </a:r>
+            <a:r>
+              <a:rPr lang="en-US" dirty="0" smtClean="0">
+                <a:latin typeface="Arial" pitchFamily="34" charset="0"/>
+                <a:cs typeface="Arial" pitchFamily="34" charset="0"/>
+              </a:rPr>
+              <a:t>]</a:t>
+            </a:r>
+            <a:r>
+              <a:rPr lang="ru-RU" dirty="0" smtClean="0">
+                <a:latin typeface="Arial" pitchFamily="34" charset="0"/>
+                <a:cs typeface="Arial" pitchFamily="34" charset="0"/>
+              </a:rPr>
+              <a:t>	</a:t>
+            </a:r>
+          </a:p>
+          <a:p>
+            <a:r>
+              <a:rPr lang="en-US" sz="1600" dirty="0" smtClean="0">
+                <a:latin typeface="Arial" pitchFamily="34" charset="0"/>
+                <a:cs typeface="Arial" pitchFamily="34" charset="0"/>
+              </a:rPr>
+              <a:t>[</a:t>
+            </a:r>
+            <a:r>
+              <a:rPr lang="en-US" sz="1600" dirty="0" err="1" smtClean="0">
+                <a:latin typeface="Arial" pitchFamily="34" charset="0"/>
+                <a:cs typeface="Arial" pitchFamily="34" charset="0"/>
+              </a:rPr>
+              <a:t>HttpPut</a:t>
+            </a:r>
+            <a:r>
+              <a:rPr lang="en-US" sz="1600" dirty="0" smtClean="0">
+                <a:latin typeface="Arial" pitchFamily="34" charset="0"/>
+                <a:cs typeface="Arial" pitchFamily="34" charset="0"/>
+              </a:rPr>
+              <a:t>("{id}")]</a:t>
+            </a:r>
+            <a:endParaRPr lang="ru-RU" sz="1600" dirty="0" smtClean="0">
+              <a:latin typeface="Arial" pitchFamily="34" charset="0"/>
+              <a:cs typeface="Arial" pitchFamily="34" charset="0"/>
+            </a:endParaRPr>
+          </a:p>
+          <a:p>
+            <a:pPr algn="r"/>
+            <a:r>
+              <a:rPr lang="en-US" dirty="0" smtClean="0">
+                <a:latin typeface="Arial" pitchFamily="34" charset="0"/>
+                <a:cs typeface="Arial" pitchFamily="34" charset="0"/>
+              </a:rPr>
+              <a:t>/</a:t>
+            </a:r>
+            <a:r>
+              <a:rPr lang="en-US" dirty="0" err="1" smtClean="0">
+                <a:latin typeface="Arial" pitchFamily="34" charset="0"/>
+                <a:cs typeface="Arial" pitchFamily="34" charset="0"/>
+              </a:rPr>
+              <a:t>api</a:t>
+            </a:r>
+            <a:r>
+              <a:rPr lang="en-US" dirty="0" smtClean="0">
+                <a:latin typeface="Arial" pitchFamily="34" charset="0"/>
+                <a:cs typeface="Arial" pitchFamily="34" charset="0"/>
+              </a:rPr>
+              <a:t>/Clients/3</a:t>
+            </a:r>
+            <a:endParaRPr lang="ru-RU" dirty="0" smtClean="0">
+              <a:latin typeface="Arial" pitchFamily="34" charset="0"/>
+              <a:cs typeface="Arial" pitchFamily="34" charset="0"/>
+            </a:endParaRPr>
+          </a:p>
+          <a:p>
+            <a:r>
+              <a:rPr lang="en-US" sz="1600" dirty="0" smtClean="0">
+                <a:latin typeface="Arial" pitchFamily="34" charset="0"/>
+                <a:cs typeface="Arial" pitchFamily="34" charset="0"/>
+              </a:rPr>
+              <a:t>[</a:t>
+            </a:r>
+            <a:r>
+              <a:rPr lang="en-US" sz="1600" dirty="0" err="1" smtClean="0">
+                <a:latin typeface="Arial" pitchFamily="34" charset="0"/>
+                <a:cs typeface="Arial" pitchFamily="34" charset="0"/>
+              </a:rPr>
+              <a:t>HttpDelete</a:t>
+            </a:r>
+            <a:r>
+              <a:rPr lang="en-US" sz="1600" dirty="0" smtClean="0">
+                <a:latin typeface="Arial" pitchFamily="34" charset="0"/>
+                <a:cs typeface="Arial" pitchFamily="34" charset="0"/>
+              </a:rPr>
+              <a:t>("{</a:t>
+            </a:r>
+            <a:r>
+              <a:rPr lang="en-US" sz="1600" dirty="0" err="1" smtClean="0">
+                <a:latin typeface="Arial" pitchFamily="34" charset="0"/>
+                <a:cs typeface="Arial" pitchFamily="34" charset="0"/>
+              </a:rPr>
+              <a:t>id:int</a:t>
+            </a:r>
+            <a:r>
+              <a:rPr lang="en-US" sz="1600" dirty="0" smtClean="0">
+                <a:latin typeface="Arial" pitchFamily="34" charset="0"/>
+                <a:cs typeface="Arial" pitchFamily="34" charset="0"/>
+              </a:rPr>
+              <a:t>}")]</a:t>
+            </a:r>
+          </a:p>
+          <a:p>
+            <a:endParaRPr lang="en-US" sz="1600" dirty="0" smtClean="0">
+              <a:latin typeface="Arial" pitchFamily="34" charset="0"/>
+              <a:cs typeface="Arial" pitchFamily="34" charset="0"/>
+            </a:endParaRPr>
+          </a:p>
+          <a:p>
+            <a:endParaRPr lang="ru-RU" sz="1600" dirty="0" err="1" smtClean="0">
+              <a:latin typeface="Arial" pitchFamily="34" charset="0"/>
+              <a:cs typeface="Arial" pitchFamily="34" charset="0"/>
+            </a:endParaRPr>
+          </a:p>
+          <a:p>
+            <a:endParaRPr lang="ru-RU" sz="1600" dirty="0" smtClean="0">
+              <a:latin typeface="Arial" pitchFamily="34" charset="0"/>
+              <a:cs typeface="Arial" pitchFamily="34" charset="0"/>
+            </a:endParaRPr>
+          </a:p>
+          <a:p>
+            <a:pPr algn="r"/>
+            <a:r>
+              <a:rPr lang="ru-RU" dirty="0" smtClean="0">
+                <a:latin typeface="Arial" pitchFamily="34" charset="0"/>
+                <a:cs typeface="Arial" pitchFamily="34" charset="0"/>
+              </a:rPr>
+              <a:t>			</a:t>
+            </a:r>
+            <a:endParaRPr lang="ru-RU" dirty="0">
+              <a:latin typeface="Arial" pitchFamily="34" charset="0"/>
+              <a:cs typeface="Arial" pitchFamily="34" charset="0"/>
+            </a:endParaRPr>
+          </a:p>
+        </p:txBody>
+      </p:sp>
+    </p:spTree>
+  </p:cSld>
+  <p:clrMapOvr>
+    <a:masterClrMapping/>
+  </p:clrMapOvr>
+</p:sld>
+</file>
+
+<file path=ppt/slides/slide11.xml><?xml version="1.0" encoding="utf-8"?>
+<p:sld xmlns:a="http://schemas.openxmlformats.org/drawingml/2006/main" xmlns:r="http://schemas.openxmlformats.org/officeDocument/2006/relationships" xmlns:p="http://schemas.openxmlformats.org/presentationml/2006/main">
+  <p:cSld>
+    <p:spTree>
+      <p:nvGrpSpPr>
+        <p:cNvPr id="1" name=""/>
+        <p:cNvGrpSpPr/>
+        <p:nvPr/>
+      </p:nvGrpSpPr>
+      <p:grpSpPr>
+        <a:xfrm>
+          <a:off x="0" y="0"/>
+          <a:ext cx="0" cy="0"/>
+          <a:chOff x="0" y="0"/>
+          <a:chExt cx="0" cy="0"/>
+        </a:xfrm>
+      </p:grpSpPr>
+      <p:sp>
+        <p:nvSpPr>
+          <p:cNvPr id="2" name="Заголовок 1"/>
+          <p:cNvSpPr>
+            <a:spLocks noGrp="1"/>
+          </p:cNvSpPr>
+          <p:nvPr>
+            <p:ph type="title"/>
+          </p:nvPr>
+        </p:nvSpPr>
+        <p:spPr>
+          <a:xfrm>
+            <a:off x="457200" y="273050"/>
+            <a:ext cx="3008313" cy="491654"/>
+          </a:xfrm>
+        </p:spPr>
+        <p:txBody>
+          <a:bodyPr/>
+          <a:lstStyle/>
+          <a:p>
+            <a:r>
+              <a:rPr lang="en-US" dirty="0" err="1" smtClean="0">
+                <a:latin typeface="Arial" pitchFamily="34" charset="0"/>
+                <a:cs typeface="Arial" pitchFamily="34" charset="0"/>
+              </a:rPr>
+              <a:t>MastersController</a:t>
+            </a:r>
+            <a:endParaRPr lang="ru-RU" dirty="0">
+              <a:latin typeface="Arial" pitchFamily="34" charset="0"/>
+              <a:cs typeface="Arial" pitchFamily="34" charset="0"/>
+            </a:endParaRPr>
+          </a:p>
+        </p:txBody>
+      </p:sp>
+      <p:sp>
+        <p:nvSpPr>
+          <p:cNvPr id="3" name="Содержимое 2"/>
+          <p:cNvSpPr>
+            <a:spLocks noGrp="1"/>
+          </p:cNvSpPr>
+          <p:nvPr>
+            <p:ph idx="1"/>
+          </p:nvPr>
+        </p:nvSpPr>
+        <p:spPr>
+          <a:xfrm>
+            <a:off x="4788024" y="188640"/>
+            <a:ext cx="4104456" cy="6408712"/>
+          </a:xfrm>
+          <a:noFill/>
+        </p:spPr>
+        <p:style>
+          <a:lnRef idx="0">
+            <a:scrgbClr r="0" g="0" b="0"/>
+          </a:lnRef>
+          <a:fillRef idx="1003">
+            <a:schemeClr val="lt1"/>
+          </a:fillRef>
+          <a:effectRef idx="0">
+            <a:scrgbClr r="0" g="0" b="0"/>
+          </a:effectRef>
+          <a:fontRef idx="major"/>
+        </p:style>
+        <p:txBody>
+          <a:bodyPr>
+            <a:normAutofit/>
+          </a:bodyPr>
+          <a:lstStyle/>
+          <a:p>
+            <a:r>
+              <a:rPr lang="en-US" sz="1800" dirty="0" smtClean="0">
+                <a:latin typeface="Arial" pitchFamily="34" charset="0"/>
+                <a:cs typeface="Arial" pitchFamily="34" charset="0"/>
+                <a:hlinkClick r:id="rId2" action="ppaction://hlinkfile"/>
+              </a:rPr>
+              <a:t>Post</a:t>
+            </a:r>
+            <a:endParaRPr lang="en-US" sz="1800" dirty="0" smtClean="0">
+              <a:latin typeface="Arial" pitchFamily="34" charset="0"/>
+              <a:cs typeface="Arial" pitchFamily="34" charset="0"/>
+            </a:endParaRPr>
+          </a:p>
+          <a:p>
+            <a:endParaRPr lang="en-US" sz="1800" dirty="0" smtClean="0">
+              <a:latin typeface="Arial" pitchFamily="34" charset="0"/>
+              <a:cs typeface="Arial" pitchFamily="34" charset="0"/>
+            </a:endParaRPr>
+          </a:p>
+          <a:p>
+            <a:pPr>
+              <a:buNone/>
+            </a:pPr>
+            <a:endParaRPr lang="en-US" sz="1800" dirty="0" smtClean="0">
+              <a:latin typeface="Arial" pitchFamily="34" charset="0"/>
+              <a:cs typeface="Arial" pitchFamily="34" charset="0"/>
+            </a:endParaRPr>
+          </a:p>
+          <a:p>
+            <a:pPr>
+              <a:buNone/>
+            </a:pPr>
+            <a:endParaRPr lang="en-US" sz="1800" dirty="0" smtClean="0">
+              <a:latin typeface="Arial" pitchFamily="34" charset="0"/>
+              <a:cs typeface="Arial" pitchFamily="34" charset="0"/>
+            </a:endParaRPr>
+          </a:p>
+          <a:p>
+            <a:r>
+              <a:rPr lang="en-US" sz="1800" dirty="0" smtClean="0">
+                <a:latin typeface="Arial" pitchFamily="34" charset="0"/>
+                <a:cs typeface="Arial" pitchFamily="34" charset="0"/>
+                <a:hlinkClick r:id="rId3" action="ppaction://hlinkfile"/>
+              </a:rPr>
+              <a:t>Put</a:t>
+            </a:r>
+            <a:endParaRPr lang="ru-RU" sz="1800" dirty="0" smtClean="0">
+              <a:latin typeface="Arial" pitchFamily="34" charset="0"/>
+              <a:cs typeface="Arial" pitchFamily="34" charset="0"/>
+            </a:endParaRPr>
+          </a:p>
+          <a:p>
+            <a:endParaRPr lang="ru-RU" sz="1800" dirty="0" smtClean="0">
+              <a:latin typeface="Arial" pitchFamily="34" charset="0"/>
+              <a:cs typeface="Arial" pitchFamily="34" charset="0"/>
+            </a:endParaRPr>
+          </a:p>
+          <a:p>
+            <a:r>
+              <a:rPr lang="en-US" sz="1800" dirty="0" smtClean="0">
+                <a:latin typeface="Arial" pitchFamily="34" charset="0"/>
+                <a:cs typeface="Arial" pitchFamily="34" charset="0"/>
+                <a:hlinkClick r:id="rId3" action="ppaction://hlinkfile"/>
+              </a:rPr>
+              <a:t>DELETE</a:t>
+            </a:r>
+            <a:endParaRPr lang="ru-RU" sz="1800" dirty="0" smtClean="0">
+              <a:latin typeface="Arial" pitchFamily="34" charset="0"/>
+              <a:cs typeface="Arial" pitchFamily="34" charset="0"/>
+            </a:endParaRPr>
+          </a:p>
+        </p:txBody>
+      </p:sp>
+      <p:sp>
+        <p:nvSpPr>
+          <p:cNvPr id="4" name="Текст 3"/>
+          <p:cNvSpPr>
+            <a:spLocks noGrp="1"/>
+          </p:cNvSpPr>
+          <p:nvPr>
+            <p:ph type="body" sz="half" idx="2"/>
+          </p:nvPr>
+        </p:nvSpPr>
+        <p:spPr>
+          <a:xfrm>
+            <a:off x="323528" y="836712"/>
+            <a:ext cx="4464496" cy="5289451"/>
+          </a:xfrm>
+        </p:spPr>
+        <p:txBody>
+          <a:bodyPr/>
+          <a:lstStyle/>
+          <a:p>
+            <a:pPr algn="just"/>
+            <a:r>
+              <a:rPr lang="en-US" sz="1600" dirty="0" err="1" smtClean="0">
+                <a:latin typeface="Arial" pitchFamily="34" charset="0"/>
+                <a:cs typeface="Arial" pitchFamily="34" charset="0"/>
+              </a:rPr>
+              <a:t>[HttpGet</a:t>
+            </a:r>
+            <a:r>
+              <a:rPr lang="en-US" sz="1600" dirty="0" smtClean="0">
+                <a:latin typeface="Arial" pitchFamily="34" charset="0"/>
+                <a:cs typeface="Arial" pitchFamily="34" charset="0"/>
+              </a:rPr>
+              <a:t>]</a:t>
+            </a:r>
+            <a:r>
+              <a:rPr lang="ru-RU" dirty="0" smtClean="0">
+                <a:latin typeface="Arial" pitchFamily="34" charset="0"/>
+                <a:cs typeface="Arial" pitchFamily="34" charset="0"/>
+              </a:rPr>
+              <a:t>		                  </a:t>
+            </a:r>
+            <a:r>
+              <a:rPr lang="en-US" dirty="0" smtClean="0">
+                <a:latin typeface="Arial" pitchFamily="34" charset="0"/>
+                <a:cs typeface="Arial" pitchFamily="34" charset="0"/>
+              </a:rPr>
+              <a:t>/</a:t>
+            </a:r>
+            <a:r>
+              <a:rPr lang="en-US" dirty="0" err="1" smtClean="0">
+                <a:latin typeface="Arial" pitchFamily="34" charset="0"/>
+                <a:cs typeface="Arial" pitchFamily="34" charset="0"/>
+              </a:rPr>
+              <a:t>api</a:t>
+            </a:r>
+            <a:r>
+              <a:rPr lang="en-US" dirty="0" smtClean="0">
+                <a:latin typeface="Arial" pitchFamily="34" charset="0"/>
+                <a:cs typeface="Arial" pitchFamily="34" charset="0"/>
+              </a:rPr>
+              <a:t>/Masters</a:t>
+            </a:r>
+            <a:endParaRPr lang="ru-RU" dirty="0" err="1" smtClean="0">
+              <a:latin typeface="Arial" pitchFamily="34" charset="0"/>
+              <a:cs typeface="Arial" pitchFamily="34" charset="0"/>
+            </a:endParaRPr>
+          </a:p>
+          <a:p>
+            <a:pPr algn="just"/>
+            <a:r>
+              <a:rPr lang="en-US" sz="1600" dirty="0" smtClean="0">
+                <a:latin typeface="Arial" pitchFamily="34" charset="0"/>
+                <a:cs typeface="Arial" pitchFamily="34" charset="0"/>
+              </a:rPr>
+              <a:t>[</a:t>
+            </a:r>
+            <a:r>
+              <a:rPr lang="en-US" sz="1600" dirty="0" err="1" smtClean="0">
+                <a:latin typeface="Arial" pitchFamily="34" charset="0"/>
+                <a:cs typeface="Arial" pitchFamily="34" charset="0"/>
+              </a:rPr>
+              <a:t>HttpGet</a:t>
+            </a:r>
+            <a:r>
+              <a:rPr lang="en-US" sz="1600" dirty="0" smtClean="0">
+                <a:latin typeface="Arial" pitchFamily="34" charset="0"/>
+                <a:cs typeface="Arial" pitchFamily="34" charset="0"/>
+              </a:rPr>
+              <a:t>("{</a:t>
+            </a:r>
+            <a:r>
+              <a:rPr lang="en-US" sz="1600" dirty="0" err="1" smtClean="0">
+                <a:latin typeface="Arial" pitchFamily="34" charset="0"/>
+                <a:cs typeface="Arial" pitchFamily="34" charset="0"/>
+              </a:rPr>
+              <a:t>id:int</a:t>
+            </a:r>
+            <a:r>
+              <a:rPr lang="en-US" sz="1600" dirty="0" smtClean="0">
+                <a:latin typeface="Arial" pitchFamily="34" charset="0"/>
+                <a:cs typeface="Arial" pitchFamily="34" charset="0"/>
+              </a:rPr>
+              <a:t>}")]</a:t>
+            </a:r>
+            <a:r>
+              <a:rPr lang="ru-RU" sz="1600" dirty="0" smtClean="0">
+                <a:latin typeface="Arial" pitchFamily="34" charset="0"/>
+                <a:cs typeface="Arial" pitchFamily="34" charset="0"/>
+              </a:rPr>
+              <a:t>   </a:t>
+            </a:r>
+            <a:r>
+              <a:rPr lang="ru-RU" dirty="0" smtClean="0">
+                <a:latin typeface="Arial" pitchFamily="34" charset="0"/>
+                <a:cs typeface="Arial" pitchFamily="34" charset="0"/>
+              </a:rPr>
+              <a:t>               </a:t>
+            </a:r>
+            <a:r>
+              <a:rPr lang="en-US" dirty="0" smtClean="0">
+                <a:latin typeface="Arial" pitchFamily="34" charset="0"/>
+                <a:cs typeface="Arial" pitchFamily="34" charset="0"/>
+              </a:rPr>
+              <a:t>   /</a:t>
+            </a:r>
+            <a:r>
+              <a:rPr lang="en-US" dirty="0" err="1" smtClean="0">
+                <a:latin typeface="Arial" pitchFamily="34" charset="0"/>
+                <a:cs typeface="Arial" pitchFamily="34" charset="0"/>
+              </a:rPr>
+              <a:t>api</a:t>
+            </a:r>
+            <a:r>
+              <a:rPr lang="en-US" dirty="0" smtClean="0">
+                <a:latin typeface="Arial" pitchFamily="34" charset="0"/>
+                <a:cs typeface="Arial" pitchFamily="34" charset="0"/>
+              </a:rPr>
+              <a:t>/Masters/3</a:t>
+            </a:r>
+            <a:endParaRPr lang="ru-RU" dirty="0" err="1" smtClean="0">
+              <a:latin typeface="Arial" pitchFamily="34" charset="0"/>
+              <a:cs typeface="Arial" pitchFamily="34" charset="0"/>
+            </a:endParaRPr>
+          </a:p>
+          <a:p>
+            <a:r>
+              <a:rPr lang="en-US" sz="1600" dirty="0" smtClean="0">
+                <a:latin typeface="Arial" pitchFamily="34" charset="0"/>
+                <a:cs typeface="Arial" pitchFamily="34" charset="0"/>
+              </a:rPr>
+              <a:t>[</a:t>
+            </a:r>
+            <a:r>
+              <a:rPr lang="en-US" sz="1600" dirty="0" err="1" smtClean="0">
+                <a:latin typeface="Arial" pitchFamily="34" charset="0"/>
+                <a:cs typeface="Arial" pitchFamily="34" charset="0"/>
+              </a:rPr>
+              <a:t>HttpGet</a:t>
+            </a:r>
+            <a:r>
+              <a:rPr lang="en-US" sz="1600" dirty="0" smtClean="0">
+                <a:latin typeface="Arial" pitchFamily="34" charset="0"/>
+                <a:cs typeface="Arial" pitchFamily="34" charset="0"/>
+              </a:rPr>
+              <a:t>("by-service/{</a:t>
+            </a:r>
+            <a:r>
+              <a:rPr lang="en-US" sz="1600" dirty="0" err="1" smtClean="0">
+                <a:latin typeface="Arial" pitchFamily="34" charset="0"/>
+                <a:cs typeface="Arial" pitchFamily="34" charset="0"/>
+              </a:rPr>
+              <a:t>serviceId:int</a:t>
+            </a:r>
+            <a:r>
+              <a:rPr lang="en-US" sz="1600" dirty="0" smtClean="0">
+                <a:latin typeface="Arial" pitchFamily="34" charset="0"/>
+                <a:cs typeface="Arial" pitchFamily="34" charset="0"/>
+              </a:rPr>
+              <a:t>}")]</a:t>
+            </a:r>
+          </a:p>
+          <a:p>
+            <a:pPr algn="r"/>
+            <a:r>
+              <a:rPr lang="en-US" dirty="0" smtClean="0">
+                <a:latin typeface="Arial" pitchFamily="34" charset="0"/>
+                <a:cs typeface="Arial" pitchFamily="34" charset="0"/>
+              </a:rPr>
+              <a:t>/</a:t>
+            </a:r>
+            <a:r>
+              <a:rPr lang="en-US" dirty="0" err="1" smtClean="0">
+                <a:latin typeface="Arial" pitchFamily="34" charset="0"/>
+                <a:cs typeface="Arial" pitchFamily="34" charset="0"/>
+              </a:rPr>
+              <a:t>api</a:t>
+            </a:r>
+            <a:r>
+              <a:rPr lang="en-US" dirty="0" smtClean="0">
+                <a:latin typeface="Arial" pitchFamily="34" charset="0"/>
+                <a:cs typeface="Arial" pitchFamily="34" charset="0"/>
+              </a:rPr>
+              <a:t>/Masters/by-service/2</a:t>
+            </a:r>
+          </a:p>
+          <a:p>
+            <a:r>
+              <a:rPr lang="en-US" dirty="0" smtClean="0">
+                <a:latin typeface="Arial" pitchFamily="34" charset="0"/>
+                <a:cs typeface="Arial" pitchFamily="34" charset="0"/>
+              </a:rPr>
+              <a:t>[</a:t>
+            </a:r>
+            <a:r>
+              <a:rPr lang="en-US" sz="1600" dirty="0" err="1" smtClean="0">
+                <a:latin typeface="Arial" pitchFamily="34" charset="0"/>
+                <a:cs typeface="Arial" pitchFamily="34" charset="0"/>
+              </a:rPr>
+              <a:t>HttpPost</a:t>
+            </a:r>
+            <a:r>
+              <a:rPr lang="en-US" dirty="0" smtClean="0">
+                <a:latin typeface="Arial" pitchFamily="34" charset="0"/>
+                <a:cs typeface="Arial" pitchFamily="34" charset="0"/>
+              </a:rPr>
+              <a:t>]</a:t>
+            </a:r>
+            <a:r>
+              <a:rPr lang="ru-RU" dirty="0" smtClean="0">
+                <a:latin typeface="Arial" pitchFamily="34" charset="0"/>
+                <a:cs typeface="Arial" pitchFamily="34" charset="0"/>
+              </a:rPr>
+              <a:t>	</a:t>
+            </a:r>
+          </a:p>
+          <a:p>
+            <a:r>
+              <a:rPr lang="en-US" sz="1600" dirty="0" smtClean="0">
+                <a:latin typeface="Arial" pitchFamily="34" charset="0"/>
+                <a:cs typeface="Arial" pitchFamily="34" charset="0"/>
+              </a:rPr>
+              <a:t>[</a:t>
+            </a:r>
+            <a:r>
+              <a:rPr lang="en-US" sz="1600" dirty="0" err="1" smtClean="0">
+                <a:latin typeface="Arial" pitchFamily="34" charset="0"/>
+                <a:cs typeface="Arial" pitchFamily="34" charset="0"/>
+              </a:rPr>
+              <a:t>HttpPut</a:t>
+            </a:r>
+            <a:r>
+              <a:rPr lang="en-US" sz="1600" dirty="0" smtClean="0">
+                <a:latin typeface="Arial" pitchFamily="34" charset="0"/>
+                <a:cs typeface="Arial" pitchFamily="34" charset="0"/>
+              </a:rPr>
+              <a:t>("{</a:t>
+            </a:r>
+            <a:r>
+              <a:rPr lang="en-US" sz="1600" dirty="0" err="1" smtClean="0">
+                <a:latin typeface="Arial" pitchFamily="34" charset="0"/>
+                <a:cs typeface="Arial" pitchFamily="34" charset="0"/>
+              </a:rPr>
+              <a:t>id:int</a:t>
+            </a:r>
+            <a:r>
+              <a:rPr lang="en-US" sz="1600" dirty="0" smtClean="0">
+                <a:latin typeface="Arial" pitchFamily="34" charset="0"/>
+                <a:cs typeface="Arial" pitchFamily="34" charset="0"/>
+              </a:rPr>
+              <a:t>}")]</a:t>
+            </a:r>
+          </a:p>
+          <a:p>
+            <a:pPr algn="r"/>
+            <a:r>
+              <a:rPr lang="en-US" sz="1600" dirty="0" smtClean="0">
+                <a:latin typeface="Arial" pitchFamily="34" charset="0"/>
+                <a:cs typeface="Arial" pitchFamily="34" charset="0"/>
+              </a:rPr>
+              <a:t>/</a:t>
+            </a:r>
+            <a:r>
+              <a:rPr lang="en-US" dirty="0" err="1" smtClean="0">
+                <a:latin typeface="Arial" pitchFamily="34" charset="0"/>
+                <a:cs typeface="Arial" pitchFamily="34" charset="0"/>
+              </a:rPr>
+              <a:t>api</a:t>
+            </a:r>
+            <a:r>
+              <a:rPr lang="en-US" dirty="0" smtClean="0">
+                <a:latin typeface="Arial" pitchFamily="34" charset="0"/>
+                <a:cs typeface="Arial" pitchFamily="34" charset="0"/>
+              </a:rPr>
+              <a:t>/Masters/3</a:t>
+            </a:r>
+            <a:endParaRPr lang="ru-RU" dirty="0" smtClean="0">
+              <a:latin typeface="Arial" pitchFamily="34" charset="0"/>
+              <a:cs typeface="Arial" pitchFamily="34" charset="0"/>
+            </a:endParaRPr>
+          </a:p>
+          <a:p>
+            <a:r>
+              <a:rPr lang="en-US" sz="1600" dirty="0" smtClean="0">
+                <a:latin typeface="Arial" pitchFamily="34" charset="0"/>
+                <a:cs typeface="Arial" pitchFamily="34" charset="0"/>
+              </a:rPr>
+              <a:t>[</a:t>
+            </a:r>
+            <a:r>
+              <a:rPr lang="en-US" sz="1600" dirty="0" err="1" smtClean="0">
+                <a:latin typeface="Arial" pitchFamily="34" charset="0"/>
+                <a:cs typeface="Arial" pitchFamily="34" charset="0"/>
+              </a:rPr>
+              <a:t>HttpDelete</a:t>
+            </a:r>
+            <a:r>
+              <a:rPr lang="en-US" sz="1600" dirty="0" smtClean="0">
+                <a:latin typeface="Arial" pitchFamily="34" charset="0"/>
+                <a:cs typeface="Arial" pitchFamily="34" charset="0"/>
+              </a:rPr>
+              <a:t>("{</a:t>
+            </a:r>
+            <a:r>
+              <a:rPr lang="en-US" sz="1600" dirty="0" err="1" smtClean="0">
+                <a:latin typeface="Arial" pitchFamily="34" charset="0"/>
+                <a:cs typeface="Arial" pitchFamily="34" charset="0"/>
+              </a:rPr>
+              <a:t>id:int</a:t>
+            </a:r>
+            <a:r>
+              <a:rPr lang="en-US" sz="1600" dirty="0" smtClean="0">
+                <a:latin typeface="Arial" pitchFamily="34" charset="0"/>
+                <a:cs typeface="Arial" pitchFamily="34" charset="0"/>
+              </a:rPr>
+              <a:t>}")]</a:t>
+            </a:r>
+          </a:p>
+          <a:p>
+            <a:endParaRPr lang="en-US" sz="1600" dirty="0" smtClean="0">
+              <a:latin typeface="Arial" pitchFamily="34" charset="0"/>
+              <a:cs typeface="Arial" pitchFamily="34" charset="0"/>
+            </a:endParaRPr>
+          </a:p>
+          <a:p>
+            <a:r>
+              <a:rPr lang="en-US" sz="1600" dirty="0" smtClean="0">
+                <a:latin typeface="Arial" pitchFamily="34" charset="0"/>
+                <a:cs typeface="Arial" pitchFamily="34" charset="0"/>
+              </a:rPr>
+              <a:t>[</a:t>
+            </a:r>
+            <a:r>
+              <a:rPr lang="en-US" sz="1600" dirty="0" err="1" smtClean="0">
+                <a:latin typeface="Arial" pitchFamily="34" charset="0"/>
+                <a:cs typeface="Arial" pitchFamily="34" charset="0"/>
+              </a:rPr>
+              <a:t>HttpGet</a:t>
+            </a:r>
+            <a:r>
+              <a:rPr lang="en-US" sz="1600" dirty="0" smtClean="0">
+                <a:latin typeface="Arial" pitchFamily="34" charset="0"/>
+                <a:cs typeface="Arial" pitchFamily="34" charset="0"/>
+              </a:rPr>
+              <a:t>("{</a:t>
+            </a:r>
+            <a:r>
+              <a:rPr lang="en-US" sz="1600" dirty="0" err="1" smtClean="0">
+                <a:latin typeface="Arial" pitchFamily="34" charset="0"/>
+                <a:cs typeface="Arial" pitchFamily="34" charset="0"/>
+              </a:rPr>
+              <a:t>id:int</a:t>
+            </a:r>
+            <a:r>
+              <a:rPr lang="en-US" sz="1600" dirty="0" smtClean="0">
+                <a:latin typeface="Arial" pitchFamily="34" charset="0"/>
+                <a:cs typeface="Arial" pitchFamily="34" charset="0"/>
+              </a:rPr>
+              <a:t>}/availability")]</a:t>
+            </a:r>
+          </a:p>
+          <a:p>
+            <a:pPr algn="just"/>
+            <a:r>
+              <a:rPr lang="en-US" dirty="0" smtClean="0">
+                <a:latin typeface="Arial" pitchFamily="34" charset="0"/>
+                <a:cs typeface="Arial" pitchFamily="34" charset="0"/>
+              </a:rPr>
+              <a:t>	/</a:t>
+            </a:r>
+            <a:r>
+              <a:rPr lang="en-US" dirty="0" err="1" smtClean="0">
+                <a:latin typeface="Arial" pitchFamily="34" charset="0"/>
+                <a:cs typeface="Arial" pitchFamily="34" charset="0"/>
+              </a:rPr>
+              <a:t>api</a:t>
+            </a:r>
+            <a:r>
+              <a:rPr lang="en-US" dirty="0" smtClean="0">
+                <a:latin typeface="Arial" pitchFamily="34" charset="0"/>
+                <a:cs typeface="Arial" pitchFamily="34" charset="0"/>
+              </a:rPr>
+              <a:t>/Masters/1/</a:t>
+            </a:r>
+            <a:r>
+              <a:rPr lang="en-US" dirty="0" err="1" smtClean="0">
+                <a:latin typeface="Arial" pitchFamily="34" charset="0"/>
+                <a:cs typeface="Arial" pitchFamily="34" charset="0"/>
+              </a:rPr>
+              <a:t>availability?start</a:t>
+            </a:r>
+            <a:r>
+              <a:rPr lang="en-US" dirty="0" smtClean="0">
+                <a:latin typeface="Arial" pitchFamily="34" charset="0"/>
+                <a:cs typeface="Arial" pitchFamily="34" charset="0"/>
+              </a:rPr>
+              <a:t>=2026-07-04T10%3A00</a:t>
+            </a:r>
+            <a:r>
+              <a:rPr lang="ru-RU" dirty="0" smtClean="0">
+                <a:latin typeface="Arial" pitchFamily="34" charset="0"/>
+                <a:cs typeface="Arial" pitchFamily="34" charset="0"/>
+              </a:rPr>
+              <a:t>	</a:t>
+            </a:r>
+            <a:endParaRPr lang="ru-RU" dirty="0">
+              <a:latin typeface="Arial" pitchFamily="34" charset="0"/>
+              <a:cs typeface="Arial" pitchFamily="34" charset="0"/>
+            </a:endParaRPr>
+          </a:p>
+        </p:txBody>
+      </p:sp>
+    </p:spTree>
+  </p:cSld>
+  <p:clrMapOvr>
+    <a:masterClrMapping/>
+  </p:clrMapOvr>
+</p:sld>
+</file>
+
+<file path=ppt/slides/slide12.xml><?xml version="1.0" encoding="utf-8"?>
+<p:sld xmlns:a="http://schemas.openxmlformats.org/drawingml/2006/main" xmlns:r="http://schemas.openxmlformats.org/officeDocument/2006/relationships" xmlns:p="http://schemas.openxmlformats.org/presentationml/2006/main">
+  <p:cSld>
+    <p:spTree>
+      <p:nvGrpSpPr>
+        <p:cNvPr id="1" name=""/>
+        <p:cNvGrpSpPr/>
+        <p:nvPr/>
+      </p:nvGrpSpPr>
+      <p:grpSpPr>
+        <a:xfrm>
+          <a:off x="0" y="0"/>
+          <a:ext cx="0" cy="0"/>
+          <a:chOff x="0" y="0"/>
+          <a:chExt cx="0" cy="0"/>
+        </a:xfrm>
+      </p:grpSpPr>
+      <p:sp>
+        <p:nvSpPr>
+          <p:cNvPr id="2" name="Заголовок 1"/>
+          <p:cNvSpPr>
+            <a:spLocks noGrp="1"/>
+          </p:cNvSpPr>
+          <p:nvPr>
+            <p:ph type="title"/>
+          </p:nvPr>
+        </p:nvSpPr>
+        <p:spPr>
+          <a:xfrm>
+            <a:off x="457200" y="273050"/>
+            <a:ext cx="3008313" cy="491654"/>
+          </a:xfrm>
+        </p:spPr>
+        <p:txBody>
+          <a:bodyPr/>
+          <a:lstStyle/>
+          <a:p>
+            <a:r>
+              <a:rPr lang="en-US" dirty="0" err="1" smtClean="0">
+                <a:latin typeface="Arial" pitchFamily="34" charset="0"/>
+                <a:cs typeface="Arial" pitchFamily="34" charset="0"/>
+              </a:rPr>
+              <a:t>ServicesController</a:t>
+            </a:r>
+            <a:endParaRPr lang="ru-RU" dirty="0">
+              <a:latin typeface="Arial" pitchFamily="34" charset="0"/>
+              <a:cs typeface="Arial" pitchFamily="34" charset="0"/>
+            </a:endParaRPr>
+          </a:p>
+        </p:txBody>
+      </p:sp>
+      <p:sp>
+        <p:nvSpPr>
+          <p:cNvPr id="3" name="Содержимое 2"/>
+          <p:cNvSpPr>
+            <a:spLocks noGrp="1"/>
+          </p:cNvSpPr>
+          <p:nvPr>
+            <p:ph idx="1"/>
+          </p:nvPr>
+        </p:nvSpPr>
+        <p:spPr>
+          <a:xfrm>
+            <a:off x="4788024" y="188640"/>
+            <a:ext cx="4104456" cy="6408712"/>
+          </a:xfrm>
+          <a:noFill/>
+        </p:spPr>
+        <p:style>
+          <a:lnRef idx="0">
+            <a:scrgbClr r="0" g="0" b="0"/>
+          </a:lnRef>
+          <a:fillRef idx="1003">
+            <a:schemeClr val="lt1"/>
+          </a:fillRef>
+          <a:effectRef idx="0">
+            <a:scrgbClr r="0" g="0" b="0"/>
+          </a:effectRef>
+          <a:fontRef idx="major"/>
+        </p:style>
+        <p:txBody>
+          <a:bodyPr>
+            <a:normAutofit/>
+          </a:bodyPr>
+          <a:lstStyle/>
+          <a:p>
+            <a:r>
+              <a:rPr lang="en-US" sz="1800" dirty="0" smtClean="0">
+                <a:latin typeface="Arial" pitchFamily="34" charset="0"/>
+                <a:cs typeface="Arial" pitchFamily="34" charset="0"/>
+                <a:hlinkClick r:id="rId2" action="ppaction://hlinkfile"/>
+              </a:rPr>
+              <a:t>DELETE</a:t>
+            </a:r>
+            <a:endParaRPr lang="ru-RU" sz="1800" dirty="0" smtClean="0">
+              <a:latin typeface="Arial" pitchFamily="34" charset="0"/>
+              <a:cs typeface="Arial" pitchFamily="34" charset="0"/>
+            </a:endParaRPr>
+          </a:p>
+        </p:txBody>
+      </p:sp>
+      <p:sp>
+        <p:nvSpPr>
+          <p:cNvPr id="4" name="Текст 3"/>
+          <p:cNvSpPr>
+            <a:spLocks noGrp="1"/>
+          </p:cNvSpPr>
+          <p:nvPr>
+            <p:ph type="body" sz="half" idx="2"/>
+          </p:nvPr>
+        </p:nvSpPr>
+        <p:spPr>
+          <a:xfrm>
+            <a:off x="323528" y="836712"/>
+            <a:ext cx="4248472" cy="5289451"/>
+          </a:xfrm>
+        </p:spPr>
+        <p:txBody>
+          <a:bodyPr/>
+          <a:lstStyle/>
+          <a:p>
+            <a:pPr algn="just"/>
+            <a:r>
+              <a:rPr lang="en-US" sz="1600" dirty="0" err="1" smtClean="0">
+                <a:latin typeface="Arial" pitchFamily="34" charset="0"/>
+                <a:cs typeface="Arial" pitchFamily="34" charset="0"/>
+              </a:rPr>
+              <a:t>[HttpGet</a:t>
+            </a:r>
+            <a:r>
+              <a:rPr lang="en-US" sz="1600" dirty="0" smtClean="0">
+                <a:latin typeface="Arial" pitchFamily="34" charset="0"/>
+                <a:cs typeface="Arial" pitchFamily="34" charset="0"/>
+              </a:rPr>
+              <a:t>]</a:t>
+            </a:r>
+            <a:r>
+              <a:rPr lang="ru-RU" dirty="0" smtClean="0">
+                <a:latin typeface="Arial" pitchFamily="34" charset="0"/>
+                <a:cs typeface="Arial" pitchFamily="34" charset="0"/>
+              </a:rPr>
+              <a:t>		                  </a:t>
+            </a:r>
+            <a:r>
+              <a:rPr lang="en-US" dirty="0" smtClean="0">
+                <a:latin typeface="Arial" pitchFamily="34" charset="0"/>
+                <a:cs typeface="Arial" pitchFamily="34" charset="0"/>
+              </a:rPr>
+              <a:t>/</a:t>
+            </a:r>
+            <a:r>
+              <a:rPr lang="en-US" dirty="0" err="1" smtClean="0">
+                <a:latin typeface="Arial" pitchFamily="34" charset="0"/>
+                <a:cs typeface="Arial" pitchFamily="34" charset="0"/>
+              </a:rPr>
+              <a:t>api</a:t>
+            </a:r>
+            <a:r>
+              <a:rPr lang="en-US" dirty="0" smtClean="0">
+                <a:latin typeface="Arial" pitchFamily="34" charset="0"/>
+                <a:cs typeface="Arial" pitchFamily="34" charset="0"/>
+              </a:rPr>
+              <a:t>/Services</a:t>
+            </a:r>
+            <a:endParaRPr lang="ru-RU" dirty="0" err="1" smtClean="0">
+              <a:latin typeface="Arial" pitchFamily="34" charset="0"/>
+              <a:cs typeface="Arial" pitchFamily="34" charset="0"/>
+            </a:endParaRPr>
+          </a:p>
+          <a:p>
+            <a:pPr algn="just"/>
+            <a:r>
+              <a:rPr lang="en-US" sz="1600" dirty="0" smtClean="0">
+                <a:latin typeface="Arial" pitchFamily="34" charset="0"/>
+                <a:cs typeface="Arial" pitchFamily="34" charset="0"/>
+              </a:rPr>
+              <a:t>[</a:t>
+            </a:r>
+            <a:r>
+              <a:rPr lang="en-US" sz="1600" dirty="0" err="1" smtClean="0">
+                <a:latin typeface="Arial" pitchFamily="34" charset="0"/>
+                <a:cs typeface="Arial" pitchFamily="34" charset="0"/>
+              </a:rPr>
+              <a:t>HttpGet</a:t>
+            </a:r>
+            <a:r>
+              <a:rPr lang="en-US" sz="1600" dirty="0" smtClean="0">
+                <a:latin typeface="Arial" pitchFamily="34" charset="0"/>
+                <a:cs typeface="Arial" pitchFamily="34" charset="0"/>
+              </a:rPr>
+              <a:t>("{</a:t>
+            </a:r>
+            <a:r>
+              <a:rPr lang="en-US" sz="1600" dirty="0" err="1" smtClean="0">
+                <a:latin typeface="Arial" pitchFamily="34" charset="0"/>
+                <a:cs typeface="Arial" pitchFamily="34" charset="0"/>
+              </a:rPr>
+              <a:t>id:int</a:t>
+            </a:r>
+            <a:r>
+              <a:rPr lang="en-US" sz="1600" dirty="0" smtClean="0">
+                <a:latin typeface="Arial" pitchFamily="34" charset="0"/>
+                <a:cs typeface="Arial" pitchFamily="34" charset="0"/>
+              </a:rPr>
+              <a:t>}")]		</a:t>
+            </a:r>
+            <a:r>
+              <a:rPr lang="en-US" dirty="0" smtClean="0">
+                <a:latin typeface="Arial" pitchFamily="34" charset="0"/>
+                <a:cs typeface="Arial" pitchFamily="34" charset="0"/>
+              </a:rPr>
+              <a:t>/</a:t>
+            </a:r>
+            <a:r>
+              <a:rPr lang="en-US" dirty="0" err="1" smtClean="0">
+                <a:latin typeface="Arial" pitchFamily="34" charset="0"/>
+                <a:cs typeface="Arial" pitchFamily="34" charset="0"/>
+              </a:rPr>
+              <a:t>api</a:t>
+            </a:r>
+            <a:r>
+              <a:rPr lang="en-US" dirty="0" smtClean="0">
+                <a:latin typeface="Arial" pitchFamily="34" charset="0"/>
+                <a:cs typeface="Arial" pitchFamily="34" charset="0"/>
+              </a:rPr>
+              <a:t>/Services/4</a:t>
+            </a:r>
+            <a:endParaRPr lang="ru-RU" dirty="0" err="1" smtClean="0">
+              <a:latin typeface="Arial" pitchFamily="34" charset="0"/>
+              <a:cs typeface="Arial" pitchFamily="34" charset="0"/>
+            </a:endParaRPr>
+          </a:p>
+          <a:p>
+            <a:r>
+              <a:rPr lang="en-US" sz="1600" dirty="0" smtClean="0">
+                <a:latin typeface="Arial" pitchFamily="34" charset="0"/>
+                <a:cs typeface="Arial" pitchFamily="34" charset="0"/>
+              </a:rPr>
+              <a:t>[</a:t>
+            </a:r>
+            <a:r>
+              <a:rPr lang="en-US" sz="1600" dirty="0" err="1" smtClean="0">
+                <a:latin typeface="Arial" pitchFamily="34" charset="0"/>
+                <a:cs typeface="Arial" pitchFamily="34" charset="0"/>
+              </a:rPr>
+              <a:t>HttpGet</a:t>
+            </a:r>
+            <a:r>
+              <a:rPr lang="en-US" sz="1600" dirty="0" smtClean="0">
+                <a:latin typeface="Arial" pitchFamily="34" charset="0"/>
+                <a:cs typeface="Arial" pitchFamily="34" charset="0"/>
+              </a:rPr>
+              <a:t>("category/{</a:t>
+            </a:r>
+            <a:r>
+              <a:rPr lang="en-US" sz="1600" dirty="0" err="1" smtClean="0">
+                <a:latin typeface="Arial" pitchFamily="34" charset="0"/>
+                <a:cs typeface="Arial" pitchFamily="34" charset="0"/>
+              </a:rPr>
+              <a:t>categoryId:int</a:t>
+            </a:r>
+            <a:r>
+              <a:rPr lang="en-US" sz="1600" dirty="0" smtClean="0">
+                <a:latin typeface="Arial" pitchFamily="34" charset="0"/>
+                <a:cs typeface="Arial" pitchFamily="34" charset="0"/>
+              </a:rPr>
+              <a:t>}")]</a:t>
+            </a:r>
+            <a:r>
+              <a:rPr lang="ru-RU" sz="1600" dirty="0" smtClean="0">
+                <a:latin typeface="Arial" pitchFamily="34" charset="0"/>
+                <a:cs typeface="Arial" pitchFamily="34" charset="0"/>
+              </a:rPr>
+              <a:t> </a:t>
+            </a:r>
+          </a:p>
+          <a:p>
+            <a:pPr algn="r"/>
+            <a:r>
+              <a:rPr lang="en-US" dirty="0" smtClean="0">
+                <a:latin typeface="Arial" pitchFamily="34" charset="0"/>
+                <a:cs typeface="Arial" pitchFamily="34" charset="0"/>
+              </a:rPr>
+              <a:t>/</a:t>
+            </a:r>
+            <a:r>
+              <a:rPr lang="en-US" dirty="0" err="1" smtClean="0">
+                <a:latin typeface="Arial" pitchFamily="34" charset="0"/>
+                <a:cs typeface="Arial" pitchFamily="34" charset="0"/>
+              </a:rPr>
+              <a:t>api</a:t>
+            </a:r>
+            <a:r>
+              <a:rPr lang="en-US" dirty="0" smtClean="0">
+                <a:latin typeface="Arial" pitchFamily="34" charset="0"/>
+                <a:cs typeface="Arial" pitchFamily="34" charset="0"/>
+              </a:rPr>
+              <a:t>/Services/category/4</a:t>
+            </a:r>
+            <a:endParaRPr lang="ru-RU" dirty="0" smtClean="0">
+              <a:latin typeface="Arial" pitchFamily="34" charset="0"/>
+              <a:cs typeface="Arial" pitchFamily="34" charset="0"/>
+            </a:endParaRPr>
+          </a:p>
+          <a:p>
+            <a:r>
+              <a:rPr lang="en-US" dirty="0" smtClean="0">
+                <a:latin typeface="Arial" pitchFamily="34" charset="0"/>
+                <a:cs typeface="Arial" pitchFamily="34" charset="0"/>
+              </a:rPr>
+              <a:t>[</a:t>
+            </a:r>
+            <a:r>
+              <a:rPr lang="en-US" sz="1600" dirty="0" err="1" smtClean="0">
+                <a:latin typeface="Arial" pitchFamily="34" charset="0"/>
+                <a:cs typeface="Arial" pitchFamily="34" charset="0"/>
+              </a:rPr>
+              <a:t>HttpPost</a:t>
+            </a:r>
+            <a:r>
+              <a:rPr lang="en-US" dirty="0" smtClean="0">
+                <a:latin typeface="Arial" pitchFamily="34" charset="0"/>
+                <a:cs typeface="Arial" pitchFamily="34" charset="0"/>
+              </a:rPr>
+              <a:t>]</a:t>
+            </a:r>
+            <a:r>
+              <a:rPr lang="ru-RU" dirty="0" smtClean="0">
+                <a:latin typeface="Arial" pitchFamily="34" charset="0"/>
+                <a:cs typeface="Arial" pitchFamily="34" charset="0"/>
+              </a:rPr>
+              <a:t>	</a:t>
+            </a:r>
+          </a:p>
+          <a:p>
+            <a:r>
+              <a:rPr lang="en-US" sz="1600" dirty="0" smtClean="0">
+                <a:latin typeface="Arial" pitchFamily="34" charset="0"/>
+                <a:cs typeface="Arial" pitchFamily="34" charset="0"/>
+              </a:rPr>
+              <a:t>[</a:t>
+            </a:r>
+            <a:r>
+              <a:rPr lang="en-US" sz="1600" dirty="0" err="1" smtClean="0">
+                <a:latin typeface="Arial" pitchFamily="34" charset="0"/>
+                <a:cs typeface="Arial" pitchFamily="34" charset="0"/>
+              </a:rPr>
+              <a:t>HttpPut</a:t>
+            </a:r>
+            <a:r>
+              <a:rPr lang="en-US" sz="1600" dirty="0" smtClean="0">
+                <a:latin typeface="Arial" pitchFamily="34" charset="0"/>
+                <a:cs typeface="Arial" pitchFamily="34" charset="0"/>
+              </a:rPr>
+              <a:t>("{id}")]</a:t>
+            </a:r>
+            <a:endParaRPr lang="ru-RU" sz="1600" dirty="0" smtClean="0">
+              <a:latin typeface="Arial" pitchFamily="34" charset="0"/>
+              <a:cs typeface="Arial" pitchFamily="34" charset="0"/>
+            </a:endParaRPr>
+          </a:p>
+          <a:p>
+            <a:pPr algn="r"/>
+            <a:r>
+              <a:rPr lang="en-US" dirty="0" smtClean="0">
+                <a:latin typeface="Arial" pitchFamily="34" charset="0"/>
+                <a:cs typeface="Arial" pitchFamily="34" charset="0"/>
+              </a:rPr>
+              <a:t>/</a:t>
+            </a:r>
+            <a:r>
+              <a:rPr lang="en-US" dirty="0" err="1" smtClean="0">
+                <a:latin typeface="Arial" pitchFamily="34" charset="0"/>
+                <a:cs typeface="Arial" pitchFamily="34" charset="0"/>
+              </a:rPr>
+              <a:t>api</a:t>
+            </a:r>
+            <a:r>
+              <a:rPr lang="en-US" dirty="0" smtClean="0">
+                <a:latin typeface="Arial" pitchFamily="34" charset="0"/>
+                <a:cs typeface="Arial" pitchFamily="34" charset="0"/>
+              </a:rPr>
+              <a:t>/Clients/3</a:t>
+            </a:r>
+            <a:endParaRPr lang="ru-RU" dirty="0" smtClean="0">
+              <a:latin typeface="Arial" pitchFamily="34" charset="0"/>
+              <a:cs typeface="Arial" pitchFamily="34" charset="0"/>
+            </a:endParaRPr>
+          </a:p>
+          <a:p>
+            <a:r>
+              <a:rPr lang="en-US" sz="1600" dirty="0" smtClean="0">
+                <a:latin typeface="Arial" pitchFamily="34" charset="0"/>
+                <a:cs typeface="Arial" pitchFamily="34" charset="0"/>
+              </a:rPr>
+              <a:t>[</a:t>
+            </a:r>
+            <a:r>
+              <a:rPr lang="en-US" sz="1600" dirty="0" err="1" smtClean="0">
+                <a:latin typeface="Arial" pitchFamily="34" charset="0"/>
+                <a:cs typeface="Arial" pitchFamily="34" charset="0"/>
+              </a:rPr>
+              <a:t>HttpDelete</a:t>
+            </a:r>
+            <a:r>
+              <a:rPr lang="en-US" sz="1600" dirty="0" smtClean="0">
+                <a:latin typeface="Arial" pitchFamily="34" charset="0"/>
+                <a:cs typeface="Arial" pitchFamily="34" charset="0"/>
+              </a:rPr>
+              <a:t>("{</a:t>
+            </a:r>
+            <a:r>
+              <a:rPr lang="en-US" sz="1600" dirty="0" err="1" smtClean="0">
+                <a:latin typeface="Arial" pitchFamily="34" charset="0"/>
+                <a:cs typeface="Arial" pitchFamily="34" charset="0"/>
+              </a:rPr>
+              <a:t>id:int</a:t>
+            </a:r>
+            <a:r>
+              <a:rPr lang="en-US" sz="1600" dirty="0" smtClean="0">
+                <a:latin typeface="Arial" pitchFamily="34" charset="0"/>
+                <a:cs typeface="Arial" pitchFamily="34" charset="0"/>
+              </a:rPr>
+              <a:t>}")]</a:t>
+            </a:r>
+          </a:p>
+          <a:p>
+            <a:endParaRPr lang="en-US" sz="1600" dirty="0" smtClean="0">
+              <a:latin typeface="Arial" pitchFamily="34" charset="0"/>
+              <a:cs typeface="Arial" pitchFamily="34" charset="0"/>
+            </a:endParaRPr>
+          </a:p>
+          <a:p>
+            <a:endParaRPr lang="ru-RU" sz="1600" dirty="0" err="1" smtClean="0">
+              <a:latin typeface="Arial" pitchFamily="34" charset="0"/>
+              <a:cs typeface="Arial" pitchFamily="34" charset="0"/>
+            </a:endParaRPr>
+          </a:p>
+          <a:p>
+            <a:endParaRPr lang="ru-RU" sz="1600" dirty="0" smtClean="0">
+              <a:latin typeface="Arial" pitchFamily="34" charset="0"/>
+              <a:cs typeface="Arial" pitchFamily="34" charset="0"/>
+            </a:endParaRPr>
+          </a:p>
+          <a:p>
+            <a:pPr algn="r"/>
+            <a:r>
+              <a:rPr lang="ru-RU" dirty="0" smtClean="0">
+                <a:latin typeface="Arial" pitchFamily="34" charset="0"/>
+                <a:cs typeface="Arial" pitchFamily="34" charset="0"/>
+              </a:rPr>
+              <a:t>			</a:t>
+            </a:r>
+            <a:endParaRPr lang="ru-RU" dirty="0">
+              <a:latin typeface="Arial" pitchFamily="34" charset="0"/>
+              <a:cs typeface="Arial" pitchFamily="34" charset="0"/>
+            </a:endParaRPr>
+          </a:p>
+        </p:txBody>
+      </p:sp>
+    </p:spTree>
+  </p:cSld>
+  <p:clrMapOvr>
+    <a:masterClrMapping/>
+  </p:clrMapOvr>
+</p:sld>
+</file>
+
+<file path=ppt/slides/slide13.xml><?xml version="1.0" encoding="utf-8"?>
+<p:sld xmlns:a="http://schemas.openxmlformats.org/drawingml/2006/main" xmlns:r="http://schemas.openxmlformats.org/officeDocument/2006/relationships" xmlns:p="http://schemas.openxmlformats.org/presentationml/2006/main">
+  <p:cSld>
+    <p:spTree>
+      <p:nvGrpSpPr>
+        <p:cNvPr id="1" name=""/>
+        <p:cNvGrpSpPr/>
+        <p:nvPr/>
+      </p:nvGrpSpPr>
+      <p:grpSpPr>
+        <a:xfrm>
+          <a:off x="0" y="0"/>
+          <a:ext cx="0" cy="0"/>
+          <a:chOff x="0" y="0"/>
+          <a:chExt cx="0" cy="0"/>
+        </a:xfrm>
+      </p:grpSpPr>
+      <p:sp>
+        <p:nvSpPr>
+          <p:cNvPr id="2" name="Заголовок 1"/>
+          <p:cNvSpPr>
+            <a:spLocks noGrp="1"/>
+          </p:cNvSpPr>
+          <p:nvPr>
+            <p:ph type="title"/>
+          </p:nvPr>
+        </p:nvSpPr>
+        <p:spPr>
+          <a:xfrm>
+            <a:off x="467544" y="836712"/>
+            <a:ext cx="3008313" cy="491654"/>
+          </a:xfrm>
+        </p:spPr>
+        <p:txBody>
+          <a:bodyPr/>
+          <a:lstStyle/>
+          <a:p>
+            <a:r>
+              <a:rPr lang="en-US" dirty="0" err="1" smtClean="0">
+                <a:latin typeface="Arial" pitchFamily="34" charset="0"/>
+                <a:cs typeface="Arial" pitchFamily="34" charset="0"/>
+              </a:rPr>
+              <a:t>AppointmentController</a:t>
+            </a:r>
+            <a:endParaRPr lang="ru-RU" dirty="0">
+              <a:latin typeface="Arial" pitchFamily="34" charset="0"/>
+              <a:cs typeface="Arial" pitchFamily="34" charset="0"/>
+            </a:endParaRPr>
+          </a:p>
+        </p:txBody>
+      </p:sp>
+      <p:sp>
+        <p:nvSpPr>
+          <p:cNvPr id="4" name="Текст 3"/>
+          <p:cNvSpPr>
+            <a:spLocks noGrp="1"/>
+          </p:cNvSpPr>
+          <p:nvPr>
+            <p:ph type="body" sz="half" idx="2"/>
+          </p:nvPr>
+        </p:nvSpPr>
+        <p:spPr>
+          <a:xfrm>
+            <a:off x="4139952" y="404664"/>
+            <a:ext cx="4248472" cy="5289451"/>
+          </a:xfrm>
+        </p:spPr>
+        <p:txBody>
+          <a:bodyPr/>
+          <a:lstStyle/>
+          <a:p>
+            <a:pPr algn="just"/>
+            <a:r>
+              <a:rPr lang="en-US" sz="1600" dirty="0" smtClean="0">
+                <a:latin typeface="Arial" pitchFamily="34" charset="0"/>
+                <a:cs typeface="Arial" pitchFamily="34" charset="0"/>
+              </a:rPr>
+              <a:t>[</a:t>
+            </a:r>
+            <a:r>
+              <a:rPr lang="en-US" sz="1600" dirty="0" err="1" smtClean="0">
+                <a:latin typeface="Arial" pitchFamily="34" charset="0"/>
+                <a:cs typeface="Arial" pitchFamily="34" charset="0"/>
+              </a:rPr>
+              <a:t>HttpGet</a:t>
+            </a:r>
+            <a:r>
+              <a:rPr lang="en-US" sz="1600" dirty="0" smtClean="0">
+                <a:latin typeface="Arial" pitchFamily="34" charset="0"/>
+                <a:cs typeface="Arial" pitchFamily="34" charset="0"/>
+              </a:rPr>
+              <a:t>("{</a:t>
+            </a:r>
+            <a:r>
+              <a:rPr lang="en-US" sz="1600" dirty="0" err="1" smtClean="0">
+                <a:latin typeface="Arial" pitchFamily="34" charset="0"/>
+                <a:cs typeface="Arial" pitchFamily="34" charset="0"/>
+              </a:rPr>
+              <a:t>id:int</a:t>
+            </a:r>
+            <a:r>
+              <a:rPr lang="en-US" sz="1600" dirty="0" smtClean="0">
+                <a:latin typeface="Arial" pitchFamily="34" charset="0"/>
+                <a:cs typeface="Arial" pitchFamily="34" charset="0"/>
+              </a:rPr>
+              <a:t>}")]	</a:t>
+            </a:r>
+            <a:r>
+              <a:rPr lang="ru-RU" sz="1600" dirty="0" smtClean="0">
+                <a:latin typeface="Arial" pitchFamily="34" charset="0"/>
+                <a:cs typeface="Arial" pitchFamily="34" charset="0"/>
+              </a:rPr>
+              <a:t> </a:t>
+            </a:r>
+            <a:r>
+              <a:rPr lang="ru-RU" sz="1600" dirty="0" smtClean="0">
+                <a:latin typeface="Arial" pitchFamily="34" charset="0"/>
+                <a:cs typeface="Arial" pitchFamily="34" charset="0"/>
+              </a:rPr>
+              <a:t>           </a:t>
+            </a:r>
+            <a:r>
+              <a:rPr lang="en-US" dirty="0" smtClean="0">
+                <a:latin typeface="Arial" pitchFamily="34" charset="0"/>
+                <a:cs typeface="Arial" pitchFamily="34" charset="0"/>
+              </a:rPr>
+              <a:t> </a:t>
+            </a:r>
+            <a:r>
+              <a:rPr lang="en-US" dirty="0" smtClean="0">
+                <a:latin typeface="Arial" pitchFamily="34" charset="0"/>
+                <a:cs typeface="Arial" pitchFamily="34" charset="0"/>
+              </a:rPr>
+              <a:t>/</a:t>
+            </a:r>
+            <a:r>
+              <a:rPr lang="en-US" dirty="0" err="1" smtClean="0">
+                <a:latin typeface="Arial" pitchFamily="34" charset="0"/>
+                <a:cs typeface="Arial" pitchFamily="34" charset="0"/>
+              </a:rPr>
+              <a:t>api</a:t>
+            </a:r>
+            <a:r>
+              <a:rPr lang="en-US" dirty="0" smtClean="0">
+                <a:latin typeface="Arial" pitchFamily="34" charset="0"/>
+                <a:cs typeface="Arial" pitchFamily="34" charset="0"/>
+              </a:rPr>
+              <a:t>/Appointment/4</a:t>
+            </a:r>
+            <a:endParaRPr lang="ru-RU" dirty="0" smtClean="0">
+              <a:latin typeface="Arial" pitchFamily="34" charset="0"/>
+              <a:cs typeface="Arial" pitchFamily="34" charset="0"/>
+            </a:endParaRPr>
+          </a:p>
+          <a:p>
+            <a:pPr algn="just"/>
+            <a:endParaRPr lang="ru-RU" dirty="0" err="1" smtClean="0">
+              <a:latin typeface="Arial" pitchFamily="34" charset="0"/>
+              <a:cs typeface="Arial" pitchFamily="34" charset="0"/>
+            </a:endParaRPr>
+          </a:p>
+          <a:p>
+            <a:r>
+              <a:rPr lang="en-US" sz="1600" dirty="0" smtClean="0">
+                <a:latin typeface="Arial" pitchFamily="34" charset="0"/>
+                <a:cs typeface="Arial" pitchFamily="34" charset="0"/>
+              </a:rPr>
+              <a:t>[</a:t>
+            </a:r>
+            <a:r>
+              <a:rPr lang="en-US" sz="1600" dirty="0" err="1" smtClean="0">
+                <a:latin typeface="Arial" pitchFamily="34" charset="0"/>
+                <a:cs typeface="Arial" pitchFamily="34" charset="0"/>
+              </a:rPr>
+              <a:t>HttpGet</a:t>
+            </a:r>
+            <a:r>
+              <a:rPr lang="en-US" sz="1600" dirty="0" smtClean="0">
+                <a:latin typeface="Arial" pitchFamily="34" charset="0"/>
+                <a:cs typeface="Arial" pitchFamily="34" charset="0"/>
+              </a:rPr>
+              <a:t>("master/{</a:t>
+            </a:r>
+            <a:r>
+              <a:rPr lang="en-US" sz="1600" dirty="0" err="1" smtClean="0">
+                <a:latin typeface="Arial" pitchFamily="34" charset="0"/>
+                <a:cs typeface="Arial" pitchFamily="34" charset="0"/>
+              </a:rPr>
+              <a:t>masterId</a:t>
+            </a:r>
+            <a:r>
+              <a:rPr lang="en-US" sz="1600" dirty="0" smtClean="0">
+                <a:latin typeface="Arial" pitchFamily="34" charset="0"/>
+                <a:cs typeface="Arial" pitchFamily="34" charset="0"/>
+              </a:rPr>
+              <a:t>}")]</a:t>
+            </a:r>
+            <a:r>
+              <a:rPr lang="ru-RU" sz="1600" dirty="0" smtClean="0">
+                <a:latin typeface="Arial" pitchFamily="34" charset="0"/>
+                <a:cs typeface="Arial" pitchFamily="34" charset="0"/>
+              </a:rPr>
+              <a:t> </a:t>
+            </a:r>
+            <a:endParaRPr lang="ru-RU" sz="1600" dirty="0" smtClean="0">
+              <a:latin typeface="Arial" pitchFamily="34" charset="0"/>
+              <a:cs typeface="Arial" pitchFamily="34" charset="0"/>
+            </a:endParaRPr>
+          </a:p>
+          <a:p>
+            <a:pPr algn="r"/>
+            <a:r>
+              <a:rPr lang="ru-RU" dirty="0" smtClean="0">
+                <a:latin typeface="Arial" pitchFamily="34" charset="0"/>
+                <a:cs typeface="Arial" pitchFamily="34" charset="0"/>
+              </a:rPr>
+              <a:t>       </a:t>
+            </a:r>
+            <a:r>
+              <a:rPr lang="en-US" dirty="0" smtClean="0">
+                <a:latin typeface="Arial" pitchFamily="34" charset="0"/>
+                <a:cs typeface="Arial" pitchFamily="34" charset="0"/>
+              </a:rPr>
+              <a:t>/</a:t>
+            </a:r>
+            <a:r>
+              <a:rPr lang="en-US" dirty="0" err="1" smtClean="0">
+                <a:latin typeface="Arial" pitchFamily="34" charset="0"/>
+                <a:cs typeface="Arial" pitchFamily="34" charset="0"/>
+              </a:rPr>
+              <a:t>api</a:t>
+            </a:r>
+            <a:r>
+              <a:rPr lang="en-US" dirty="0" smtClean="0">
+                <a:latin typeface="Arial" pitchFamily="34" charset="0"/>
+                <a:cs typeface="Arial" pitchFamily="34" charset="0"/>
+              </a:rPr>
+              <a:t>/Appointment/master/1?date=2026-07-04</a:t>
+            </a:r>
+            <a:endParaRPr lang="ru-RU" dirty="0" smtClean="0">
+              <a:latin typeface="Arial" pitchFamily="34" charset="0"/>
+              <a:cs typeface="Arial" pitchFamily="34" charset="0"/>
+            </a:endParaRPr>
+          </a:p>
+          <a:p>
+            <a:pPr algn="r"/>
+            <a:endParaRPr lang="ru-RU" dirty="0" smtClean="0">
+              <a:latin typeface="Arial" pitchFamily="34" charset="0"/>
+              <a:cs typeface="Arial" pitchFamily="34" charset="0"/>
+            </a:endParaRPr>
+          </a:p>
+          <a:p>
+            <a:r>
+              <a:rPr lang="en-US" sz="1600" dirty="0" smtClean="0">
+                <a:latin typeface="Arial" pitchFamily="34" charset="0"/>
+                <a:cs typeface="Arial" pitchFamily="34" charset="0"/>
+              </a:rPr>
+              <a:t>[</a:t>
+            </a:r>
+            <a:r>
+              <a:rPr lang="en-US" sz="1600" dirty="0" err="1" smtClean="0">
+                <a:latin typeface="Arial" pitchFamily="34" charset="0"/>
+                <a:cs typeface="Arial" pitchFamily="34" charset="0"/>
+              </a:rPr>
+              <a:t>HttpGet</a:t>
+            </a:r>
+            <a:r>
+              <a:rPr lang="en-US" sz="1600" dirty="0" smtClean="0">
+                <a:latin typeface="Arial" pitchFamily="34" charset="0"/>
+                <a:cs typeface="Arial" pitchFamily="34" charset="0"/>
+              </a:rPr>
+              <a:t>("upcoming")] </a:t>
+            </a:r>
+            <a:r>
+              <a:rPr lang="en-US" dirty="0" smtClean="0">
+                <a:latin typeface="Arial" pitchFamily="34" charset="0"/>
+                <a:cs typeface="Arial" pitchFamily="34" charset="0"/>
+              </a:rPr>
+              <a:t>/</a:t>
+            </a:r>
+            <a:r>
+              <a:rPr lang="en-US" dirty="0" err="1" smtClean="0">
+                <a:latin typeface="Arial" pitchFamily="34" charset="0"/>
+                <a:cs typeface="Arial" pitchFamily="34" charset="0"/>
+              </a:rPr>
+              <a:t>api</a:t>
+            </a:r>
+            <a:r>
+              <a:rPr lang="en-US" dirty="0" smtClean="0">
+                <a:latin typeface="Arial" pitchFamily="34" charset="0"/>
+                <a:cs typeface="Arial" pitchFamily="34" charset="0"/>
+              </a:rPr>
+              <a:t>/Appointment/</a:t>
+            </a:r>
+            <a:r>
+              <a:rPr lang="en-US" dirty="0" err="1" smtClean="0">
+                <a:latin typeface="Arial" pitchFamily="34" charset="0"/>
+                <a:cs typeface="Arial" pitchFamily="34" charset="0"/>
+              </a:rPr>
+              <a:t>upcoming?hoursAhead</a:t>
+            </a:r>
+            <a:r>
+              <a:rPr lang="en-US" dirty="0" smtClean="0">
+                <a:latin typeface="Arial" pitchFamily="34" charset="0"/>
+                <a:cs typeface="Arial" pitchFamily="34" charset="0"/>
+              </a:rPr>
+              <a:t>=24</a:t>
+            </a:r>
+            <a:endParaRPr lang="en-US" sz="1600" dirty="0" smtClean="0">
+              <a:latin typeface="Arial" pitchFamily="34" charset="0"/>
+              <a:cs typeface="Arial" pitchFamily="34" charset="0"/>
+            </a:endParaRPr>
+          </a:p>
+          <a:p>
+            <a:endParaRPr lang="en-US" sz="1600" dirty="0" smtClean="0">
+              <a:latin typeface="Arial" pitchFamily="34" charset="0"/>
+              <a:cs typeface="Arial" pitchFamily="34" charset="0"/>
+            </a:endParaRPr>
+          </a:p>
+          <a:p>
+            <a:endParaRPr lang="ru-RU" sz="1600" dirty="0" err="1" smtClean="0">
+              <a:latin typeface="Arial" pitchFamily="34" charset="0"/>
+              <a:cs typeface="Arial" pitchFamily="34" charset="0"/>
+            </a:endParaRPr>
+          </a:p>
+          <a:p>
+            <a:endParaRPr lang="ru-RU" sz="1600" dirty="0" smtClean="0">
+              <a:latin typeface="Arial" pitchFamily="34" charset="0"/>
+              <a:cs typeface="Arial" pitchFamily="34" charset="0"/>
+            </a:endParaRPr>
+          </a:p>
+          <a:p>
+            <a:pPr algn="r"/>
+            <a:r>
+              <a:rPr lang="ru-RU" dirty="0" smtClean="0">
+                <a:latin typeface="Arial" pitchFamily="34" charset="0"/>
+                <a:cs typeface="Arial" pitchFamily="34" charset="0"/>
+              </a:rPr>
+              <a:t>			</a:t>
+            </a:r>
+            <a:endParaRPr lang="ru-RU" dirty="0">
+              <a:latin typeface="Arial" pitchFamily="34" charset="0"/>
+              <a:cs typeface="Arial" pitchFamily="34" charset="0"/>
+            </a:endParaRPr>
+          </a:p>
+        </p:txBody>
+      </p:sp>
+      <p:pic>
+        <p:nvPicPr>
+          <p:cNvPr id="1026" name="Picture 2"/>
+          <p:cNvPicPr>
+            <a:picLocks noGrp="1" noChangeAspect="1" noChangeArrowheads="1"/>
+          </p:cNvPicPr>
+          <p:nvPr>
+            <p:ph idx="1"/>
+          </p:nvPr>
+        </p:nvPicPr>
+        <p:blipFill>
+          <a:blip r:embed="rId2" cstate="print"/>
+          <a:srcRect/>
+          <a:stretch>
+            <a:fillRect/>
+          </a:stretch>
+        </p:blipFill>
+        <p:spPr bwMode="auto">
+          <a:xfrm>
+            <a:off x="539552" y="2357376"/>
+            <a:ext cx="6192688" cy="4372025"/>
+          </a:xfrm>
+          <a:prstGeom prst="rect">
+            <a:avLst/>
+          </a:prstGeom>
+          <a:noFill/>
+          <a:ln w="9525">
+            <a:noFill/>
+            <a:miter lim="800000"/>
+            <a:headEnd/>
+            <a:tailEnd/>
+          </a:ln>
+          <a:effectLst/>
+        </p:spPr>
+      </p:pic>
+    </p:spTree>
+  </p:cSld>
+  <p:clrMapOvr>
+    <a:masterClrMapping/>
+  </p:clrMapOvr>
+</p:sld>
+</file>
+
+<file path=ppt/slides/slide14.xml><?xml version="1.0" encoding="utf-8"?>
+<p:sld xmlns:a="http://schemas.openxmlformats.org/drawingml/2006/main" xmlns:r="http://schemas.openxmlformats.org/officeDocument/2006/relationships" xmlns:p="http://schemas.openxmlformats.org/presentationml/2006/main">
+  <p:cSld>
+    <p:spTree>
+      <p:nvGrpSpPr>
+        <p:cNvPr id="1" name=""/>
+        <p:cNvGrpSpPr/>
+        <p:nvPr/>
+      </p:nvGrpSpPr>
+      <p:grpSpPr>
+        <a:xfrm>
+          <a:off x="0" y="0"/>
+          <a:ext cx="0" cy="0"/>
+          <a:chOff x="0" y="0"/>
+          <a:chExt cx="0" cy="0"/>
+        </a:xfrm>
+      </p:grpSpPr>
+      <p:sp>
+        <p:nvSpPr>
+          <p:cNvPr id="2" name="Заголовок 1"/>
+          <p:cNvSpPr>
+            <a:spLocks noGrp="1"/>
+          </p:cNvSpPr>
+          <p:nvPr>
+            <p:ph type="title"/>
+          </p:nvPr>
+        </p:nvSpPr>
+        <p:spPr>
+          <a:xfrm>
+            <a:off x="323528" y="260648"/>
+            <a:ext cx="3008313" cy="707678"/>
+          </a:xfrm>
+        </p:spPr>
+        <p:txBody>
+          <a:bodyPr>
+            <a:normAutofit fontScale="90000"/>
+          </a:bodyPr>
+          <a:lstStyle/>
+          <a:p>
+            <a:pPr algn="ctr"/>
+            <a:r>
+              <a:rPr lang="ru-RU" sz="4000" dirty="0" smtClean="0">
+                <a:latin typeface="Arial" pitchFamily="34" charset="0"/>
+                <a:cs typeface="Arial" pitchFamily="34" charset="0"/>
+                <a:hlinkClick r:id="rId2" action="ppaction://hlinkfile"/>
+              </a:rPr>
+              <a:t>Блок-схема</a:t>
+            </a:r>
+            <a:endParaRPr lang="ru-RU" sz="4000" dirty="0">
+              <a:latin typeface="Arial" pitchFamily="34" charset="0"/>
+              <a:cs typeface="Arial" pitchFamily="34" charset="0"/>
+            </a:endParaRPr>
+          </a:p>
+        </p:txBody>
+      </p:sp>
+      <p:sp>
+        <p:nvSpPr>
+          <p:cNvPr id="3" name="Содержимое 2"/>
+          <p:cNvSpPr>
+            <a:spLocks noGrp="1"/>
+          </p:cNvSpPr>
+          <p:nvPr>
+            <p:ph idx="1"/>
+          </p:nvPr>
+        </p:nvSpPr>
+        <p:spPr>
+          <a:xfrm>
+            <a:off x="3563888" y="188640"/>
+            <a:ext cx="5317430" cy="5964262"/>
           </a:xfrm>
         </p:spPr>
         <p:txBody>
@@ -3143,135 +5616,1801 @@
           </a:bodyPr>
           <a:lstStyle/>
           <a:p>
-            <a:pPr algn="l"/>
-            <a:r>
-              <a:rPr lang="en-US" sz="2400" u="sng" dirty="0" err="1">
+            <a:pPr>
+              <a:buNone/>
+            </a:pPr>
+            <a:r>
+              <a:rPr lang="ru-RU" sz="1100" dirty="0" smtClean="0">
+                <a:latin typeface="Arial" pitchFamily="34" charset="0"/>
+                <a:cs typeface="Arial" pitchFamily="34" charset="0"/>
+              </a:rPr>
+              <a:t>1) Клиент получает приветствие и описание.</a:t>
+            </a:r>
+          </a:p>
+          <a:p>
+            <a:pPr>
+              <a:buNone/>
+            </a:pPr>
+            <a:r>
+              <a:rPr lang="ru-RU" sz="1100" dirty="0" smtClean="0">
+                <a:latin typeface="Arial" pitchFamily="34" charset="0"/>
+                <a:cs typeface="Arial" pitchFamily="34" charset="0"/>
+              </a:rPr>
+              <a:t>2) Выбор : </a:t>
+            </a:r>
+          </a:p>
+          <a:p>
+            <a:pPr>
+              <a:buNone/>
+            </a:pPr>
+            <a:r>
+              <a:rPr lang="ru-RU" sz="1100" dirty="0" smtClean="0">
+                <a:latin typeface="Arial" pitchFamily="34" charset="0"/>
+                <a:cs typeface="Arial" pitchFamily="34" charset="0"/>
+              </a:rPr>
+              <a:t>✅ Услуг</a:t>
+            </a:r>
+          </a:p>
+          <a:p>
+            <a:pPr>
+              <a:buNone/>
+            </a:pPr>
+            <a:r>
+              <a:rPr lang="ru-RU" sz="1100" dirty="0" smtClean="0">
+                <a:latin typeface="Arial" pitchFamily="34" charset="0"/>
+                <a:cs typeface="Arial" pitchFamily="34" charset="0"/>
+              </a:rPr>
+              <a:t>✅ Отображение категорий</a:t>
+            </a:r>
+          </a:p>
+          <a:p>
+            <a:pPr>
+              <a:buNone/>
+            </a:pPr>
+            <a:r>
+              <a:rPr lang="ru-RU" sz="1100" dirty="0" smtClean="0">
+                <a:latin typeface="Arial" pitchFamily="34" charset="0"/>
+                <a:cs typeface="Arial" pitchFamily="34" charset="0"/>
+              </a:rPr>
+              <a:t>3) Если выбрал "ДА" Переход к Желаемому через БД запрос / "НЕТ" возврат блок 4</a:t>
+            </a:r>
+          </a:p>
+          <a:p>
+            <a:pPr>
+              <a:buNone/>
+            </a:pPr>
+            <a:r>
+              <a:rPr lang="ru-RU" sz="1100" dirty="0" smtClean="0">
+                <a:latin typeface="Arial" pitchFamily="34" charset="0"/>
+                <a:cs typeface="Arial" pitchFamily="34" charset="0"/>
+              </a:rPr>
+              <a:t>4) Клиенту приходит напоминание для выбора действия (чат сохраняется 24ч)</a:t>
+            </a:r>
+          </a:p>
+          <a:p>
+            <a:pPr>
+              <a:buNone/>
+            </a:pPr>
+            <a:r>
+              <a:rPr lang="ru-RU" sz="1100" dirty="0" smtClean="0">
+                <a:latin typeface="Arial" pitchFamily="34" charset="0"/>
+                <a:cs typeface="Arial" pitchFamily="34" charset="0"/>
+              </a:rPr>
+              <a:t>5) Показывает список УСЛУГ </a:t>
+            </a:r>
+          </a:p>
+          <a:p>
+            <a:pPr>
+              <a:buNone/>
+            </a:pPr>
+            <a:r>
+              <a:rPr lang="ru-RU" sz="1100" dirty="0" smtClean="0">
+                <a:latin typeface="Arial" pitchFamily="34" charset="0"/>
+                <a:cs typeface="Arial" pitchFamily="34" charset="0"/>
+              </a:rPr>
+              <a:t>6) Клиент выбрал услугу? Да/Нет</a:t>
+            </a:r>
+          </a:p>
+          <a:p>
+            <a:pPr>
+              <a:buNone/>
+            </a:pPr>
+            <a:r>
+              <a:rPr lang="ru-RU" sz="1100" dirty="0" smtClean="0">
+                <a:latin typeface="Arial" pitchFamily="34" charset="0"/>
+                <a:cs typeface="Arial" pitchFamily="34" charset="0"/>
+              </a:rPr>
+              <a:t>7) (нет) Переход на "5"</a:t>
+            </a:r>
+          </a:p>
+          <a:p>
+            <a:pPr>
+              <a:buNone/>
+            </a:pPr>
+            <a:r>
+              <a:rPr lang="ru-RU" sz="1100" dirty="0" smtClean="0">
+                <a:latin typeface="Arial" pitchFamily="34" charset="0"/>
+                <a:cs typeface="Arial" pitchFamily="34" charset="0"/>
+              </a:rPr>
+              <a:t>8) (ДА) Отображение списка доступных мастеров</a:t>
+            </a:r>
+          </a:p>
+          <a:p>
+            <a:pPr>
+              <a:buNone/>
+            </a:pPr>
+            <a:r>
+              <a:rPr lang="ru-RU" sz="1100" dirty="0" smtClean="0">
+                <a:latin typeface="Arial" pitchFamily="34" charset="0"/>
+                <a:cs typeface="Arial" pitchFamily="34" charset="0"/>
+              </a:rPr>
+              <a:t>9) Клиент выбрал мастеров? Да/Нет</a:t>
+            </a:r>
+          </a:p>
+          <a:p>
+            <a:pPr>
+              <a:buNone/>
+            </a:pPr>
+            <a:r>
+              <a:rPr lang="ru-RU" sz="1100" dirty="0" smtClean="0">
+                <a:latin typeface="Arial" pitchFamily="34" charset="0"/>
+                <a:cs typeface="Arial" pitchFamily="34" charset="0"/>
+              </a:rPr>
+              <a:t>10) (ДА) Отображение календаря и свободных окон</a:t>
+            </a:r>
+          </a:p>
+          <a:p>
+            <a:pPr>
+              <a:buNone/>
+            </a:pPr>
+            <a:r>
+              <a:rPr lang="ru-RU" sz="1100" dirty="0" smtClean="0">
+                <a:latin typeface="Arial" pitchFamily="34" charset="0"/>
+                <a:cs typeface="Arial" pitchFamily="34" charset="0"/>
+              </a:rPr>
+              <a:t>11) (нет) Переход на "8"</a:t>
+            </a:r>
+          </a:p>
+          <a:p>
+            <a:pPr>
+              <a:buNone/>
+            </a:pPr>
+            <a:r>
+              <a:rPr lang="ru-RU" sz="1100" dirty="0" smtClean="0">
+                <a:latin typeface="Arial" pitchFamily="34" charset="0"/>
+                <a:cs typeface="Arial" pitchFamily="34" charset="0"/>
+              </a:rPr>
+              <a:t>11) Клиент выбрал Дату и время? Да/Нет</a:t>
+            </a:r>
+          </a:p>
+          <a:p>
+            <a:pPr>
+              <a:buNone/>
+            </a:pPr>
+            <a:r>
+              <a:rPr lang="ru-RU" sz="1100" dirty="0" smtClean="0">
+                <a:latin typeface="Arial" pitchFamily="34" charset="0"/>
+                <a:cs typeface="Arial" pitchFamily="34" charset="0"/>
+              </a:rPr>
+              <a:t>13) (ДА) Регистрация</a:t>
+            </a:r>
+          </a:p>
+          <a:p>
+            <a:pPr>
+              <a:buNone/>
+            </a:pPr>
+            <a:r>
+              <a:rPr lang="ru-RU" sz="1100" dirty="0" smtClean="0">
+                <a:latin typeface="Arial" pitchFamily="34" charset="0"/>
+                <a:cs typeface="Arial" pitchFamily="34" charset="0"/>
+              </a:rPr>
+              <a:t>14) (нет) Переход на "10"</a:t>
+            </a:r>
+          </a:p>
+          <a:p>
+            <a:pPr>
+              <a:buNone/>
+            </a:pPr>
+            <a:r>
+              <a:rPr lang="ru-RU" sz="1100" dirty="0" smtClean="0">
+                <a:latin typeface="Arial" pitchFamily="34" charset="0"/>
+                <a:cs typeface="Arial" pitchFamily="34" charset="0"/>
+              </a:rPr>
+              <a:t>15) Регистрация (Имя, Телефон)</a:t>
+            </a:r>
+          </a:p>
+          <a:p>
+            <a:pPr>
+              <a:buNone/>
+            </a:pPr>
+            <a:r>
+              <a:rPr lang="ru-RU" sz="1100" dirty="0" smtClean="0">
+                <a:latin typeface="Arial" pitchFamily="34" charset="0"/>
+                <a:cs typeface="Arial" pitchFamily="34" charset="0"/>
+              </a:rPr>
+              <a:t>16) Клиент зарегистрирован? Да/Нет</a:t>
+            </a:r>
+          </a:p>
+          <a:p>
+            <a:pPr>
+              <a:buNone/>
+            </a:pPr>
+            <a:r>
+              <a:rPr lang="ru-RU" sz="1100" dirty="0" smtClean="0">
+                <a:latin typeface="Arial" pitchFamily="34" charset="0"/>
+                <a:cs typeface="Arial" pitchFamily="34" charset="0"/>
+              </a:rPr>
+              <a:t>17) (ДА) Проверка в БД по номеру</a:t>
+            </a:r>
+          </a:p>
+          <a:p>
+            <a:pPr>
+              <a:buNone/>
+            </a:pPr>
+            <a:r>
+              <a:rPr lang="ru-RU" sz="1100" dirty="0" smtClean="0">
+                <a:latin typeface="Arial" pitchFamily="34" charset="0"/>
+                <a:cs typeface="Arial" pitchFamily="34" charset="0"/>
+              </a:rPr>
+              <a:t>18) (нет) Регистрация</a:t>
+            </a:r>
+          </a:p>
+          <a:p>
+            <a:pPr>
+              <a:buNone/>
+            </a:pPr>
+            <a:r>
+              <a:rPr lang="ru-RU" sz="1100" dirty="0" smtClean="0">
+                <a:latin typeface="Arial" pitchFamily="34" charset="0"/>
+                <a:cs typeface="Arial" pitchFamily="34" charset="0"/>
+              </a:rPr>
+              <a:t>19) Клик по кнопке "Записаться"</a:t>
+            </a:r>
+          </a:p>
+          <a:p>
+            <a:pPr>
+              <a:buNone/>
+            </a:pPr>
+            <a:r>
+              <a:rPr lang="ru-RU" sz="1100" dirty="0" smtClean="0">
+                <a:latin typeface="Arial" pitchFamily="34" charset="0"/>
+                <a:cs typeface="Arial" pitchFamily="34" charset="0"/>
+              </a:rPr>
+              <a:t>20) "Проверка" Слот времени еще свободен в БД?</a:t>
+            </a:r>
+          </a:p>
+          <a:p>
+            <a:pPr>
+              <a:buNone/>
+            </a:pPr>
+            <a:r>
+              <a:rPr lang="ru-RU" sz="1100" dirty="0" smtClean="0">
+                <a:latin typeface="Arial" pitchFamily="34" charset="0"/>
+                <a:cs typeface="Arial" pitchFamily="34" charset="0"/>
+              </a:rPr>
+              <a:t>21) Время еще доступно? Да/Нет</a:t>
+            </a:r>
+          </a:p>
+          <a:p>
+            <a:pPr>
+              <a:buNone/>
+            </a:pPr>
+            <a:r>
+              <a:rPr lang="ru-RU" sz="1100" dirty="0" smtClean="0">
+                <a:latin typeface="Arial" pitchFamily="34" charset="0"/>
+                <a:cs typeface="Arial" pitchFamily="34" charset="0"/>
+              </a:rPr>
+              <a:t>22) (нет) Переход на "11"</a:t>
+            </a:r>
+          </a:p>
+          <a:p>
+            <a:pPr>
+              <a:buNone/>
+            </a:pPr>
+            <a:r>
+              <a:rPr lang="ru-RU" sz="1100" dirty="0" smtClean="0">
+                <a:latin typeface="Arial" pitchFamily="34" charset="0"/>
+                <a:cs typeface="Arial" pitchFamily="34" charset="0"/>
+              </a:rPr>
+              <a:t>23) (ДА) Запись строки в БД "</a:t>
+            </a:r>
+            <a:r>
+              <a:rPr lang="ru-RU" sz="1100" dirty="0" err="1" smtClean="0">
+                <a:latin typeface="Arial" pitchFamily="34" charset="0"/>
+                <a:cs typeface="Arial" pitchFamily="34" charset="0"/>
+              </a:rPr>
+              <a:t>Appointments</a:t>
+            </a:r>
+            <a:r>
+              <a:rPr lang="ru-RU" sz="1100" dirty="0" smtClean="0">
+                <a:latin typeface="Arial" pitchFamily="34" charset="0"/>
+                <a:cs typeface="Arial" pitchFamily="34" charset="0"/>
+              </a:rPr>
+              <a:t>"</a:t>
+            </a:r>
+          </a:p>
+          <a:p>
+            <a:pPr>
+              <a:buNone/>
+            </a:pPr>
+            <a:r>
+              <a:rPr lang="ru-RU" sz="1100" dirty="0" smtClean="0">
+                <a:latin typeface="Arial" pitchFamily="34" charset="0"/>
+                <a:cs typeface="Arial" pitchFamily="34" charset="0"/>
+              </a:rPr>
+              <a:t>24) Telegram уведомления клиенту и мастеру</a:t>
+            </a:r>
+          </a:p>
+          <a:p>
+            <a:pPr>
+              <a:buNone/>
+            </a:pPr>
+            <a:r>
+              <a:rPr lang="ru-RU" sz="1100" dirty="0" smtClean="0">
+                <a:latin typeface="Arial" pitchFamily="34" charset="0"/>
+                <a:cs typeface="Arial" pitchFamily="34" charset="0"/>
+              </a:rPr>
+              <a:t>25) "Вы успешно записаны!"</a:t>
+            </a:r>
+          </a:p>
+          <a:p>
+            <a:pPr>
+              <a:buNone/>
+            </a:pPr>
+            <a:r>
+              <a:rPr lang="ru-RU" sz="1100" dirty="0" smtClean="0">
+                <a:latin typeface="Arial" pitchFamily="34" charset="0"/>
+                <a:cs typeface="Arial" pitchFamily="34" charset="0"/>
+              </a:rPr>
+              <a:t>26) </a:t>
+            </a:r>
+            <a:r>
+              <a:rPr lang="ru-RU" sz="1100" dirty="0" smtClean="0">
+                <a:latin typeface="Arial" pitchFamily="34" charset="0"/>
+                <a:cs typeface="Arial" pitchFamily="34" charset="0"/>
+              </a:rPr>
+              <a:t>FINISH</a:t>
+            </a:r>
+          </a:p>
+          <a:p>
+            <a:pPr>
+              <a:buNone/>
+            </a:pPr>
+            <a:endParaRPr lang="ru-RU" sz="1100" dirty="0" smtClean="0">
+              <a:latin typeface="Arial" pitchFamily="34" charset="0"/>
+              <a:cs typeface="Arial" pitchFamily="34" charset="0"/>
+            </a:endParaRPr>
+          </a:p>
+        </p:txBody>
+      </p:sp>
+      <p:sp>
+        <p:nvSpPr>
+          <p:cNvPr id="4" name="Текст 3"/>
+          <p:cNvSpPr>
+            <a:spLocks noGrp="1"/>
+          </p:cNvSpPr>
+          <p:nvPr>
+            <p:ph type="body" sz="half" idx="2"/>
+          </p:nvPr>
+        </p:nvSpPr>
+        <p:spPr>
+          <a:xfrm>
+            <a:off x="457200" y="1435100"/>
+            <a:ext cx="5554960" cy="5162252"/>
+          </a:xfrm>
+        </p:spPr>
+        <p:txBody>
+          <a:bodyPr>
+            <a:normAutofit fontScale="85000" lnSpcReduction="10000"/>
+          </a:bodyPr>
+          <a:lstStyle/>
+          <a:p>
+            <a:r>
+              <a:rPr lang="ru-RU" sz="1800" dirty="0" smtClean="0">
+                <a:latin typeface="Arial" pitchFamily="34" charset="0"/>
+                <a:cs typeface="Arial" pitchFamily="34" charset="0"/>
+                <a:hlinkClick r:id="rId3" action="ppaction://hlinkfile"/>
+              </a:rPr>
+              <a:t>Старт</a:t>
+            </a:r>
+            <a:endParaRPr lang="ru-RU" sz="1800" dirty="0" smtClean="0">
+              <a:latin typeface="Arial" pitchFamily="34" charset="0"/>
+              <a:cs typeface="Arial" pitchFamily="34" charset="0"/>
+            </a:endParaRPr>
+          </a:p>
+          <a:p>
+            <a:endParaRPr lang="ru-RU" sz="1800" dirty="0" smtClean="0">
+              <a:latin typeface="Arial" pitchFamily="34" charset="0"/>
+              <a:cs typeface="Arial" pitchFamily="34" charset="0"/>
+            </a:endParaRPr>
+          </a:p>
+          <a:p>
+            <a:endParaRPr lang="ru-RU" sz="1800" dirty="0" smtClean="0">
+              <a:latin typeface="Arial" pitchFamily="34" charset="0"/>
+              <a:cs typeface="Arial" pitchFamily="34" charset="0"/>
+            </a:endParaRPr>
+          </a:p>
+          <a:p>
+            <a:endParaRPr lang="ru-RU" sz="1800" dirty="0" smtClean="0">
+              <a:latin typeface="Arial" pitchFamily="34" charset="0"/>
+              <a:cs typeface="Arial" pitchFamily="34" charset="0"/>
+            </a:endParaRPr>
+          </a:p>
+          <a:p>
+            <a:endParaRPr lang="ru-RU" sz="1800" dirty="0" smtClean="0">
+              <a:latin typeface="Arial" pitchFamily="34" charset="0"/>
+              <a:cs typeface="Arial" pitchFamily="34" charset="0"/>
+            </a:endParaRPr>
+          </a:p>
+          <a:p>
+            <a:endParaRPr lang="ru-RU" sz="1800" dirty="0" smtClean="0">
+              <a:latin typeface="Arial" pitchFamily="34" charset="0"/>
+              <a:cs typeface="Arial" pitchFamily="34" charset="0"/>
+            </a:endParaRPr>
+          </a:p>
+          <a:p>
+            <a:endParaRPr lang="ru-RU" sz="1800" dirty="0" smtClean="0">
+              <a:latin typeface="Arial" pitchFamily="34" charset="0"/>
+              <a:cs typeface="Arial" pitchFamily="34" charset="0"/>
+            </a:endParaRPr>
+          </a:p>
+          <a:p>
+            <a:endParaRPr lang="ru-RU" sz="1800" dirty="0" smtClean="0">
+              <a:latin typeface="Arial" pitchFamily="34" charset="0"/>
+              <a:cs typeface="Arial" pitchFamily="34" charset="0"/>
+            </a:endParaRPr>
+          </a:p>
+          <a:p>
+            <a:endParaRPr lang="ru-RU" sz="1800" dirty="0" smtClean="0">
+              <a:latin typeface="Arial" pitchFamily="34" charset="0"/>
+              <a:cs typeface="Arial" pitchFamily="34" charset="0"/>
+            </a:endParaRPr>
+          </a:p>
+          <a:p>
+            <a:endParaRPr lang="ru-RU" sz="1800" dirty="0" smtClean="0">
+              <a:latin typeface="Arial" pitchFamily="34" charset="0"/>
+              <a:cs typeface="Arial" pitchFamily="34" charset="0"/>
+            </a:endParaRPr>
+          </a:p>
+          <a:p>
+            <a:r>
+              <a:rPr lang="ru-RU" sz="1800" dirty="0" smtClean="0">
+                <a:latin typeface="Arial" pitchFamily="34" charset="0"/>
+                <a:cs typeface="Arial" pitchFamily="34" charset="0"/>
+                <a:hlinkClick r:id="rId4" action="ppaction://hlinkfile"/>
+              </a:rPr>
+              <a:t>Мастер-Клиент</a:t>
+            </a:r>
+            <a:endParaRPr lang="ru-RU" sz="1800" dirty="0" smtClean="0">
+              <a:latin typeface="Arial" pitchFamily="34" charset="0"/>
+              <a:cs typeface="Arial" pitchFamily="34" charset="0"/>
+            </a:endParaRPr>
+          </a:p>
+          <a:p>
+            <a:endParaRPr lang="ru-RU" sz="1800" dirty="0" smtClean="0">
+              <a:latin typeface="Arial" pitchFamily="34" charset="0"/>
+              <a:cs typeface="Arial" pitchFamily="34" charset="0"/>
+            </a:endParaRPr>
+          </a:p>
+          <a:p>
+            <a:endParaRPr lang="ru-RU" sz="1800" dirty="0" smtClean="0">
+              <a:latin typeface="Arial" pitchFamily="34" charset="0"/>
+              <a:cs typeface="Arial" pitchFamily="34" charset="0"/>
+            </a:endParaRPr>
+          </a:p>
+          <a:p>
+            <a:endParaRPr lang="ru-RU" sz="1800" dirty="0" smtClean="0">
+              <a:latin typeface="Arial" pitchFamily="34" charset="0"/>
+              <a:cs typeface="Arial" pitchFamily="34" charset="0"/>
+            </a:endParaRPr>
+          </a:p>
+          <a:p>
+            <a:endParaRPr lang="ru-RU" sz="1800" dirty="0" smtClean="0">
+              <a:latin typeface="Arial" pitchFamily="34" charset="0"/>
+              <a:cs typeface="Arial" pitchFamily="34" charset="0"/>
+            </a:endParaRPr>
+          </a:p>
+          <a:p>
+            <a:endParaRPr lang="ru-RU" sz="1800" dirty="0" smtClean="0">
+              <a:latin typeface="Arial" pitchFamily="34" charset="0"/>
+              <a:cs typeface="Arial" pitchFamily="34" charset="0"/>
+            </a:endParaRPr>
+          </a:p>
+          <a:p>
+            <a:endParaRPr lang="ru-RU" sz="1800" dirty="0" smtClean="0">
+              <a:latin typeface="Arial" pitchFamily="34" charset="0"/>
+              <a:cs typeface="Arial" pitchFamily="34" charset="0"/>
+            </a:endParaRPr>
+          </a:p>
+          <a:p>
+            <a:endParaRPr lang="ru-RU" sz="1800" dirty="0" smtClean="0">
+              <a:latin typeface="Arial" pitchFamily="34" charset="0"/>
+              <a:cs typeface="Arial" pitchFamily="34" charset="0"/>
+            </a:endParaRPr>
+          </a:p>
+          <a:p>
+            <a:endParaRPr lang="ru-RU" sz="1800" dirty="0" smtClean="0">
+              <a:latin typeface="Arial" pitchFamily="34" charset="0"/>
+              <a:cs typeface="Arial" pitchFamily="34" charset="0"/>
+            </a:endParaRPr>
+          </a:p>
+          <a:p>
+            <a:r>
+              <a:rPr lang="en-US" sz="2100" dirty="0" smtClean="0">
+                <a:latin typeface="Arial" pitchFamily="34" charset="0"/>
+                <a:cs typeface="Arial" pitchFamily="34" charset="0"/>
+                <a:hlinkClick r:id="rId5"/>
+              </a:rPr>
+              <a:t>https://localhost:7023/api/Appointment/client/1002</a:t>
+            </a:r>
+            <a:endParaRPr lang="ru-RU" sz="2100" dirty="0">
+              <a:latin typeface="Arial" pitchFamily="34" charset="0"/>
+              <a:cs typeface="Arial" pitchFamily="34" charset="0"/>
+            </a:endParaRPr>
+          </a:p>
+        </p:txBody>
+      </p:sp>
+    </p:spTree>
+  </p:cSld>
+  <p:clrMapOvr>
+    <a:masterClrMapping/>
+  </p:clrMapOvr>
+</p:sld>
+</file>
+
+<file path=ppt/slides/slide15.xml><?xml version="1.0" encoding="utf-8"?>
+<p:sld xmlns:a="http://schemas.openxmlformats.org/drawingml/2006/main" xmlns:r="http://schemas.openxmlformats.org/officeDocument/2006/relationships" xmlns:p="http://schemas.openxmlformats.org/presentationml/2006/main">
+  <p:cSld>
+    <p:spTree>
+      <p:nvGrpSpPr>
+        <p:cNvPr id="1" name=""/>
+        <p:cNvGrpSpPr/>
+        <p:nvPr/>
+      </p:nvGrpSpPr>
+      <p:grpSpPr>
+        <a:xfrm>
+          <a:off x="0" y="0"/>
+          <a:ext cx="0" cy="0"/>
+          <a:chOff x="0" y="0"/>
+          <a:chExt cx="0" cy="0"/>
+        </a:xfrm>
+      </p:grpSpPr>
+      <p:sp>
+        <p:nvSpPr>
+          <p:cNvPr id="5" name="Заголовок 4"/>
+          <p:cNvSpPr>
+            <a:spLocks noGrp="1"/>
+          </p:cNvSpPr>
+          <p:nvPr>
+            <p:ph type="title"/>
+          </p:nvPr>
+        </p:nvSpPr>
+        <p:spPr>
+          <a:xfrm>
+            <a:off x="457200" y="274638"/>
+            <a:ext cx="8229600" cy="706090"/>
+          </a:xfrm>
+        </p:spPr>
+        <p:txBody>
+          <a:bodyPr>
+            <a:noAutofit/>
+          </a:bodyPr>
+          <a:lstStyle/>
+          <a:p>
+            <a:r>
+              <a:rPr lang="ru-RU" sz="4800" dirty="0" smtClean="0">
+                <a:latin typeface="Arial" pitchFamily="34" charset="0"/>
+                <a:cs typeface="Arial" pitchFamily="34" charset="0"/>
+              </a:rPr>
+              <a:t>Заключение</a:t>
+            </a:r>
+            <a:endParaRPr lang="ru-RU" sz="4800" dirty="0">
+              <a:latin typeface="Arial" pitchFamily="34" charset="0"/>
+              <a:cs typeface="Arial" pitchFamily="34" charset="0"/>
+            </a:endParaRPr>
+          </a:p>
+        </p:txBody>
+      </p:sp>
+      <p:sp>
+        <p:nvSpPr>
+          <p:cNvPr id="6" name="Содержимое 5"/>
+          <p:cNvSpPr>
+            <a:spLocks noGrp="1"/>
+          </p:cNvSpPr>
+          <p:nvPr>
+            <p:ph idx="1"/>
+          </p:nvPr>
+        </p:nvSpPr>
+        <p:spPr>
+          <a:xfrm>
+            <a:off x="457200" y="1052737"/>
+            <a:ext cx="8229600" cy="2376264"/>
+          </a:xfrm>
+        </p:spPr>
+        <p:txBody>
+          <a:bodyPr>
+            <a:normAutofit/>
+          </a:bodyPr>
+          <a:lstStyle/>
+          <a:p>
+            <a:r>
+              <a:rPr lang="ru-RU" sz="2000" b="1" u="sng" dirty="0" smtClean="0"/>
+              <a:t>Цель </a:t>
+            </a:r>
+            <a:r>
+              <a:rPr lang="ru-RU" sz="2000" b="1" u="sng" dirty="0" smtClean="0"/>
+              <a:t>проекта</a:t>
+            </a:r>
+            <a:r>
+              <a:rPr lang="ru-RU" sz="2000" dirty="0" smtClean="0"/>
+              <a:t> — упростить запись клиентов и разгрузить мастеров — </a:t>
+            </a:r>
+            <a:r>
+              <a:rPr lang="ru-RU" sz="2000" b="1" dirty="0" smtClean="0"/>
+              <a:t>достигнута</a:t>
+            </a:r>
+            <a:r>
+              <a:rPr lang="ru-RU" sz="2000" dirty="0" smtClean="0"/>
+              <a:t>. Мы создали работающее ядро системы: REST API на C# с полной </a:t>
+            </a:r>
+            <a:r>
+              <a:rPr lang="ru-RU" sz="2000" dirty="0" err="1" smtClean="0"/>
+              <a:t>бизнес-логикой</a:t>
+            </a:r>
+            <a:r>
+              <a:rPr lang="ru-RU" sz="2000" dirty="0" smtClean="0"/>
+              <a:t>, Telegram-бота для удобного интерфейса и базу данных для </a:t>
+            </a:r>
+            <a:r>
+              <a:rPr lang="ru-RU" sz="2000" dirty="0" smtClean="0"/>
+              <a:t>хранения </a:t>
+            </a:r>
+            <a:r>
+              <a:rPr lang="ru-RU" sz="2000" dirty="0" smtClean="0"/>
+              <a:t>всей информации</a:t>
+            </a:r>
+            <a:r>
+              <a:rPr lang="ru-RU" sz="2000" dirty="0" smtClean="0"/>
+              <a:t>.</a:t>
+            </a:r>
+          </a:p>
+          <a:p>
+            <a:r>
+              <a:rPr lang="ru-RU" sz="2000" dirty="0" smtClean="0"/>
+              <a:t>Реализовали </a:t>
+            </a:r>
+            <a:r>
+              <a:rPr lang="ru-RU" sz="2000" dirty="0" smtClean="0"/>
+              <a:t>ключевой функционал: просмотр свободных слотов, выбор мастера и услуги, создание записи, а также заложили архитектуру, которая позволит легко расширять систему в будущем.</a:t>
+            </a:r>
+            <a:endParaRPr lang="ru-RU" sz="2000" dirty="0">
+              <a:latin typeface="Arial" pitchFamily="34" charset="0"/>
+              <a:cs typeface="Arial" pitchFamily="34" charset="0"/>
+            </a:endParaRPr>
+          </a:p>
+        </p:txBody>
+      </p:sp>
+      <p:sp>
+        <p:nvSpPr>
+          <p:cNvPr id="7" name="Заголовок 4"/>
+          <p:cNvSpPr txBox="1">
+            <a:spLocks/>
+          </p:cNvSpPr>
+          <p:nvPr/>
+        </p:nvSpPr>
+        <p:spPr>
+          <a:xfrm>
+            <a:off x="539552" y="3284984"/>
+            <a:ext cx="8229600" cy="706090"/>
+          </a:xfrm>
+          <a:prstGeom prst="rect">
+            <a:avLst/>
+          </a:prstGeom>
+        </p:spPr>
+        <p:txBody>
+          <a:bodyPr vert="horz" lIns="91440" tIns="45720" rIns="91440" bIns="45720" rtlCol="0" anchor="ctr">
+            <a:noAutofit/>
+          </a:bodyPr>
+          <a:lstStyle/>
+          <a:p>
+            <a:pPr marL="0" marR="0" lvl="0" indent="0" algn="ctr" defTabSz="914400" rtl="0" eaLnBrk="1" fontAlgn="auto" latinLnBrk="0" hangingPunct="1">
+              <a:lnSpc>
+                <a:spcPct val="100000"/>
+              </a:lnSpc>
+              <a:spcBef>
+                <a:spcPct val="0"/>
+              </a:spcBef>
+              <a:spcAft>
+                <a:spcPts val="0"/>
+              </a:spcAft>
+              <a:buClrTx/>
+              <a:buSzTx/>
+              <a:buFontTx/>
+              <a:buNone/>
+              <a:tabLst/>
+              <a:defRPr/>
+            </a:pPr>
+            <a:r>
+              <a:rPr kumimoji="0" lang="ru-RU" sz="3200" b="0" i="0" u="none" strike="noStrike" kern="1200" cap="none" spc="0" normalizeH="0" baseline="0" noProof="0" dirty="0" smtClean="0">
+                <a:ln>
+                  <a:noFill/>
+                </a:ln>
                 <a:solidFill>
                   <a:schemeClr val="tx1"/>
                 </a:solidFill>
-                <a:latin typeface="+mj-lt"/>
+                <a:effectLst/>
+                <a:uLnTx/>
+                <a:uFillTx/>
+                <a:latin typeface="Arial" pitchFamily="34" charset="0"/>
                 <a:ea typeface="+mj-ea"/>
-                <a:cs typeface="Times New Roman" pitchFamily="18" charset="0"/>
-              </a:rPr>
-              <a:t>NailStudio</a:t>
-            </a:r>
-            <a:r>
-              <a:rPr lang="en-US" sz="2400" dirty="0">
+                <a:cs typeface="Arial" pitchFamily="34" charset="0"/>
+              </a:rPr>
+              <a:t>Проблемы и Решения</a:t>
+            </a:r>
+            <a:endParaRPr kumimoji="0" lang="ru-RU" sz="3200" b="0" i="0" u="none" strike="noStrike" kern="1200" cap="none" spc="0" normalizeH="0" baseline="0" noProof="0" dirty="0">
+              <a:ln>
+                <a:noFill/>
+              </a:ln>
+              <a:solidFill>
+                <a:schemeClr val="tx1"/>
+              </a:solidFill>
+              <a:effectLst/>
+              <a:uLnTx/>
+              <a:uFillTx/>
+              <a:latin typeface="Arial" pitchFamily="34" charset="0"/>
+              <a:ea typeface="+mj-ea"/>
+              <a:cs typeface="Arial" pitchFamily="34" charset="0"/>
+            </a:endParaRPr>
+          </a:p>
+        </p:txBody>
+      </p:sp>
+      <p:sp>
+        <p:nvSpPr>
+          <p:cNvPr id="9" name="Содержимое 5"/>
+          <p:cNvSpPr txBox="1">
+            <a:spLocks/>
+          </p:cNvSpPr>
+          <p:nvPr/>
+        </p:nvSpPr>
+        <p:spPr>
+          <a:xfrm>
+            <a:off x="395536" y="3861048"/>
+            <a:ext cx="4032448" cy="2808312"/>
+          </a:xfrm>
+          <a:prstGeom prst="rect">
+            <a:avLst/>
+          </a:prstGeom>
+        </p:spPr>
+        <p:txBody>
+          <a:bodyPr vert="horz" lIns="91440" tIns="45720" rIns="91440" bIns="45720" rtlCol="0">
+            <a:normAutofit lnSpcReduction="10000"/>
+          </a:bodyPr>
+          <a:lstStyle/>
+          <a:p>
+            <a:pPr marL="342900" marR="0" lvl="0" indent="-342900" algn="l" defTabSz="914400" rtl="0" eaLnBrk="1" fontAlgn="auto" latinLnBrk="0" hangingPunct="1">
+              <a:lnSpc>
+                <a:spcPct val="100000"/>
+              </a:lnSpc>
+              <a:spcBef>
+                <a:spcPct val="20000"/>
+              </a:spcBef>
+              <a:spcAft>
+                <a:spcPts val="0"/>
+              </a:spcAft>
+              <a:buClrTx/>
+              <a:buSzTx/>
+              <a:buFont typeface="Arial" pitchFamily="34" charset="0"/>
+              <a:buChar char="•"/>
+              <a:tabLst/>
+              <a:defRPr/>
+            </a:pPr>
+            <a:r>
+              <a:rPr kumimoji="0" lang="ru-RU" sz="1600" i="0" u="none" strike="noStrike" kern="1200" cap="none" spc="0" normalizeH="0" baseline="0" noProof="0" dirty="0" smtClean="0">
+                <a:ln>
+                  <a:noFill/>
+                </a:ln>
                 <a:solidFill>
                   <a:schemeClr val="tx1"/>
                 </a:solidFill>
-                <a:latin typeface="+mj-lt"/>
-                <a:ea typeface="+mj-ea"/>
-                <a:cs typeface="Times New Roman" pitchFamily="18" charset="0"/>
-              </a:rPr>
-              <a:t> – </a:t>
-            </a:r>
-            <a:r>
-              <a:rPr lang="ru-RU" sz="2400" dirty="0">
+                <a:effectLst/>
+                <a:uLnTx/>
+                <a:uFillTx/>
+                <a:latin typeface="Arial" pitchFamily="34" charset="0"/>
+                <a:cs typeface="Arial" pitchFamily="34" charset="0"/>
+              </a:rPr>
+              <a:t>Запись</a:t>
+            </a:r>
+            <a:r>
+              <a:rPr kumimoji="0" lang="ru-RU" sz="1600" i="0" u="none" strike="noStrike" kern="1200" cap="none" spc="0" normalizeH="0" noProof="0" dirty="0" smtClean="0">
+                <a:ln>
+                  <a:noFill/>
+                </a:ln>
                 <a:solidFill>
                   <a:schemeClr val="tx1"/>
                 </a:solidFill>
-                <a:latin typeface="+mj-lt"/>
-                <a:ea typeface="+mj-ea"/>
-                <a:cs typeface="Times New Roman" pitchFamily="18" charset="0"/>
-              </a:rPr>
-              <a:t>это приложение для записи клиентов и удобная </a:t>
-            </a:r>
-            <a:r>
-              <a:rPr lang="ru-RU" sz="2400" dirty="0" err="1">
+                <a:effectLst/>
+                <a:uLnTx/>
+                <a:uFillTx/>
+                <a:latin typeface="Arial" pitchFamily="34" charset="0"/>
+                <a:cs typeface="Arial" pitchFamily="34" charset="0"/>
+              </a:rPr>
+              <a:t> клиентов </a:t>
+            </a:r>
+            <a:r>
+              <a:rPr kumimoji="0" lang="ru-RU" sz="1600" i="0" u="sng" strike="noStrike" kern="1200" cap="none" spc="0" normalizeH="0" noProof="0" dirty="0" smtClean="0">
+                <a:ln>
+                  <a:noFill/>
+                </a:ln>
                 <a:solidFill>
                   <a:schemeClr val="tx1"/>
                 </a:solidFill>
-                <a:latin typeface="+mj-lt"/>
-                <a:ea typeface="+mj-ea"/>
-                <a:cs typeface="Times New Roman" pitchFamily="18" charset="0"/>
-              </a:rPr>
-              <a:t>crm - система, созданная специально для специалистов бьюти-индустрии</a:t>
-            </a:r>
-            <a:r>
-              <a:rPr lang="ru-RU" sz="2400" dirty="0">
+                <a:effectLst/>
+                <a:uLnTx/>
+                <a:uFillTx/>
+                <a:latin typeface="Arial" pitchFamily="34" charset="0"/>
+                <a:cs typeface="Arial" pitchFamily="34" charset="0"/>
+              </a:rPr>
+              <a:t>Одновременно</a:t>
+            </a:r>
+            <a:r>
+              <a:rPr kumimoji="0" lang="ru-RU" sz="1600" i="0" u="none" strike="noStrike" kern="1200" cap="none" spc="0" normalizeH="0" noProof="0" dirty="0" smtClean="0">
+                <a:ln>
+                  <a:noFill/>
+                </a:ln>
                 <a:solidFill>
                   <a:schemeClr val="tx1"/>
                 </a:solidFill>
-                <a:latin typeface="+mj-lt"/>
-                <a:ea typeface="+mj-ea"/>
-                <a:cs typeface="Times New Roman" pitchFamily="18" charset="0"/>
-              </a:rPr>
-              <a:t>. Платформа предназначена для учёта клиентов, мастеров, услуг и записей, </a:t>
-            </a:r>
-            <a:r>
-              <a:rPr lang="ru-RU" sz="2400" dirty="0" smtClean="0">
-                <a:solidFill>
-                  <a:schemeClr val="tx1"/>
-                </a:solidFill>
-                <a:latin typeface="+mj-lt"/>
-                <a:ea typeface="+mj-ea"/>
-                <a:cs typeface="Times New Roman" pitchFamily="18" charset="0"/>
-              </a:rPr>
-              <a:t>с возможностью</a:t>
-            </a:r>
-            <a:r>
-              <a:rPr lang="ru-RU" sz="2400" dirty="0">
-                <a:solidFill>
-                  <a:schemeClr val="tx1"/>
-                </a:solidFill>
-                <a:latin typeface="+mj-lt"/>
-                <a:ea typeface="+mj-ea"/>
-                <a:cs typeface="Times New Roman" pitchFamily="18" charset="0"/>
-              </a:rPr>
-              <a:t> уведомлений </a:t>
-            </a:r>
-            <a:r>
-              <a:rPr lang="ru-RU" sz="2400" dirty="0" smtClean="0">
-                <a:solidFill>
-                  <a:schemeClr val="tx1"/>
-                </a:solidFill>
-                <a:latin typeface="+mj-lt"/>
-                <a:ea typeface="+mj-ea"/>
-                <a:cs typeface="Times New Roman" pitchFamily="18" charset="0"/>
-              </a:rPr>
-              <a:t>и записи в календарь, так же</a:t>
-            </a:r>
-            <a:r>
-              <a:rPr lang="ru-RU" sz="2400" dirty="0">
-                <a:solidFill>
-                  <a:schemeClr val="tx1"/>
-                </a:solidFill>
-                <a:latin typeface="+mj-lt"/>
-                <a:ea typeface="+mj-ea"/>
-                <a:cs typeface="Times New Roman" pitchFamily="18" charset="0"/>
-              </a:rPr>
-              <a:t> резервного </a:t>
-            </a:r>
-            <a:r>
-              <a:rPr lang="ru-RU" sz="2400" dirty="0" smtClean="0">
-                <a:solidFill>
-                  <a:schemeClr val="tx1"/>
-                </a:solidFill>
-                <a:latin typeface="+mj-lt"/>
-                <a:ea typeface="+mj-ea"/>
-                <a:cs typeface="Times New Roman" pitchFamily="18" charset="0"/>
-              </a:rPr>
-              <a:t>копирования данных. </a:t>
-            </a:r>
-            <a:endParaRPr lang="ru-RU" sz="2400" dirty="0">
+                <a:effectLst/>
+                <a:uLnTx/>
+                <a:uFillTx/>
+                <a:latin typeface="Arial" pitchFamily="34" charset="0"/>
+                <a:cs typeface="Arial" pitchFamily="34" charset="0"/>
+              </a:rPr>
+              <a:t>.</a:t>
+            </a:r>
+          </a:p>
+          <a:p>
+            <a:pPr marL="342900" marR="0" lvl="0" indent="-342900" algn="l" defTabSz="914400" rtl="0" eaLnBrk="1" fontAlgn="auto" latinLnBrk="0" hangingPunct="1">
+              <a:lnSpc>
+                <a:spcPct val="100000"/>
+              </a:lnSpc>
+              <a:spcBef>
+                <a:spcPct val="20000"/>
+              </a:spcBef>
+              <a:spcAft>
+                <a:spcPts val="0"/>
+              </a:spcAft>
+              <a:buClrTx/>
+              <a:buSzTx/>
+              <a:buFont typeface="Arial" pitchFamily="34" charset="0"/>
+              <a:buChar char="•"/>
+              <a:tabLst/>
+              <a:defRPr/>
+            </a:pPr>
+            <a:endParaRPr kumimoji="0" lang="ru-RU" sz="1600" i="0" u="none" strike="noStrike" kern="1200" cap="none" spc="0" normalizeH="0" noProof="0" dirty="0" smtClean="0">
+              <a:ln>
+                <a:noFill/>
+              </a:ln>
               <a:solidFill>
                 <a:schemeClr val="tx1"/>
               </a:solidFill>
-              <a:latin typeface="+mj-lt"/>
-              <a:ea typeface="+mj-ea"/>
-              <a:cs typeface="Times New Roman" pitchFamily="18" charset="0"/>
-            </a:endParaRPr>
-          </a:p>
-          <a:p>
-            <a:pPr algn="l"/>
-            <a:endParaRPr lang="ru-RU" sz="2400" dirty="0">
-              <a:solidFill>
-                <a:schemeClr val="tx1"/>
-              </a:solidFill>
-              <a:latin typeface="+mj-lt"/>
-              <a:ea typeface="+mj-ea"/>
-              <a:cs typeface="Times New Roman" pitchFamily="18" charset="0"/>
+              <a:effectLst/>
+              <a:uLnTx/>
+              <a:uFillTx/>
+              <a:latin typeface="Arial" pitchFamily="34" charset="0"/>
+              <a:cs typeface="Arial" pitchFamily="34" charset="0"/>
+            </a:endParaRPr>
+          </a:p>
+          <a:p>
+            <a:pPr marL="342900" lvl="0" indent="-342900">
+              <a:spcBef>
+                <a:spcPct val="20000"/>
+              </a:spcBef>
+              <a:buFont typeface="Arial" pitchFamily="34" charset="0"/>
+              <a:buChar char="•"/>
+            </a:pPr>
+            <a:r>
+              <a:rPr lang="ru-RU" sz="1600" dirty="0" smtClean="0">
+                <a:latin typeface="Arial" pitchFamily="34" charset="0"/>
+                <a:cs typeface="Arial" pitchFamily="34" charset="0"/>
+              </a:rPr>
+              <a:t>Возможные </a:t>
+            </a:r>
+            <a:r>
+              <a:rPr lang="ru-RU" sz="1600" dirty="0" err="1" smtClean="0">
+                <a:latin typeface="Arial" pitchFamily="34" charset="0"/>
+                <a:cs typeface="Arial" pitchFamily="34" charset="0"/>
+              </a:rPr>
+              <a:t>Баги</a:t>
+            </a:r>
+            <a:r>
+              <a:rPr lang="ru-RU" sz="1600" dirty="0" smtClean="0">
+                <a:latin typeface="Arial" pitchFamily="34" charset="0"/>
+                <a:cs typeface="Arial" pitchFamily="34" charset="0"/>
+              </a:rPr>
+              <a:t> и Ошибки БД и </a:t>
+            </a:r>
+            <a:r>
+              <a:rPr lang="ru-RU" sz="1600" dirty="0" err="1" smtClean="0">
+                <a:latin typeface="Arial" pitchFamily="34" charset="0"/>
+                <a:cs typeface="Arial" pitchFamily="34" charset="0"/>
+              </a:rPr>
+              <a:t>тп</a:t>
+            </a:r>
+            <a:r>
+              <a:rPr lang="ru-RU" sz="1600" dirty="0" smtClean="0">
+                <a:latin typeface="Arial" pitchFamily="34" charset="0"/>
+                <a:cs typeface="Arial" pitchFamily="34" charset="0"/>
+              </a:rPr>
+              <a:t>.</a:t>
+            </a:r>
+          </a:p>
+          <a:p>
+            <a:pPr marL="342900" lvl="0" indent="-342900">
+              <a:spcBef>
+                <a:spcPct val="20000"/>
+              </a:spcBef>
+              <a:buFont typeface="Arial" pitchFamily="34" charset="0"/>
+              <a:buChar char="•"/>
+            </a:pPr>
+            <a:endParaRPr lang="ru-RU" sz="1600" dirty="0" smtClean="0">
+              <a:latin typeface="Arial" pitchFamily="34" charset="0"/>
+              <a:cs typeface="Arial" pitchFamily="34" charset="0"/>
+            </a:endParaRPr>
+          </a:p>
+          <a:p>
+            <a:pPr marL="342900" lvl="0" indent="-342900">
+              <a:spcBef>
+                <a:spcPct val="20000"/>
+              </a:spcBef>
+              <a:buFont typeface="Arial" pitchFamily="34" charset="0"/>
+              <a:buChar char="•"/>
+            </a:pPr>
+            <a:r>
+              <a:rPr lang="ru-RU" sz="1600" dirty="0" smtClean="0">
+                <a:latin typeface="Arial" pitchFamily="34" charset="0"/>
+                <a:cs typeface="Arial" pitchFamily="34" charset="0"/>
+              </a:rPr>
+              <a:t>Локализация данных </a:t>
+            </a:r>
+            <a:r>
+              <a:rPr lang="ru-RU" sz="1600" dirty="0" smtClean="0">
+                <a:latin typeface="Arial" pitchFamily="34" charset="0"/>
+                <a:cs typeface="Arial" pitchFamily="34" charset="0"/>
+              </a:rPr>
+              <a:t>и соответствие </a:t>
+            </a:r>
+            <a:r>
+              <a:rPr lang="ru-RU" sz="1600" dirty="0" smtClean="0">
+                <a:latin typeface="Arial" pitchFamily="34" charset="0"/>
+                <a:cs typeface="Arial" pitchFamily="34" charset="0"/>
+              </a:rPr>
+              <a:t>152-ФЗ</a:t>
+            </a:r>
+          </a:p>
+          <a:p>
+            <a:pPr marL="342900" lvl="0" indent="-342900">
+              <a:spcBef>
+                <a:spcPct val="20000"/>
+              </a:spcBef>
+              <a:buFont typeface="Arial" pitchFamily="34" charset="0"/>
+              <a:buChar char="•"/>
+            </a:pPr>
+            <a:endParaRPr lang="ru-RU" sz="1100" dirty="0" smtClean="0">
+              <a:latin typeface="Arial" pitchFamily="34" charset="0"/>
+              <a:cs typeface="Arial" pitchFamily="34" charset="0"/>
+            </a:endParaRPr>
+          </a:p>
+          <a:p>
+            <a:pPr marL="342900" lvl="0" indent="-342900">
+              <a:spcBef>
+                <a:spcPct val="20000"/>
+              </a:spcBef>
+              <a:buFont typeface="Arial" pitchFamily="34" charset="0"/>
+              <a:buChar char="•"/>
+            </a:pPr>
+            <a:r>
+              <a:rPr lang="ru-RU" sz="1600" dirty="0" smtClean="0">
+                <a:latin typeface="Arial" pitchFamily="34" charset="0"/>
+                <a:cs typeface="Arial" pitchFamily="34" charset="0"/>
+              </a:rPr>
+              <a:t>А</a:t>
+            </a:r>
+            <a:r>
+              <a:rPr lang="ru-RU" sz="1600" dirty="0" smtClean="0">
+                <a:latin typeface="Arial" pitchFamily="34" charset="0"/>
+                <a:cs typeface="Arial" pitchFamily="34" charset="0"/>
+              </a:rPr>
+              <a:t>втоматические уведомления</a:t>
+            </a:r>
+          </a:p>
+          <a:p>
+            <a:pPr marL="342900" lvl="0" indent="-342900">
+              <a:spcBef>
+                <a:spcPct val="20000"/>
+              </a:spcBef>
+              <a:buFont typeface="Arial" pitchFamily="34" charset="0"/>
+              <a:buChar char="•"/>
+            </a:pPr>
+            <a:r>
+              <a:rPr lang="ru-RU" sz="1600" dirty="0" smtClean="0">
+                <a:latin typeface="Arial" pitchFamily="34" charset="0"/>
+                <a:cs typeface="Arial" pitchFamily="34" charset="0"/>
+              </a:rPr>
+              <a:t>Тестирование, </a:t>
+            </a:r>
+            <a:r>
+              <a:rPr lang="ru-RU" sz="1600" dirty="0" err="1" smtClean="0">
+                <a:latin typeface="Arial" pitchFamily="34" charset="0"/>
+                <a:cs typeface="Arial" pitchFamily="34" charset="0"/>
+              </a:rPr>
+              <a:t>логир</a:t>
+            </a:r>
+            <a:r>
+              <a:rPr lang="ru-RU" sz="1600" dirty="0" smtClean="0">
+                <a:latin typeface="Arial" pitchFamily="34" charset="0"/>
+                <a:cs typeface="Arial" pitchFamily="34" charset="0"/>
+              </a:rPr>
+              <a:t>. и хранение</a:t>
+            </a:r>
+          </a:p>
+          <a:p>
+            <a:pPr marL="342900" lvl="0" indent="-342900">
+              <a:spcBef>
+                <a:spcPct val="20000"/>
+              </a:spcBef>
+              <a:buFont typeface="Arial" pitchFamily="34" charset="0"/>
+              <a:buChar char="•"/>
+            </a:pPr>
+            <a:r>
+              <a:rPr lang="ru-RU" sz="1600" dirty="0" smtClean="0">
+                <a:latin typeface="Arial" pitchFamily="34" charset="0"/>
+                <a:cs typeface="Arial" pitchFamily="34" charset="0"/>
+              </a:rPr>
+              <a:t>Блокировки и </a:t>
+            </a:r>
+            <a:r>
+              <a:rPr lang="en-US" sz="1600" dirty="0" smtClean="0">
+                <a:latin typeface="Arial" pitchFamily="34" charset="0"/>
+                <a:cs typeface="Arial" pitchFamily="34" charset="0"/>
+              </a:rPr>
+              <a:t>VPN</a:t>
+            </a:r>
+            <a:endParaRPr lang="ru-RU" sz="1600" dirty="0">
+              <a:latin typeface="Arial" pitchFamily="34" charset="0"/>
+              <a:cs typeface="Arial" pitchFamily="34" charset="0"/>
+            </a:endParaRPr>
+          </a:p>
+        </p:txBody>
+      </p:sp>
+      <p:sp>
+        <p:nvSpPr>
+          <p:cNvPr id="10" name="Содержимое 5"/>
+          <p:cNvSpPr txBox="1">
+            <a:spLocks/>
+          </p:cNvSpPr>
+          <p:nvPr/>
+        </p:nvSpPr>
+        <p:spPr>
+          <a:xfrm>
+            <a:off x="4572000" y="3861048"/>
+            <a:ext cx="4032448" cy="2880320"/>
+          </a:xfrm>
+          <a:prstGeom prst="rect">
+            <a:avLst/>
+          </a:prstGeom>
+        </p:spPr>
+        <p:txBody>
+          <a:bodyPr vert="horz" lIns="91440" tIns="45720" rIns="91440" bIns="45720" rtlCol="0">
+            <a:normAutofit/>
+          </a:bodyPr>
+          <a:lstStyle/>
+          <a:p>
+            <a:pPr marL="342900" lvl="0" indent="-342900">
+              <a:spcBef>
+                <a:spcPct val="20000"/>
+              </a:spcBef>
+              <a:buFont typeface="Arial" pitchFamily="34" charset="0"/>
+              <a:buChar char="•"/>
+            </a:pPr>
+            <a:r>
+              <a:rPr lang="ru-RU" sz="1400" dirty="0" smtClean="0">
+                <a:latin typeface="Arial" pitchFamily="34" charset="0"/>
+                <a:cs typeface="Arial" pitchFamily="34" charset="0"/>
+              </a:rPr>
+              <a:t>Подтверждение от мастера(состояние)</a:t>
+            </a:r>
+          </a:p>
+          <a:p>
+            <a:pPr marL="342900" lvl="0" indent="-342900">
+              <a:spcBef>
+                <a:spcPct val="20000"/>
+              </a:spcBef>
+              <a:buFont typeface="Arial" pitchFamily="34" charset="0"/>
+              <a:buChar char="•"/>
+            </a:pPr>
+            <a:r>
+              <a:rPr lang="ru-RU" sz="1400" dirty="0" smtClean="0">
+                <a:latin typeface="Arial" pitchFamily="34" charset="0"/>
+                <a:cs typeface="Arial" pitchFamily="34" charset="0"/>
+              </a:rPr>
+              <a:t>Блокировка записи</a:t>
+            </a:r>
+            <a:endParaRPr lang="ru-RU" sz="1200" spc="20" dirty="0" smtClean="0">
+              <a:latin typeface="Arial" pitchFamily="34" charset="0"/>
+              <a:cs typeface="Arial" pitchFamily="34" charset="0"/>
+            </a:endParaRPr>
+          </a:p>
+          <a:p>
+            <a:pPr marL="342900" lvl="0" indent="-342900">
+              <a:spcBef>
+                <a:spcPct val="20000"/>
+              </a:spcBef>
+              <a:buFont typeface="Arial" pitchFamily="34" charset="0"/>
+              <a:buChar char="•"/>
+            </a:pPr>
+            <a:r>
+              <a:rPr lang="ru-RU" sz="1400" spc="20" dirty="0" smtClean="0">
+                <a:latin typeface="Arial" pitchFamily="34" charset="0"/>
+                <a:cs typeface="Arial" pitchFamily="34" charset="0"/>
+              </a:rPr>
+              <a:t>Нужно тестирование и </a:t>
+            </a:r>
+            <a:r>
+              <a:rPr lang="ru-RU" sz="1400" spc="20" dirty="0" err="1" smtClean="0">
+                <a:latin typeface="Arial" pitchFamily="34" charset="0"/>
+                <a:cs typeface="Arial" pitchFamily="34" charset="0"/>
+              </a:rPr>
+              <a:t>ДеБаг</a:t>
+            </a:r>
+            <a:endParaRPr lang="ru-RU" sz="1400" spc="20" dirty="0" smtClean="0">
+              <a:latin typeface="Arial" pitchFamily="34" charset="0"/>
+              <a:cs typeface="Arial" pitchFamily="34" charset="0"/>
+            </a:endParaRPr>
+          </a:p>
+          <a:p>
+            <a:pPr marL="342900" lvl="0" indent="-342900">
+              <a:spcBef>
+                <a:spcPct val="20000"/>
+              </a:spcBef>
+              <a:buFont typeface="Arial" pitchFamily="34" charset="0"/>
+              <a:buChar char="•"/>
+            </a:pPr>
+            <a:endParaRPr lang="ru-RU" sz="1400" dirty="0" smtClean="0">
+              <a:latin typeface="Arial" pitchFamily="34" charset="0"/>
+              <a:cs typeface="Arial" pitchFamily="34" charset="0"/>
+            </a:endParaRPr>
+          </a:p>
+          <a:p>
+            <a:pPr marL="342900" lvl="0" indent="-342900">
+              <a:spcBef>
+                <a:spcPct val="20000"/>
+              </a:spcBef>
+              <a:buFont typeface="Arial" pitchFamily="34" charset="0"/>
+              <a:buChar char="•"/>
+            </a:pPr>
+            <a:r>
+              <a:rPr lang="ru-RU" sz="1400" dirty="0" smtClean="0">
+                <a:latin typeface="Arial" pitchFamily="34" charset="0"/>
+                <a:cs typeface="Arial" pitchFamily="34" charset="0"/>
+              </a:rPr>
+              <a:t>Изучение вопроса со специалистами</a:t>
+            </a:r>
+            <a:endParaRPr lang="en-US" sz="1400" dirty="0" smtClean="0">
+              <a:latin typeface="Arial" pitchFamily="34" charset="0"/>
+              <a:cs typeface="Arial" pitchFamily="34" charset="0"/>
+            </a:endParaRPr>
+          </a:p>
+          <a:p>
+            <a:pPr marL="342900" lvl="0" indent="-342900">
+              <a:spcBef>
+                <a:spcPct val="20000"/>
+              </a:spcBef>
+              <a:buFont typeface="Arial" pitchFamily="34" charset="0"/>
+              <a:buChar char="•"/>
+            </a:pPr>
+            <a:endParaRPr lang="ru-RU" sz="1400" dirty="0" smtClean="0">
+              <a:latin typeface="Arial" pitchFamily="34" charset="0"/>
+              <a:cs typeface="Arial" pitchFamily="34" charset="0"/>
+            </a:endParaRPr>
+          </a:p>
+          <a:p>
+            <a:pPr marL="342900" lvl="0" indent="-342900">
+              <a:spcBef>
+                <a:spcPct val="20000"/>
+              </a:spcBef>
+              <a:buFont typeface="Arial" pitchFamily="34" charset="0"/>
+              <a:buChar char="•"/>
+            </a:pPr>
+            <a:r>
+              <a:rPr lang="ru-RU" sz="1600" dirty="0" smtClean="0">
+                <a:latin typeface="Arial" pitchFamily="34" charset="0"/>
+                <a:cs typeface="Arial" pitchFamily="34" charset="0"/>
+              </a:rPr>
+              <a:t>В зависимости от проекта и хоста</a:t>
+            </a:r>
+          </a:p>
+          <a:p>
+            <a:pPr marL="342900" lvl="0" indent="-342900">
+              <a:spcBef>
+                <a:spcPct val="20000"/>
+              </a:spcBef>
+            </a:pPr>
+            <a:r>
+              <a:rPr lang="ru-RU" sz="1400" dirty="0" smtClean="0">
+                <a:latin typeface="Arial" pitchFamily="34" charset="0"/>
+                <a:cs typeface="Arial" pitchFamily="34" charset="0"/>
+              </a:rPr>
+              <a:t>(</a:t>
+            </a:r>
+            <a:r>
+              <a:rPr lang="en-US" sz="1400" dirty="0" smtClean="0">
+                <a:latin typeface="Arial" pitchFamily="34" charset="0"/>
+                <a:cs typeface="Arial" pitchFamily="34" charset="0"/>
+              </a:rPr>
+              <a:t>Reg.ru </a:t>
+            </a:r>
+            <a:r>
+              <a:rPr lang="ru-RU" sz="1400" dirty="0" smtClean="0">
+                <a:latin typeface="Arial" pitchFamily="34" charset="0"/>
+                <a:cs typeface="Arial" pitchFamily="34" charset="0"/>
+              </a:rPr>
+              <a:t>там по договору и разобраться </a:t>
+            </a:r>
+            <a:r>
+              <a:rPr lang="en-US" sz="1600" b="1" dirty="0" smtClean="0">
+                <a:latin typeface="Arial" pitchFamily="34" charset="0"/>
+                <a:cs typeface="Arial" pitchFamily="34" charset="0"/>
+              </a:rPr>
+              <a:t>N8N</a:t>
+            </a:r>
+            <a:r>
+              <a:rPr lang="ru-RU" sz="1400" dirty="0" smtClean="0">
+                <a:latin typeface="Arial" pitchFamily="34" charset="0"/>
+                <a:cs typeface="Arial" pitchFamily="34" charset="0"/>
+              </a:rPr>
+              <a:t>)</a:t>
+            </a:r>
+          </a:p>
+          <a:p>
+            <a:pPr marL="342900" lvl="0" indent="-342900">
+              <a:spcBef>
+                <a:spcPct val="20000"/>
+              </a:spcBef>
+              <a:buFont typeface="Arial" pitchFamily="34" charset="0"/>
+              <a:buChar char="•"/>
+            </a:pPr>
+            <a:r>
+              <a:rPr lang="ru-RU" sz="1600" dirty="0" smtClean="0">
+                <a:latin typeface="Arial" pitchFamily="34" charset="0"/>
+                <a:cs typeface="Arial" pitchFamily="34" charset="0"/>
+              </a:rPr>
+              <a:t>Зависит от проекта(на </a:t>
+            </a:r>
+            <a:r>
+              <a:rPr lang="en-US" sz="1600" dirty="0" err="1" smtClean="0">
+                <a:latin typeface="Arial" pitchFamily="34" charset="0"/>
+                <a:cs typeface="Arial" pitchFamily="34" charset="0"/>
+              </a:rPr>
+              <a:t>Yandex</a:t>
+            </a:r>
+            <a:r>
+              <a:rPr lang="en-US" sz="1600" dirty="0" smtClean="0">
+                <a:latin typeface="Arial" pitchFamily="34" charset="0"/>
+                <a:cs typeface="Arial" pitchFamily="34" charset="0"/>
+              </a:rPr>
+              <a:t> </a:t>
+            </a:r>
+            <a:r>
+              <a:rPr lang="en-US" sz="1600" dirty="0" smtClean="0">
+                <a:latin typeface="Arial" pitchFamily="34" charset="0"/>
+                <a:cs typeface="Arial" pitchFamily="34" charset="0"/>
+              </a:rPr>
+              <a:t>Cloud</a:t>
+            </a:r>
+            <a:r>
+              <a:rPr lang="ru-RU" sz="1600" dirty="0" smtClean="0">
+                <a:latin typeface="Arial" pitchFamily="34" charset="0"/>
+                <a:cs typeface="Arial" pitchFamily="34" charset="0"/>
+              </a:rPr>
+              <a:t>)</a:t>
+            </a:r>
+            <a:endParaRPr lang="en-US" sz="1600" dirty="0" smtClean="0">
+              <a:latin typeface="Arial" pitchFamily="34" charset="0"/>
+              <a:cs typeface="Arial" pitchFamily="34" charset="0"/>
+            </a:endParaRPr>
+          </a:p>
+          <a:p>
+            <a:pPr marL="342900" lvl="0" indent="-342900">
+              <a:spcBef>
+                <a:spcPct val="20000"/>
+              </a:spcBef>
+              <a:buFont typeface="Arial" pitchFamily="34" charset="0"/>
+              <a:buChar char="•"/>
+            </a:pPr>
+            <a:r>
+              <a:rPr lang="ru-RU" sz="1600" dirty="0" smtClean="0">
+                <a:latin typeface="Arial" pitchFamily="34" charset="0"/>
+                <a:cs typeface="Arial" pitchFamily="34" charset="0"/>
+              </a:rPr>
+              <a:t>Сторонние сервисы</a:t>
+            </a:r>
+            <a:r>
+              <a:rPr lang="ru-RU" sz="1400" dirty="0" smtClean="0">
+                <a:latin typeface="Arial" pitchFamily="34" charset="0"/>
+                <a:cs typeface="Arial" pitchFamily="34" charset="0"/>
+              </a:rPr>
+              <a:t>(</a:t>
+            </a:r>
+            <a:r>
+              <a:rPr lang="ru-RU" sz="1400" dirty="0" smtClean="0">
+                <a:latin typeface="Arial" pitchFamily="34" charset="0"/>
+                <a:cs typeface="Arial" pitchFamily="34" charset="0"/>
+              </a:rPr>
+              <a:t>К</a:t>
+            </a:r>
+            <a:r>
+              <a:rPr lang="ru-RU" sz="1400" dirty="0" smtClean="0">
+                <a:latin typeface="Arial" pitchFamily="34" charset="0"/>
+                <a:cs typeface="Arial" pitchFamily="34" charset="0"/>
+              </a:rPr>
+              <a:t>азахстан домен)</a:t>
+            </a:r>
+            <a:endParaRPr lang="ru-RU" sz="1600" dirty="0">
+              <a:latin typeface="Arial" pitchFamily="34" charset="0"/>
+              <a:cs typeface="Arial" pitchFamily="34" charset="0"/>
+            </a:endParaRPr>
+          </a:p>
+        </p:txBody>
+      </p:sp>
+    </p:spTree>
+  </p:cSld>
+  <p:clrMapOvr>
+    <a:masterClrMapping/>
+  </p:clrMapOvr>
+</p:sld>
+</file>
+
+<file path=ppt/slides/slide16.xml><?xml version="1.0" encoding="utf-8"?>
+<p:sld xmlns:a="http://schemas.openxmlformats.org/drawingml/2006/main" xmlns:r="http://schemas.openxmlformats.org/officeDocument/2006/relationships" xmlns:p="http://schemas.openxmlformats.org/presentationml/2006/main">
+  <p:cSld>
+    <p:spTree>
+      <p:nvGrpSpPr>
+        <p:cNvPr id="1" name=""/>
+        <p:cNvGrpSpPr/>
+        <p:nvPr/>
+      </p:nvGrpSpPr>
+      <p:grpSpPr>
+        <a:xfrm>
+          <a:off x="0" y="0"/>
+          <a:ext cx="0" cy="0"/>
+          <a:chOff x="0" y="0"/>
+          <a:chExt cx="0" cy="0"/>
+        </a:xfrm>
+      </p:grpSpPr>
+      <p:sp>
+        <p:nvSpPr>
+          <p:cNvPr id="2" name="Заголовок 1"/>
+          <p:cNvSpPr>
+            <a:spLocks noGrp="1"/>
+          </p:cNvSpPr>
+          <p:nvPr>
+            <p:ph type="title"/>
+          </p:nvPr>
+        </p:nvSpPr>
+        <p:spPr>
+          <a:xfrm>
+            <a:off x="457200" y="274638"/>
+            <a:ext cx="8229600" cy="922114"/>
+          </a:xfrm>
+        </p:spPr>
+        <p:txBody>
+          <a:bodyPr>
+            <a:normAutofit fontScale="90000"/>
+          </a:bodyPr>
+          <a:lstStyle/>
+          <a:p>
+            <a:r>
+              <a:rPr lang="ru-RU" sz="4800" dirty="0" smtClean="0">
+                <a:latin typeface="Arial" pitchFamily="34" charset="0"/>
+                <a:cs typeface="Arial" pitchFamily="34" charset="0"/>
+              </a:rPr>
+              <a:t>Планы Развития(Доработки)</a:t>
+            </a:r>
+            <a:endParaRPr lang="ru-RU" sz="4800" dirty="0">
+              <a:latin typeface="Arial" pitchFamily="34" charset="0"/>
+              <a:cs typeface="Arial" pitchFamily="34" charset="0"/>
+            </a:endParaRPr>
+          </a:p>
+        </p:txBody>
+      </p:sp>
+      <p:sp>
+        <p:nvSpPr>
+          <p:cNvPr id="3" name="Содержимое 2"/>
+          <p:cNvSpPr>
+            <a:spLocks noGrp="1"/>
+          </p:cNvSpPr>
+          <p:nvPr>
+            <p:ph idx="1"/>
+          </p:nvPr>
+        </p:nvSpPr>
+        <p:spPr>
+          <a:xfrm>
+            <a:off x="251520" y="1600200"/>
+            <a:ext cx="8640960" cy="4525963"/>
+          </a:xfrm>
+        </p:spPr>
+        <p:txBody>
+          <a:bodyPr/>
+          <a:lstStyle/>
+          <a:p>
+            <a:r>
+              <a:rPr lang="ru-RU" sz="2800" dirty="0" smtClean="0">
+                <a:latin typeface="Arial" pitchFamily="34" charset="0"/>
+                <a:cs typeface="Arial" pitchFamily="34" charset="0"/>
+              </a:rPr>
+              <a:t>Добавление автоматических </a:t>
+            </a:r>
+            <a:r>
+              <a:rPr lang="ru-RU" sz="2800" dirty="0" smtClean="0">
+                <a:latin typeface="Arial" pitchFamily="34" charset="0"/>
+                <a:cs typeface="Arial" pitchFamily="34" charset="0"/>
+              </a:rPr>
+              <a:t>уведомлений</a:t>
+            </a:r>
+          </a:p>
+          <a:p>
+            <a:r>
+              <a:rPr lang="ru-RU" sz="2800" dirty="0" smtClean="0">
+                <a:latin typeface="Arial" pitchFamily="34" charset="0"/>
+                <a:cs typeface="Arial" pitchFamily="34" charset="0"/>
+              </a:rPr>
+              <a:t>Синхронизация с </a:t>
+            </a:r>
+            <a:r>
+              <a:rPr lang="en-US" sz="2800" dirty="0" smtClean="0">
+                <a:latin typeface="Arial" pitchFamily="34" charset="0"/>
+                <a:cs typeface="Arial" pitchFamily="34" charset="0"/>
+              </a:rPr>
+              <a:t>Google-</a:t>
+            </a:r>
+            <a:r>
+              <a:rPr lang="ru-RU" sz="2800" dirty="0" smtClean="0">
+                <a:latin typeface="Arial" pitchFamily="34" charset="0"/>
+                <a:cs typeface="Arial" pitchFamily="34" charset="0"/>
+              </a:rPr>
+              <a:t>календарем</a:t>
+            </a:r>
+          </a:p>
+          <a:p>
+            <a:r>
+              <a:rPr lang="ru-RU" sz="2800" dirty="0" smtClean="0">
+                <a:latin typeface="Arial" pitchFamily="34" charset="0"/>
+                <a:cs typeface="Arial" pitchFamily="34" charset="0"/>
+              </a:rPr>
+              <a:t>Резервное копирование </a:t>
+            </a:r>
+            <a:r>
+              <a:rPr lang="ru-RU" sz="2800" dirty="0" smtClean="0">
+                <a:latin typeface="Arial" pitchFamily="34" charset="0"/>
+                <a:cs typeface="Arial" pitchFamily="34" charset="0"/>
+              </a:rPr>
+              <a:t>данных</a:t>
+            </a:r>
+          </a:p>
+          <a:p>
+            <a:r>
+              <a:rPr lang="ru-RU" sz="2800" dirty="0" err="1" smtClean="0">
+                <a:latin typeface="Arial" pitchFamily="34" charset="0"/>
+                <a:cs typeface="Arial" pitchFamily="34" charset="0"/>
+              </a:rPr>
+              <a:t>Админ-панель</a:t>
+            </a:r>
+            <a:r>
+              <a:rPr lang="ru-RU" sz="2800" dirty="0" smtClean="0">
+                <a:latin typeface="Arial" pitchFamily="34" charset="0"/>
+                <a:cs typeface="Arial" pitchFamily="34" charset="0"/>
+              </a:rPr>
+              <a:t> и </a:t>
+            </a:r>
+            <a:r>
+              <a:rPr lang="ru-RU" sz="2800" dirty="0" err="1" smtClean="0">
+                <a:latin typeface="Arial" pitchFamily="34" charset="0"/>
+                <a:cs typeface="Arial" pitchFamily="34" charset="0"/>
+              </a:rPr>
+              <a:t>веб-интерфейс</a:t>
+            </a:r>
+            <a:endParaRPr lang="ru-RU" sz="2800" dirty="0" smtClean="0">
+              <a:latin typeface="Arial" pitchFamily="34" charset="0"/>
+              <a:cs typeface="Arial" pitchFamily="34" charset="0"/>
+            </a:endParaRPr>
+          </a:p>
+          <a:p>
+            <a:r>
+              <a:rPr lang="ru-RU" sz="2800" dirty="0" smtClean="0">
+                <a:latin typeface="Arial" pitchFamily="34" charset="0"/>
+                <a:cs typeface="Arial" pitchFamily="34" charset="0"/>
+              </a:rPr>
+              <a:t>Интеграция с другими сервисами и Соц.Сетями </a:t>
+            </a:r>
+            <a:r>
+              <a:rPr lang="ru-RU" dirty="0" smtClean="0">
+                <a:latin typeface="Arial" pitchFamily="34" charset="0"/>
+                <a:cs typeface="Arial" pitchFamily="34" charset="0"/>
+              </a:rPr>
+              <a:t>(</a:t>
+            </a:r>
+            <a:r>
+              <a:rPr lang="en-US" sz="2800" dirty="0" smtClean="0">
+                <a:latin typeface="Arial" pitchFamily="34" charset="0"/>
+                <a:cs typeface="Arial" pitchFamily="34" charset="0"/>
+              </a:rPr>
+              <a:t>VK, </a:t>
+            </a:r>
+            <a:r>
+              <a:rPr lang="en-US" sz="2800" dirty="0" err="1" smtClean="0">
+                <a:latin typeface="Arial" pitchFamily="34" charset="0"/>
+                <a:cs typeface="Arial" pitchFamily="34" charset="0"/>
+              </a:rPr>
+              <a:t>WhatsApp</a:t>
+            </a:r>
+            <a:r>
+              <a:rPr lang="ru-RU" sz="2800" dirty="0" smtClean="0">
+                <a:latin typeface="Arial" pitchFamily="34" charset="0"/>
+                <a:cs typeface="Arial" pitchFamily="34" charset="0"/>
+              </a:rPr>
+              <a:t>, </a:t>
+            </a:r>
+            <a:r>
+              <a:rPr lang="en-US" sz="2800" dirty="0" err="1" smtClean="0">
+                <a:latin typeface="Arial" pitchFamily="34" charset="0"/>
+                <a:cs typeface="Arial" pitchFamily="34" charset="0"/>
+              </a:rPr>
+              <a:t>Instagram</a:t>
+            </a:r>
+            <a:r>
+              <a:rPr lang="en-US" sz="2800" dirty="0" smtClean="0">
+                <a:latin typeface="Arial" pitchFamily="34" charset="0"/>
+                <a:cs typeface="Arial" pitchFamily="34" charset="0"/>
+              </a:rPr>
+              <a:t> </a:t>
+            </a:r>
+            <a:r>
+              <a:rPr lang="ru-RU" sz="2800" dirty="0" smtClean="0">
+                <a:latin typeface="Arial" pitchFamily="34" charset="0"/>
+                <a:cs typeface="Arial" pitchFamily="34" charset="0"/>
+              </a:rPr>
+              <a:t>и </a:t>
+            </a:r>
+            <a:r>
+              <a:rPr lang="ru-RU" sz="2800" dirty="0" err="1" smtClean="0">
+                <a:latin typeface="Arial" pitchFamily="34" charset="0"/>
+                <a:cs typeface="Arial" pitchFamily="34" charset="0"/>
+              </a:rPr>
+              <a:t>тп</a:t>
+            </a:r>
+            <a:r>
+              <a:rPr lang="ru-RU" dirty="0" smtClean="0">
+                <a:latin typeface="Arial" pitchFamily="34" charset="0"/>
+                <a:cs typeface="Arial" pitchFamily="34" charset="0"/>
+              </a:rPr>
+              <a:t>)</a:t>
+            </a:r>
+          </a:p>
+          <a:p>
+            <a:endParaRPr lang="ru-RU" dirty="0">
+              <a:latin typeface="Arial" pitchFamily="34" charset="0"/>
+              <a:cs typeface="Arial" pitchFamily="34" charset="0"/>
+            </a:endParaRPr>
+          </a:p>
+        </p:txBody>
+      </p:sp>
+    </p:spTree>
+  </p:cSld>
+  <p:clrMapOvr>
+    <a:masterClrMapping/>
+  </p:clrMapOvr>
+</p:sld>
+</file>
+
+<file path=ppt/slides/slide17.xml><?xml version="1.0" encoding="utf-8"?>
+<p:sld xmlns:a="http://schemas.openxmlformats.org/drawingml/2006/main" xmlns:r="http://schemas.openxmlformats.org/officeDocument/2006/relationships" xmlns:p="http://schemas.openxmlformats.org/presentationml/2006/main">
+  <p:cSld>
+    <p:spTree>
+      <p:nvGrpSpPr>
+        <p:cNvPr id="1" name=""/>
+        <p:cNvGrpSpPr/>
+        <p:nvPr/>
+      </p:nvGrpSpPr>
+      <p:grpSpPr>
+        <a:xfrm>
+          <a:off x="0" y="0"/>
+          <a:ext cx="0" cy="0"/>
+          <a:chOff x="0" y="0"/>
+          <a:chExt cx="0" cy="0"/>
+        </a:xfrm>
+      </p:grpSpPr>
+      <p:sp>
+        <p:nvSpPr>
+          <p:cNvPr id="2" name="Заголовок 1"/>
+          <p:cNvSpPr>
+            <a:spLocks noGrp="1"/>
+          </p:cNvSpPr>
+          <p:nvPr>
+            <p:ph type="title"/>
+          </p:nvPr>
+        </p:nvSpPr>
+        <p:spPr>
+          <a:xfrm>
+            <a:off x="457200" y="274638"/>
+            <a:ext cx="8229600" cy="778098"/>
+          </a:xfrm>
+        </p:spPr>
+        <p:txBody>
+          <a:bodyPr>
+            <a:normAutofit fontScale="90000"/>
+          </a:bodyPr>
+          <a:lstStyle/>
+          <a:p>
+            <a:r>
+              <a:rPr lang="ru-RU" sz="5400" dirty="0" smtClean="0">
+                <a:latin typeface="Arial" pitchFamily="34" charset="0"/>
+                <a:cs typeface="Arial" pitchFamily="34" charset="0"/>
+              </a:rPr>
+              <a:t>Итоги</a:t>
+            </a:r>
+            <a:endParaRPr lang="ru-RU" dirty="0">
+              <a:latin typeface="Arial" pitchFamily="34" charset="0"/>
+              <a:cs typeface="Arial" pitchFamily="34" charset="0"/>
+            </a:endParaRPr>
+          </a:p>
+        </p:txBody>
+      </p:sp>
+      <p:sp>
+        <p:nvSpPr>
+          <p:cNvPr id="3" name="Содержимое 2"/>
+          <p:cNvSpPr>
+            <a:spLocks noGrp="1"/>
+          </p:cNvSpPr>
+          <p:nvPr>
+            <p:ph idx="1"/>
+          </p:nvPr>
+        </p:nvSpPr>
+        <p:spPr>
+          <a:xfrm>
+            <a:off x="323528" y="1196752"/>
+            <a:ext cx="8568952" cy="4525963"/>
+          </a:xfrm>
+        </p:spPr>
+        <p:txBody>
+          <a:bodyPr>
+            <a:normAutofit/>
+          </a:bodyPr>
+          <a:lstStyle/>
+          <a:p>
+            <a:pPr marL="180000" indent="0">
+              <a:spcBef>
+                <a:spcPts val="600"/>
+              </a:spcBef>
+              <a:buNone/>
+            </a:pPr>
+            <a:r>
+              <a:rPr lang="ru-RU" sz="2800" kern="1000" dirty="0" smtClean="0">
+                <a:latin typeface="Arial" pitchFamily="34" charset="0"/>
+                <a:cs typeface="Arial" pitchFamily="34" charset="0"/>
+              </a:rPr>
+              <a:t>Проект </a:t>
+            </a:r>
+            <a:r>
+              <a:rPr lang="ru-RU" sz="2800" kern="1000" dirty="0" smtClean="0">
+                <a:latin typeface="Arial" pitchFamily="34" charset="0"/>
+                <a:cs typeface="Arial" pitchFamily="34" charset="0"/>
+              </a:rPr>
+              <a:t>полностью работоспособен и готов к </a:t>
+            </a:r>
+            <a:r>
+              <a:rPr lang="ru-RU" sz="2800" kern="1000" dirty="0" smtClean="0">
+                <a:latin typeface="Arial" pitchFamily="34" charset="0"/>
+                <a:cs typeface="Arial" pitchFamily="34" charset="0"/>
+              </a:rPr>
+              <a:t> внедрению</a:t>
+            </a:r>
+            <a:r>
+              <a:rPr lang="ru-RU" sz="2800" kern="1000" dirty="0" smtClean="0">
+                <a:latin typeface="Arial" pitchFamily="34" charset="0"/>
+                <a:cs typeface="Arial" pitchFamily="34" charset="0"/>
+              </a:rPr>
+              <a:t>. Он решает реальную проблему </a:t>
+            </a:r>
+            <a:r>
+              <a:rPr lang="ru-RU" sz="2800" kern="1000" dirty="0" smtClean="0">
+                <a:latin typeface="Arial" pitchFamily="34" charset="0"/>
+                <a:cs typeface="Arial" pitchFamily="34" charset="0"/>
+              </a:rPr>
+              <a:t>бизнеса, </a:t>
+            </a:r>
+            <a:r>
+              <a:rPr lang="ru-RU" sz="2800" kern="1000" dirty="0" smtClean="0">
+                <a:latin typeface="Arial" pitchFamily="34" charset="0"/>
+                <a:cs typeface="Arial" pitchFamily="34" charset="0"/>
+              </a:rPr>
+              <a:t>имеет задел для </a:t>
+            </a:r>
+            <a:r>
+              <a:rPr lang="ru-RU" sz="2800" kern="1000" dirty="0" smtClean="0">
+                <a:latin typeface="Arial" pitchFamily="34" charset="0"/>
+                <a:cs typeface="Arial" pitchFamily="34" charset="0"/>
+              </a:rPr>
+              <a:t>масштабирования, будет </a:t>
+            </a:r>
+            <a:r>
+              <a:rPr lang="ru-RU" sz="2800" kern="1000" dirty="0" smtClean="0">
+                <a:latin typeface="Arial" pitchFamily="34" charset="0"/>
+                <a:cs typeface="Arial" pitchFamily="34" charset="0"/>
+              </a:rPr>
+              <a:t>развиваться дальше </a:t>
+            </a:r>
+            <a:r>
+              <a:rPr lang="ru-RU" sz="2800" kern="1000" dirty="0" smtClean="0">
+                <a:latin typeface="Arial" pitchFamily="34" charset="0"/>
+                <a:cs typeface="Arial" pitchFamily="34" charset="0"/>
+              </a:rPr>
+              <a:t>после </a:t>
+            </a:r>
+            <a:r>
+              <a:rPr lang="ru-RU" sz="2800" kern="1000" dirty="0" smtClean="0">
+                <a:latin typeface="Arial" pitchFamily="34" charset="0"/>
+                <a:cs typeface="Arial" pitchFamily="34" charset="0"/>
+              </a:rPr>
+              <a:t>тестирования </a:t>
+            </a:r>
+            <a:r>
+              <a:rPr lang="ru-RU" sz="2800" kern="1000" dirty="0" smtClean="0">
+                <a:latin typeface="Arial" pitchFamily="34" charset="0"/>
+                <a:cs typeface="Arial" pitchFamily="34" charset="0"/>
+              </a:rPr>
+              <a:t>и с </a:t>
+            </a:r>
+            <a:r>
+              <a:rPr lang="ru-RU" sz="2800" kern="1000" dirty="0" smtClean="0">
+                <a:latin typeface="Arial" pitchFamily="34" charset="0"/>
+                <a:cs typeface="Arial" pitchFamily="34" charset="0"/>
+              </a:rPr>
+              <a:t>учетом обратной </a:t>
+            </a:r>
+            <a:r>
+              <a:rPr lang="ru-RU" sz="2800" kern="1000" dirty="0" smtClean="0">
+                <a:latin typeface="Arial" pitchFamily="34" charset="0"/>
+                <a:cs typeface="Arial" pitchFamily="34" charset="0"/>
+              </a:rPr>
+              <a:t>связи.</a:t>
+            </a:r>
+          </a:p>
+          <a:p>
+            <a:pPr marL="180000" indent="0">
+              <a:spcBef>
+                <a:spcPts val="600"/>
+              </a:spcBef>
+              <a:buNone/>
+            </a:pPr>
+            <a:r>
+              <a:rPr lang="en-US" b="1" u="sng" kern="1000" smtClean="0">
+                <a:latin typeface="Arial" pitchFamily="34" charset="0"/>
+                <a:cs typeface="Arial" pitchFamily="34" charset="0"/>
+              </a:rPr>
+              <a:t>GIT</a:t>
+            </a:r>
+          </a:p>
+          <a:p>
+            <a:pPr marL="180000" indent="0">
+              <a:spcBef>
+                <a:spcPts val="600"/>
+              </a:spcBef>
+              <a:buNone/>
+            </a:pPr>
+            <a:endParaRPr lang="ru-RU" sz="2800" kern="1000" dirty="0" smtClean="0">
+              <a:latin typeface="Arial" pitchFamily="34" charset="0"/>
+              <a:cs typeface="Arial" pitchFamily="34" charset="0"/>
             </a:endParaRPr>
           </a:p>
         </p:txBody>
@@ -3320,8 +7459,8 @@
         </p:blipFill>
         <p:spPr bwMode="auto">
           <a:xfrm>
-            <a:off x="3707904" y="3356992"/>
-            <a:ext cx="5112568" cy="2752922"/>
+            <a:off x="5004048" y="3068960"/>
+            <a:ext cx="3960440" cy="2132545"/>
           </a:xfrm>
           <a:prstGeom prst="rect">
             <a:avLst/>
@@ -3352,8 +7491,8 @@
         </p:blipFill>
         <p:spPr bwMode="auto">
           <a:xfrm>
-            <a:off x="3707904" y="188640"/>
-            <a:ext cx="5107486" cy="2747698"/>
+            <a:off x="5004048" y="692696"/>
+            <a:ext cx="3943497" cy="2121502"/>
           </a:xfrm>
           <a:prstGeom prst="rect">
             <a:avLst/>
@@ -3379,25 +7518,25 @@
         </p:nvSpPr>
         <p:spPr>
           <a:xfrm>
-            <a:off x="251520" y="404664"/>
-            <a:ext cx="3296345" cy="454372"/>
+            <a:off x="179512" y="404664"/>
+            <a:ext cx="4752528" cy="454372"/>
           </a:xfrm>
         </p:spPr>
         <p:txBody>
           <a:bodyPr>
-            <a:normAutofit fontScale="90000"/>
+            <a:noAutofit/>
           </a:bodyPr>
           <a:lstStyle/>
           <a:p>
             <a:pPr algn="ctr"/>
             <a:r>
-              <a:rPr lang="ru-RU" dirty="0" smtClean="0">
+              <a:rPr lang="ru-RU" sz="2800" dirty="0" smtClean="0">
                 <a:latin typeface="Arial" pitchFamily="34" charset="0"/>
                 <a:cs typeface="Arial" pitchFamily="34" charset="0"/>
               </a:rPr>
               <a:t>Основные преимущества </a:t>
             </a:r>
-            <a:endParaRPr lang="ru-RU" dirty="0">
+            <a:endParaRPr lang="ru-RU" sz="2800" dirty="0">
               <a:latin typeface="Arial" pitchFamily="34" charset="0"/>
               <a:cs typeface="Arial" pitchFamily="34" charset="0"/>
             </a:endParaRPr>
@@ -3416,137 +7555,183 @@
         </p:nvSpPr>
         <p:spPr>
           <a:xfrm>
-            <a:off x="457200" y="1052737"/>
-            <a:ext cx="3008313" cy="3312367"/>
+            <a:off x="179512" y="1052737"/>
+            <a:ext cx="4608512" cy="3888431"/>
           </a:xfrm>
         </p:spPr>
         <p:txBody>
           <a:bodyPr>
-            <a:normAutofit fontScale="85000" lnSpcReduction="20000"/>
+            <a:normAutofit/>
           </a:bodyPr>
           <a:lstStyle/>
           <a:p>
-            <a:r>
-              <a:rPr lang="ru-RU" b="1" dirty="0">
-                <a:latin typeface="Arial" pitchFamily="34" charset="0"/>
-                <a:cs typeface="Arial" pitchFamily="34" charset="0"/>
-              </a:rPr>
-              <a:t>Единая база данных</a:t>
+            <a:pPr marL="342900" indent="-342900">
+              <a:buAutoNum type="arabicPeriod"/>
+            </a:pPr>
+            <a:r>
+              <a:rPr lang="ru-RU" sz="1300" b="1" dirty="0" smtClean="0">
+                <a:latin typeface="Arial" pitchFamily="34" charset="0"/>
+                <a:cs typeface="Arial" pitchFamily="34" charset="0"/>
+              </a:rPr>
+              <a:t>Единая база данных.</a:t>
+            </a:r>
+            <a:r>
+              <a:rPr lang="ru-RU" sz="1300" dirty="0" smtClean="0">
+                <a:latin typeface="Arial" pitchFamily="34" charset="0"/>
+                <a:cs typeface="Arial" pitchFamily="34" charset="0"/>
+              </a:rPr>
+              <a:t> Все контакты клиентов сохраняются навсегда. Мастеру больше не нужно вносить данные повторно при смене телефона или приложения.</a:t>
+            </a:r>
+          </a:p>
+          <a:p>
+            <a:pPr marL="342900" indent="-342900">
+              <a:buAutoNum type="arabicPeriod"/>
+            </a:pPr>
+            <a:r>
+              <a:rPr lang="ru-RU" sz="1300" b="1" dirty="0" smtClean="0">
+                <a:latin typeface="Arial" pitchFamily="34" charset="0"/>
+                <a:cs typeface="Arial" pitchFamily="34" charset="0"/>
+              </a:rPr>
+              <a:t>Нет платных подписок: </a:t>
+            </a:r>
+            <a:r>
+              <a:rPr lang="ru-RU" sz="1300" dirty="0" smtClean="0">
+                <a:latin typeface="Arial" pitchFamily="34" charset="0"/>
+                <a:cs typeface="Arial" pitchFamily="34" charset="0"/>
+              </a:rPr>
+              <a:t>Никаких скрытых платежей, комиссий и ежемесячной абонентской платы.</a:t>
+            </a:r>
+          </a:p>
+          <a:p>
+            <a:pPr marL="342900" indent="-342900">
+              <a:buFont typeface="+mj-lt"/>
+              <a:buAutoNum type="arabicPeriod"/>
+            </a:pPr>
+            <a:r>
+              <a:rPr lang="ru-RU" sz="1300" b="1" dirty="0" err="1" smtClean="0">
+                <a:latin typeface="Arial" pitchFamily="34" charset="0"/>
+                <a:cs typeface="Arial" pitchFamily="34" charset="0"/>
+              </a:rPr>
+              <a:t>Онлайн-запись</a:t>
+            </a:r>
+            <a:r>
+              <a:rPr lang="en-US" sz="1300" b="1" dirty="0" smtClean="0">
+                <a:latin typeface="Arial" pitchFamily="34" charset="0"/>
+                <a:cs typeface="Arial" pitchFamily="34" charset="0"/>
+              </a:rPr>
+              <a:t>: </a:t>
+            </a:r>
+            <a:r>
+              <a:rPr lang="ru-RU" sz="1300" dirty="0">
+                <a:latin typeface="Arial" pitchFamily="34" charset="0"/>
+                <a:cs typeface="Arial" pitchFamily="34" charset="0"/>
+              </a:rPr>
+              <a:t>Клиенты записываются сами 24/7 через удобную ссылку. Мастер не отвлекается </a:t>
+            </a:r>
+            <a:r>
+              <a:rPr lang="ru-RU" sz="1300" dirty="0" smtClean="0">
+                <a:latin typeface="Arial" pitchFamily="34" charset="0"/>
+                <a:cs typeface="Arial" pitchFamily="34" charset="0"/>
+              </a:rPr>
+              <a:t>на </a:t>
+            </a:r>
+            <a:r>
+              <a:rPr lang="ru-RU" sz="1300" dirty="0">
+                <a:latin typeface="Arial" pitchFamily="34" charset="0"/>
+                <a:cs typeface="Arial" pitchFamily="34" charset="0"/>
+              </a:rPr>
+              <a:t>звонки и сообщения</a:t>
+            </a:r>
+            <a:r>
+              <a:rPr lang="ru-RU" sz="1300" dirty="0" smtClean="0">
+                <a:latin typeface="Arial" pitchFamily="34" charset="0"/>
+                <a:cs typeface="Arial" pitchFamily="34" charset="0"/>
+              </a:rPr>
+              <a:t>.</a:t>
+            </a:r>
+          </a:p>
+          <a:p>
+            <a:pPr marL="342900" indent="-342900">
+              <a:buFont typeface="+mj-lt"/>
+              <a:buAutoNum type="arabicPeriod"/>
+            </a:pPr>
+            <a:r>
+              <a:rPr lang="ru-RU" sz="1300" b="1" dirty="0" smtClean="0">
+                <a:latin typeface="Arial" pitchFamily="34" charset="0"/>
+                <a:cs typeface="Arial" pitchFamily="34" charset="0"/>
+              </a:rPr>
+              <a:t>Универсальность. </a:t>
+            </a:r>
+            <a:r>
+              <a:rPr lang="ru-RU" sz="1300" dirty="0" smtClean="0">
+                <a:latin typeface="Arial" pitchFamily="34" charset="0"/>
+                <a:cs typeface="Arial" pitchFamily="34" charset="0"/>
+              </a:rPr>
+              <a:t>Всё, что сделано для мастеров маникюра, легко переориентировать под любую деятельность. Это достигается за счет гибкой архитектуры REST API.</a:t>
+            </a:r>
+          </a:p>
+          <a:p>
+            <a:pPr marL="342900" indent="-342900">
+              <a:buFont typeface="+mj-lt"/>
+              <a:buAutoNum type="arabicPeriod"/>
+            </a:pPr>
+            <a:r>
+              <a:rPr lang="ru-RU" sz="1300" b="1" dirty="0" smtClean="0">
+                <a:latin typeface="Arial" pitchFamily="34" charset="0"/>
+                <a:cs typeface="Arial" pitchFamily="34" charset="0"/>
+              </a:rPr>
+              <a:t>Гибкая архитектура</a:t>
+            </a:r>
+            <a:r>
+              <a:rPr lang="ru-RU" sz="1300" b="1" dirty="0" smtClean="0"/>
+              <a:t>.</a:t>
+            </a:r>
+            <a:r>
+              <a:rPr lang="ru-RU" sz="1300" dirty="0" smtClean="0"/>
+              <a:t> </a:t>
             </a:r>
             <a:r>
               <a:rPr lang="ru-RU" dirty="0" smtClean="0">
                 <a:latin typeface="Arial" pitchFamily="34" charset="0"/>
                 <a:cs typeface="Arial" pitchFamily="34" charset="0"/>
               </a:rPr>
-              <a:t>: Все контакты клиентов сохраняются навсегда. Нет необходимости вносить данные повторно при каждом обновлении или смене приложений.</a:t>
-            </a:r>
-          </a:p>
-          <a:p>
-            <a:r>
-              <a:rPr lang="ru-RU" b="1" dirty="0" smtClean="0">
-                <a:latin typeface="Arial" pitchFamily="34" charset="0"/>
-                <a:cs typeface="Arial" pitchFamily="34" charset="0"/>
-              </a:rPr>
-              <a:t>Нет платных подписок</a:t>
-            </a:r>
-            <a:r>
-              <a:rPr lang="ru-RU" dirty="0" smtClean="0">
-                <a:latin typeface="Arial" pitchFamily="34" charset="0"/>
-                <a:cs typeface="Arial" pitchFamily="34" charset="0"/>
-              </a:rPr>
-              <a:t>: Никаких скрытых платежей, комиссий и ежемесячной абонентской платы.</a:t>
-            </a:r>
-          </a:p>
-          <a:p>
-            <a:r>
-              <a:rPr lang="ru-RU" b="1" dirty="0" err="1" smtClean="0">
-                <a:latin typeface="Arial" pitchFamily="34" charset="0"/>
-                <a:cs typeface="Arial" pitchFamily="34" charset="0"/>
-              </a:rPr>
-              <a:t>Онлайн-запись</a:t>
-            </a:r>
-            <a:r>
-              <a:rPr lang="en-US" b="1" dirty="0" smtClean="0">
-                <a:latin typeface="Arial" pitchFamily="34" charset="0"/>
-                <a:cs typeface="Arial" pitchFamily="34" charset="0"/>
-              </a:rPr>
-              <a:t>: </a:t>
-            </a:r>
-            <a:r>
-              <a:rPr lang="ru-RU" dirty="0">
-                <a:latin typeface="Arial" pitchFamily="34" charset="0"/>
-                <a:cs typeface="Arial" pitchFamily="34" charset="0"/>
-              </a:rPr>
-              <a:t>Клиенты записываются сами 24/7 через удобную ссылку. Мастер не отвлекается от работы на звонки и сообщения</a:t>
-            </a:r>
-            <a:r>
-              <a:rPr lang="ru-RU" dirty="0" smtClean="0">
+              <a:t>Благодаря</a:t>
+            </a:r>
+            <a:r>
+              <a:rPr lang="ru-RU" sz="1300" dirty="0" smtClean="0">
+                <a:latin typeface="Arial" pitchFamily="34" charset="0"/>
+                <a:cs typeface="Arial" pitchFamily="34" charset="0"/>
+              </a:rPr>
+              <a:t> REST API мы можем подключить к системе </a:t>
+            </a:r>
+            <a:r>
+              <a:rPr lang="ru-RU" sz="1300" dirty="0" err="1" smtClean="0">
+                <a:latin typeface="Arial" pitchFamily="34" charset="0"/>
+                <a:cs typeface="Arial" pitchFamily="34" charset="0"/>
+              </a:rPr>
+              <a:t>веб-сайт</a:t>
+            </a:r>
+            <a:r>
+              <a:rPr lang="ru-RU" sz="1300" dirty="0" smtClean="0">
+                <a:latin typeface="Arial" pitchFamily="34" charset="0"/>
+                <a:cs typeface="Arial" pitchFamily="34" charset="0"/>
+              </a:rPr>
+              <a:t> и </a:t>
+            </a:r>
+            <a:r>
+              <a:rPr lang="ru-RU" sz="1300" dirty="0" err="1" smtClean="0">
+                <a:latin typeface="Arial" pitchFamily="34" charset="0"/>
+                <a:cs typeface="Arial" pitchFamily="34" charset="0"/>
+              </a:rPr>
+              <a:t>тп</a:t>
+            </a:r>
+            <a:r>
+              <a:rPr lang="ru-RU" sz="1300" dirty="0" smtClean="0">
                 <a:latin typeface="Arial" pitchFamily="34" charset="0"/>
                 <a:cs typeface="Arial" pitchFamily="34" charset="0"/>
               </a:rPr>
               <a:t>.</a:t>
             </a:r>
-            <a:r>
-              <a:rPr lang="en-US" dirty="0" smtClean="0">
-                <a:latin typeface="Arial" pitchFamily="34" charset="0"/>
-                <a:cs typeface="Arial" pitchFamily="34" charset="0"/>
-              </a:rPr>
-              <a:t> </a:t>
-            </a:r>
-            <a:r>
-              <a:rPr lang="en-US" u="sng" dirty="0" smtClean="0">
-                <a:latin typeface="Arial" pitchFamily="34" charset="0"/>
-                <a:cs typeface="Arial" pitchFamily="34" charset="0"/>
-              </a:rPr>
-              <a:t>(</a:t>
-            </a:r>
-            <a:r>
-              <a:rPr lang="ru-RU" u="sng" dirty="0" smtClean="0">
-                <a:latin typeface="Arial" pitchFamily="34" charset="0"/>
-                <a:cs typeface="Arial" pitchFamily="34" charset="0"/>
-              </a:rPr>
-              <a:t>в разработке)</a:t>
-            </a:r>
-          </a:p>
-          <a:p>
-            <a:r>
-              <a:rPr lang="ru-RU" b="1" dirty="0" smtClean="0">
-                <a:latin typeface="Arial" pitchFamily="34" charset="0"/>
-                <a:cs typeface="Arial" pitchFamily="34" charset="0"/>
-              </a:rPr>
-              <a:t>Возможность синхронизации с календарем</a:t>
-            </a:r>
-            <a:r>
-              <a:rPr lang="ru-RU" dirty="0" smtClean="0">
-                <a:latin typeface="Arial" pitchFamily="34" charset="0"/>
-                <a:cs typeface="Arial" pitchFamily="34" charset="0"/>
-              </a:rPr>
-              <a:t>: Расписание и клиенты всегда под рукой.</a:t>
-            </a:r>
-            <a:endParaRPr lang="en-US" dirty="0" smtClean="0">
-              <a:latin typeface="Arial" pitchFamily="34" charset="0"/>
-              <a:cs typeface="Arial" pitchFamily="34" charset="0"/>
-            </a:endParaRPr>
-          </a:p>
-          <a:p>
-            <a:r>
-              <a:rPr lang="ru-RU" b="1" dirty="0" smtClean="0">
-                <a:latin typeface="Arial" pitchFamily="34" charset="0"/>
-                <a:cs typeface="Arial" pitchFamily="34" charset="0"/>
-              </a:rPr>
-              <a:t>Возможность переориентации приложения</a:t>
-            </a:r>
-            <a:r>
-              <a:rPr lang="ru-RU" dirty="0" smtClean="0">
-                <a:latin typeface="Arial" pitchFamily="34" charset="0"/>
-                <a:cs typeface="Arial" pitchFamily="34" charset="0"/>
-              </a:rPr>
-              <a:t>: Все что сделано для мастеров маникюра можно переориентировать под любую деятельность.</a:t>
-            </a:r>
-            <a:endParaRPr lang="en-US" dirty="0" smtClean="0">
-              <a:latin typeface="Arial" pitchFamily="34" charset="0"/>
-              <a:cs typeface="Arial" pitchFamily="34" charset="0"/>
-            </a:endParaRPr>
           </a:p>
           <a:p>
             <a:endParaRPr lang="en-US" dirty="0" smtClean="0">
@@ -3572,7 +7757,7 @@
         </p:nvSpPr>
         <p:spPr>
           <a:xfrm>
-            <a:off x="323528" y="4725144"/>
+            <a:off x="899592" y="4797152"/>
             <a:ext cx="3152329" cy="454372"/>
           </a:xfrm>
           <a:prstGeom prst="rect">
@@ -3611,7 +7796,7 @@
         </p:nvSpPr>
         <p:spPr>
           <a:xfrm>
-            <a:off x="395536" y="5301208"/>
+            <a:off x="827584" y="5373216"/>
             <a:ext cx="3008313" cy="936104"/>
           </a:xfrm>
           <a:prstGeom prst="rect">
@@ -3754,6 +7939,613 @@
       </p:grpSpPr>
       <p:sp>
         <p:nvSpPr>
+          <p:cNvPr id="5" name="Заголовок 4"/>
+          <p:cNvSpPr>
+            <a:spLocks noGrp="1"/>
+          </p:cNvSpPr>
+          <p:nvPr>
+            <p:ph type="title"/>
+          </p:nvPr>
+        </p:nvSpPr>
+        <p:spPr>
+          <a:xfrm>
+            <a:off x="395536" y="116632"/>
+            <a:ext cx="8229600" cy="706090"/>
+          </a:xfrm>
+        </p:spPr>
+        <p:txBody>
+          <a:bodyPr>
+            <a:normAutofit fontScale="90000"/>
+          </a:bodyPr>
+          <a:lstStyle/>
+          <a:p>
+            <a:r>
+              <a:rPr lang="ru-RU" b="1" dirty="0" smtClean="0">
+                <a:latin typeface="Arial" pitchFamily="34" charset="0"/>
+                <a:cs typeface="Arial" pitchFamily="34" charset="0"/>
+              </a:rPr>
+              <a:t>Недостатки</a:t>
+            </a:r>
+            <a:endParaRPr lang="ru-RU" b="1" dirty="0">
+              <a:latin typeface="Arial" pitchFamily="34" charset="0"/>
+              <a:cs typeface="Arial" pitchFamily="34" charset="0"/>
+            </a:endParaRPr>
+          </a:p>
+        </p:txBody>
+      </p:sp>
+      <p:sp>
+        <p:nvSpPr>
+          <p:cNvPr id="6" name="Содержимое 5"/>
+          <p:cNvSpPr>
+            <a:spLocks noGrp="1"/>
+          </p:cNvSpPr>
+          <p:nvPr>
+            <p:ph idx="1"/>
+          </p:nvPr>
+        </p:nvSpPr>
+        <p:spPr>
+          <a:xfrm>
+            <a:off x="457200" y="980728"/>
+            <a:ext cx="8229600" cy="5145435"/>
+          </a:xfrm>
+        </p:spPr>
+        <p:txBody>
+          <a:bodyPr/>
+          <a:lstStyle/>
+          <a:p>
+            <a:pPr>
+              <a:buNone/>
+            </a:pPr>
+            <a:r>
+              <a:rPr lang="ru-RU" dirty="0" smtClean="0">
+                <a:latin typeface="Arial" pitchFamily="34" charset="0"/>
+                <a:cs typeface="Arial" pitchFamily="34" charset="0"/>
+              </a:rPr>
+              <a:t>У проекта есть и ограничения.</a:t>
+            </a:r>
+          </a:p>
+          <a:p>
+            <a:pPr marL="514350" indent="-514350"/>
+            <a:r>
+              <a:rPr lang="ru-RU" sz="2000" b="1" dirty="0" smtClean="0">
+                <a:latin typeface="Arial" pitchFamily="34" charset="0"/>
+                <a:cs typeface="Arial" pitchFamily="34" charset="0"/>
+              </a:rPr>
+              <a:t>Зависимость от </a:t>
+            </a:r>
+            <a:r>
+              <a:rPr lang="en-US" sz="2000" b="1" dirty="0" smtClean="0">
+                <a:latin typeface="Arial" pitchFamily="34" charset="0"/>
+                <a:cs typeface="Arial" pitchFamily="34" charset="0"/>
+              </a:rPr>
+              <a:t>Telegram</a:t>
+            </a:r>
+            <a:r>
+              <a:rPr lang="ru-RU" sz="2000" b="1" dirty="0" smtClean="0">
+                <a:latin typeface="Arial" pitchFamily="34" charset="0"/>
+                <a:cs typeface="Arial" pitchFamily="34" charset="0"/>
+              </a:rPr>
+              <a:t> (</a:t>
+            </a:r>
+            <a:r>
+              <a:rPr lang="ru-RU" sz="2000" dirty="0" smtClean="0"/>
+              <a:t>Если у клиента нет </a:t>
+            </a:r>
+            <a:r>
+              <a:rPr lang="ru-RU" sz="2000" dirty="0" err="1" smtClean="0"/>
+              <a:t>Телеграма</a:t>
+            </a:r>
+            <a:r>
+              <a:rPr lang="ru-RU" sz="2000" dirty="0" smtClean="0"/>
+              <a:t>)</a:t>
+            </a:r>
+            <a:endParaRPr lang="ru-RU" sz="2000" b="1" dirty="0" smtClean="0">
+              <a:latin typeface="Arial" pitchFamily="34" charset="0"/>
+              <a:cs typeface="Arial" pitchFamily="34" charset="0"/>
+            </a:endParaRPr>
+          </a:p>
+          <a:p>
+            <a:pPr marL="514350" indent="-514350"/>
+            <a:r>
+              <a:rPr lang="ru-RU" sz="2000" b="1" dirty="0" smtClean="0">
+                <a:latin typeface="Arial" pitchFamily="34" charset="0"/>
+                <a:cs typeface="Arial" pitchFamily="34" charset="0"/>
+              </a:rPr>
+              <a:t>Отсутствие живого общения </a:t>
+            </a:r>
+            <a:r>
+              <a:rPr lang="ru-RU" sz="2000" dirty="0" smtClean="0">
+                <a:latin typeface="Arial" pitchFamily="34" charset="0"/>
+                <a:cs typeface="Arial" pitchFamily="34" charset="0"/>
+              </a:rPr>
+              <a:t>(но есть комментарии)</a:t>
+            </a:r>
+          </a:p>
+          <a:p>
+            <a:pPr marL="514350" indent="-514350"/>
+            <a:r>
+              <a:rPr lang="ru-RU" sz="2000" b="1" dirty="0" smtClean="0">
+                <a:latin typeface="Arial" pitchFamily="34" charset="0"/>
+                <a:cs typeface="Arial" pitchFamily="34" charset="0"/>
+              </a:rPr>
+              <a:t>Техническая зависимость </a:t>
+            </a:r>
+            <a:r>
+              <a:rPr lang="ru-RU" sz="2000" dirty="0" smtClean="0">
+                <a:latin typeface="Arial" pitchFamily="34" charset="0"/>
+                <a:cs typeface="Arial" pitchFamily="34" charset="0"/>
+              </a:rPr>
+              <a:t>(</a:t>
+            </a:r>
+            <a:r>
+              <a:rPr lang="ru-RU" sz="2000" dirty="0" smtClean="0"/>
+              <a:t> работает через интернет и </a:t>
+            </a:r>
+            <a:r>
+              <a:rPr lang="en-US" sz="2000" dirty="0" smtClean="0"/>
+              <a:t>VPN</a:t>
+            </a:r>
+            <a:r>
+              <a:rPr lang="ru-RU" sz="2000" dirty="0" smtClean="0"/>
+              <a:t>)</a:t>
+            </a:r>
+            <a:endParaRPr lang="ru-RU" sz="2000" b="1" dirty="0" smtClean="0">
+              <a:latin typeface="Arial" pitchFamily="34" charset="0"/>
+              <a:cs typeface="Arial" pitchFamily="34" charset="0"/>
+            </a:endParaRPr>
+          </a:p>
+          <a:p>
+            <a:pPr marL="514350" indent="-514350"/>
+            <a:r>
+              <a:rPr lang="ru-RU" sz="2000" b="1" dirty="0" smtClean="0">
+                <a:latin typeface="Arial" pitchFamily="34" charset="0"/>
+                <a:cs typeface="Arial" pitchFamily="34" charset="0"/>
+              </a:rPr>
+              <a:t>Юридические </a:t>
+            </a:r>
+            <a:r>
+              <a:rPr lang="ru-RU" sz="2000" dirty="0" smtClean="0"/>
+              <a:t>(соответствие 152-ФЗ)</a:t>
+            </a:r>
+          </a:p>
+        </p:txBody>
+      </p:sp>
+    </p:spTree>
+  </p:cSld>
+  <p:clrMapOvr>
+    <a:masterClrMapping/>
+  </p:clrMapOvr>
+</p:sld>
+</file>
+
+<file path=ppt/slides/slide4.xml><?xml version="1.0" encoding="utf-8"?>
+<p:sld xmlns:a="http://schemas.openxmlformats.org/drawingml/2006/main" xmlns:r="http://schemas.openxmlformats.org/officeDocument/2006/relationships" xmlns:p="http://schemas.openxmlformats.org/presentationml/2006/main">
+  <p:cSld>
+    <p:spTree>
+      <p:nvGrpSpPr>
+        <p:cNvPr id="1" name=""/>
+        <p:cNvGrpSpPr/>
+        <p:nvPr/>
+      </p:nvGrpSpPr>
+      <p:grpSpPr>
+        <a:xfrm>
+          <a:off x="0" y="0"/>
+          <a:ext cx="0" cy="0"/>
+          <a:chOff x="0" y="0"/>
+          <a:chExt cx="0" cy="0"/>
+        </a:xfrm>
+      </p:grpSpPr>
+      <p:sp>
+        <p:nvSpPr>
+          <p:cNvPr id="2" name="Заголовок 1"/>
+          <p:cNvSpPr>
+            <a:spLocks noGrp="1"/>
+          </p:cNvSpPr>
+          <p:nvPr>
+            <p:ph type="title"/>
+          </p:nvPr>
+        </p:nvSpPr>
+        <p:spPr/>
+        <p:txBody>
+          <a:bodyPr>
+            <a:normAutofit/>
+          </a:bodyPr>
+          <a:lstStyle/>
+          <a:p>
+            <a:r>
+              <a:rPr lang="ru-RU" b="1" dirty="0" smtClean="0">
+                <a:latin typeface="Arial" pitchFamily="34" charset="0"/>
+                <a:cs typeface="Arial" pitchFamily="34" charset="0"/>
+              </a:rPr>
+              <a:t>🛠</a:t>
+            </a:r>
+            <a:r>
+              <a:rPr lang="ru-RU" dirty="0" smtClean="0">
+                <a:latin typeface="Arial" pitchFamily="34" charset="0"/>
+                <a:cs typeface="Arial" pitchFamily="34" charset="0"/>
+              </a:rPr>
+              <a:t> Стек технологий</a:t>
+            </a:r>
+            <a:r>
+              <a:rPr lang="en-US" dirty="0" smtClean="0">
+                <a:latin typeface="Arial" pitchFamily="34" charset="0"/>
+                <a:cs typeface="Arial" pitchFamily="34" charset="0"/>
+              </a:rPr>
+              <a:t>:</a:t>
+            </a:r>
+            <a:endParaRPr lang="ru-RU" dirty="0">
+              <a:latin typeface="Arial" pitchFamily="34" charset="0"/>
+              <a:cs typeface="Arial" pitchFamily="34" charset="0"/>
+            </a:endParaRPr>
+          </a:p>
+        </p:txBody>
+      </p:sp>
+      <p:sp>
+        <p:nvSpPr>
+          <p:cNvPr id="3" name="Содержимое 2"/>
+          <p:cNvSpPr>
+            <a:spLocks noGrp="1"/>
+          </p:cNvSpPr>
+          <p:nvPr>
+            <p:ph idx="1"/>
+          </p:nvPr>
+        </p:nvSpPr>
+        <p:spPr/>
+        <p:txBody>
+          <a:bodyPr/>
+          <a:lstStyle/>
+          <a:p>
+            <a:pPr marL="514350" indent="-514350"/>
+            <a:r>
+              <a:rPr lang="en-US" sz="2800" dirty="0" smtClean="0">
+                <a:latin typeface="Arial" pitchFamily="34" charset="0"/>
+                <a:ea typeface="+mj-ea"/>
+                <a:cs typeface="Arial" pitchFamily="34" charset="0"/>
+              </a:rPr>
+              <a:t>Entity Framework Core</a:t>
+            </a:r>
+          </a:p>
+          <a:p>
+            <a:pPr marL="514350" indent="-514350"/>
+            <a:r>
+              <a:rPr lang="en-US" sz="2800" dirty="0" smtClean="0">
+                <a:latin typeface="Arial" pitchFamily="34" charset="0"/>
+                <a:ea typeface="+mj-ea"/>
+                <a:cs typeface="Arial" pitchFamily="34" charset="0"/>
+              </a:rPr>
+              <a:t>ASP NET Core</a:t>
+            </a:r>
+          </a:p>
+          <a:p>
+            <a:pPr marL="514350" indent="-514350"/>
+            <a:r>
+              <a:rPr lang="ru-RU" sz="2800" dirty="0" smtClean="0">
+                <a:latin typeface="Arial" pitchFamily="34" charset="0"/>
+                <a:ea typeface="+mj-ea"/>
+                <a:cs typeface="Arial" pitchFamily="34" charset="0"/>
+              </a:rPr>
+              <a:t>БД -</a:t>
+            </a:r>
+            <a:r>
+              <a:rPr lang="en-US" sz="2800" dirty="0" smtClean="0">
+                <a:latin typeface="Arial" pitchFamily="34" charset="0"/>
+                <a:ea typeface="+mj-ea"/>
+                <a:cs typeface="Arial" pitchFamily="34" charset="0"/>
+              </a:rPr>
+              <a:t>&gt; SQL Server</a:t>
+            </a:r>
+          </a:p>
+          <a:p>
+            <a:pPr marL="514350" indent="-514350"/>
+            <a:r>
+              <a:rPr lang="en-US" sz="2800" dirty="0" smtClean="0">
+                <a:latin typeface="Arial" pitchFamily="34" charset="0"/>
+                <a:ea typeface="+mj-ea"/>
+                <a:cs typeface="Arial" pitchFamily="34" charset="0"/>
+              </a:rPr>
+              <a:t>SWAGGER / </a:t>
+            </a:r>
+            <a:r>
+              <a:rPr lang="en-US" sz="2800" dirty="0" err="1" smtClean="0">
+                <a:latin typeface="Arial" pitchFamily="34" charset="0"/>
+                <a:ea typeface="+mj-ea"/>
+                <a:cs typeface="Arial" pitchFamily="34" charset="0"/>
+              </a:rPr>
+              <a:t>OpenAPI</a:t>
+            </a:r>
+            <a:endParaRPr lang="ru-RU" sz="2800" dirty="0" smtClean="0">
+              <a:latin typeface="Arial" pitchFamily="34" charset="0"/>
+              <a:ea typeface="+mj-ea"/>
+              <a:cs typeface="Arial" pitchFamily="34" charset="0"/>
+            </a:endParaRPr>
+          </a:p>
+          <a:p>
+            <a:pPr marL="514350" indent="-514350"/>
+            <a:r>
+              <a:rPr lang="en-US" sz="2800" dirty="0" smtClean="0">
+                <a:latin typeface="Arial" pitchFamily="34" charset="0"/>
+                <a:cs typeface="Arial" pitchFamily="34" charset="0"/>
+              </a:rPr>
+              <a:t>Telegram</a:t>
+            </a:r>
+            <a:endParaRPr lang="ru-RU" sz="2800" dirty="0" smtClean="0">
+              <a:latin typeface="Arial" pitchFamily="34" charset="0"/>
+              <a:ea typeface="+mj-ea"/>
+              <a:cs typeface="Arial" pitchFamily="34" charset="0"/>
+            </a:endParaRPr>
+          </a:p>
+          <a:p>
+            <a:pPr marL="514350" indent="-514350">
+              <a:buNone/>
+            </a:pPr>
+            <a:r>
+              <a:rPr lang="ru-RU" sz="2800" dirty="0" smtClean="0">
+                <a:latin typeface="Arial" pitchFamily="34" charset="0"/>
+                <a:ea typeface="+mj-ea"/>
+                <a:cs typeface="Arial" pitchFamily="34" charset="0"/>
+              </a:rPr>
+              <a:t>Библиотеки</a:t>
+            </a:r>
+            <a:r>
+              <a:rPr lang="en-US" sz="2800" dirty="0" smtClean="0">
+                <a:latin typeface="Arial" pitchFamily="34" charset="0"/>
+                <a:ea typeface="+mj-ea"/>
+                <a:cs typeface="Arial" pitchFamily="34" charset="0"/>
+              </a:rPr>
+              <a:t>:</a:t>
+            </a:r>
+          </a:p>
+          <a:p>
+            <a:pPr marL="514350" indent="-514350"/>
+            <a:r>
+              <a:rPr lang="en-US" sz="2800" dirty="0" err="1" smtClean="0">
+                <a:latin typeface="Arial" pitchFamily="34" charset="0"/>
+                <a:ea typeface="+mj-ea"/>
+                <a:cs typeface="Arial" pitchFamily="34" charset="0"/>
+              </a:rPr>
+              <a:t>Telegram.Bot</a:t>
+            </a:r>
+            <a:endParaRPr lang="en-US" sz="2800" dirty="0" smtClean="0">
+              <a:latin typeface="Arial" pitchFamily="34" charset="0"/>
+              <a:ea typeface="+mj-ea"/>
+              <a:cs typeface="Arial" pitchFamily="34" charset="0"/>
+            </a:endParaRPr>
+          </a:p>
+          <a:p>
+            <a:pPr marL="514350" indent="-514350"/>
+            <a:r>
+              <a:rPr lang="en-US" sz="2800" dirty="0" err="1" smtClean="0">
+                <a:latin typeface="Arial" pitchFamily="34" charset="0"/>
+                <a:ea typeface="+mj-ea"/>
+                <a:cs typeface="Arial" pitchFamily="34" charset="0"/>
+              </a:rPr>
+              <a:t>InlineKeyboard</a:t>
+            </a:r>
+            <a:endParaRPr lang="en-US" sz="2800" dirty="0" smtClean="0">
+              <a:latin typeface="Arial" pitchFamily="34" charset="0"/>
+              <a:ea typeface="+mj-ea"/>
+              <a:cs typeface="Arial" pitchFamily="34" charset="0"/>
+            </a:endParaRPr>
+          </a:p>
+          <a:p>
+            <a:pPr marL="514350" indent="-514350"/>
+            <a:endParaRPr lang="ru-RU" dirty="0">
+              <a:latin typeface="Arial" pitchFamily="34" charset="0"/>
+              <a:cs typeface="Arial" pitchFamily="34" charset="0"/>
+            </a:endParaRPr>
+          </a:p>
+        </p:txBody>
+      </p:sp>
+    </p:spTree>
+  </p:cSld>
+  <p:clrMapOvr>
+    <a:masterClrMapping/>
+  </p:clrMapOvr>
+</p:sld>
+</file>
+
+<file path=ppt/slides/slide5.xml><?xml version="1.0" encoding="utf-8"?>
+<p:sld xmlns:a="http://schemas.openxmlformats.org/drawingml/2006/main" xmlns:r="http://schemas.openxmlformats.org/officeDocument/2006/relationships" xmlns:p="http://schemas.openxmlformats.org/presentationml/2006/main">
+  <p:cSld>
+    <p:spTree>
+      <p:nvGrpSpPr>
+        <p:cNvPr id="1" name=""/>
+        <p:cNvGrpSpPr/>
+        <p:nvPr/>
+      </p:nvGrpSpPr>
+      <p:grpSpPr>
+        <a:xfrm>
+          <a:off x="0" y="0"/>
+          <a:ext cx="0" cy="0"/>
+          <a:chOff x="0" y="0"/>
+          <a:chExt cx="0" cy="0"/>
+        </a:xfrm>
+      </p:grpSpPr>
+      <p:sp>
+        <p:nvSpPr>
+          <p:cNvPr id="2" name="Заголовок 1"/>
+          <p:cNvSpPr>
+            <a:spLocks noGrp="1"/>
+          </p:cNvSpPr>
+          <p:nvPr>
+            <p:ph type="title"/>
+          </p:nvPr>
+        </p:nvSpPr>
+        <p:spPr/>
+        <p:txBody>
+          <a:bodyPr/>
+          <a:lstStyle/>
+          <a:p>
+            <a:r>
+              <a:rPr lang="en-US" dirty="0" err="1" smtClean="0"/>
+              <a:t>NuGet</a:t>
+            </a:r>
+            <a:r>
+              <a:rPr lang="en-US" dirty="0" smtClean="0"/>
+              <a:t> </a:t>
+            </a:r>
+            <a:r>
+              <a:rPr lang="ru-RU" dirty="0" smtClean="0"/>
+              <a:t>пакеты</a:t>
+            </a:r>
+            <a:endParaRPr lang="ru-RU" dirty="0"/>
+          </a:p>
+        </p:txBody>
+      </p:sp>
+      <p:sp>
+        <p:nvSpPr>
+          <p:cNvPr id="3" name="Содержимое 2"/>
+          <p:cNvSpPr>
+            <a:spLocks noGrp="1"/>
+          </p:cNvSpPr>
+          <p:nvPr>
+            <p:ph idx="1"/>
+          </p:nvPr>
+        </p:nvSpPr>
+        <p:spPr>
+          <a:xfrm>
+            <a:off x="179512" y="1600200"/>
+            <a:ext cx="8784976" cy="4525963"/>
+          </a:xfrm>
+        </p:spPr>
+        <p:txBody>
+          <a:bodyPr>
+            <a:normAutofit/>
+          </a:bodyPr>
+          <a:lstStyle/>
+          <a:p>
+            <a:r>
+              <a:rPr lang="en-US" sz="2000" dirty="0" err="1" smtClean="0"/>
+              <a:t>Microsoft.EntityFrameworkCore</a:t>
+            </a:r>
+            <a:r>
+              <a:rPr lang="ru-RU" sz="2000" dirty="0" smtClean="0"/>
+              <a:t> – 9.0.16</a:t>
+            </a:r>
+          </a:p>
+          <a:p>
+            <a:r>
+              <a:rPr lang="en-US" sz="2000" dirty="0" err="1" smtClean="0"/>
+              <a:t>Microsoft.EntityFrameworkCore.SqlServer</a:t>
+            </a:r>
+            <a:r>
+              <a:rPr lang="ru-RU" sz="2000" dirty="0" smtClean="0"/>
+              <a:t> – 9.0.16</a:t>
+            </a:r>
+          </a:p>
+          <a:p>
+            <a:r>
+              <a:rPr lang="en-US" sz="2000" dirty="0" err="1" smtClean="0"/>
+              <a:t>Microsoft.EntityFrameworkCore.Tools</a:t>
+            </a:r>
+            <a:r>
+              <a:rPr lang="ru-RU" sz="2000" dirty="0" smtClean="0"/>
+              <a:t> </a:t>
+            </a:r>
+          </a:p>
+          <a:p>
+            <a:r>
+              <a:rPr lang="en-US" sz="2000" dirty="0" smtClean="0"/>
+              <a:t>Microsoft.Extensions.Diagnostics.HealthChecks.EntityFrameworkCore</a:t>
+            </a:r>
+          </a:p>
+          <a:p>
+            <a:r>
+              <a:rPr lang="en-US" sz="2000" dirty="0" err="1" smtClean="0"/>
+              <a:t>Newtonsoft.Json</a:t>
+            </a:r>
+            <a:r>
+              <a:rPr lang="en-US" sz="2000" dirty="0" smtClean="0"/>
+              <a:t> – 13.0.4</a:t>
+            </a:r>
+          </a:p>
+          <a:p>
+            <a:r>
+              <a:rPr lang="en-US" sz="2000" dirty="0" err="1" smtClean="0"/>
+              <a:t>Serilog</a:t>
+            </a:r>
+            <a:r>
+              <a:rPr lang="en-US" sz="2000" dirty="0" smtClean="0"/>
+              <a:t> – 4.3.1</a:t>
+            </a:r>
+          </a:p>
+          <a:p>
+            <a:r>
+              <a:rPr lang="en-US" sz="2000" dirty="0" err="1" smtClean="0"/>
+              <a:t>Swashbuckle.AspNetCore</a:t>
+            </a:r>
+            <a:r>
+              <a:rPr lang="en-US" sz="2000" dirty="0" smtClean="0"/>
+              <a:t> (swagger) – 7.3.2</a:t>
+            </a:r>
+          </a:p>
+          <a:p>
+            <a:r>
+              <a:rPr lang="en-US" sz="2000" dirty="0" err="1" smtClean="0"/>
+              <a:t>Swashbuckle.AspNetCore.Annotations</a:t>
+            </a:r>
+            <a:endParaRPr lang="en-US" sz="2000" dirty="0" smtClean="0"/>
+          </a:p>
+          <a:p>
+            <a:r>
+              <a:rPr lang="en-US" sz="2000" dirty="0" err="1" smtClean="0"/>
+              <a:t>Telegram.Bot</a:t>
+            </a:r>
+            <a:r>
+              <a:rPr lang="en-US" sz="2000" dirty="0" smtClean="0"/>
+              <a:t> – 22.10.1</a:t>
+            </a:r>
+            <a:endParaRPr lang="ru-RU" sz="2000" dirty="0" smtClean="0"/>
+          </a:p>
+          <a:p>
+            <a:pPr>
+              <a:buNone/>
+            </a:pPr>
+            <a:endParaRPr lang="en-US" sz="2000" dirty="0" smtClean="0"/>
+          </a:p>
+          <a:p>
+            <a:pPr>
+              <a:buNone/>
+            </a:pPr>
+            <a:r>
+              <a:rPr lang="en-US" sz="2000" dirty="0" smtClean="0"/>
+              <a:t>( </a:t>
+            </a:r>
+            <a:r>
+              <a:rPr lang="ru-RU" sz="2000" dirty="0" smtClean="0"/>
+              <a:t>основные пакеты для работы приложения, и версии для работоспособности)</a:t>
+            </a:r>
+            <a:endParaRPr lang="ru-RU" sz="2000" dirty="0"/>
+          </a:p>
+        </p:txBody>
+      </p:sp>
+    </p:spTree>
+  </p:cSld>
+  <p:clrMapOvr>
+    <a:masterClrMapping/>
+  </p:clrMapOvr>
+</p:sld>
+</file>
+
+<file path=ppt/slides/slide6.xml><?xml version="1.0" encoding="utf-8"?>
+<p:sld xmlns:a="http://schemas.openxmlformats.org/drawingml/2006/main" xmlns:r="http://schemas.openxmlformats.org/officeDocument/2006/relationships" xmlns:p="http://schemas.openxmlformats.org/presentationml/2006/main">
+  <p:cSld>
+    <p:spTree>
+      <p:nvGrpSpPr>
+        <p:cNvPr id="1" name=""/>
+        <p:cNvGrpSpPr/>
+        <p:nvPr/>
+      </p:nvGrpSpPr>
+      <p:grpSpPr>
+        <a:xfrm>
+          <a:off x="0" y="0"/>
+          <a:ext cx="0" cy="0"/>
+          <a:chOff x="0" y="0"/>
+          <a:chExt cx="0" cy="0"/>
+        </a:xfrm>
+      </p:grpSpPr>
+      <p:sp>
+        <p:nvSpPr>
           <p:cNvPr id="2" name="Заголовок 1"/>
           <p:cNvSpPr>
             <a:spLocks noGrp="1"/>
@@ -3818,14 +8610,7 @@
                 <a:latin typeface="Arial" pitchFamily="34" charset="0"/>
                 <a:cs typeface="Arial" pitchFamily="34" charset="0"/>
               </a:rPr>
-              <a:t>БАЗА </a:t>
-            </a:r>
-            <a:r>
-              <a:rPr lang="ru-RU" sz="2000" b="1" dirty="0" smtClean="0">
-                <a:latin typeface="Arial" pitchFamily="34" charset="0"/>
-                <a:cs typeface="Arial" pitchFamily="34" charset="0"/>
-              </a:rPr>
-              <a:t>ДАННЫХ</a:t>
+              <a:t>БАЗА ДАННЫХ</a:t>
             </a:r>
             <a:endParaRPr lang="en-US" sz="2000" b="1" dirty="0" smtClean="0">
               <a:latin typeface="Arial" pitchFamily="34" charset="0"/>
@@ -3981,10 +8766,6 @@
               </a:rPr>
               <a:t>Master</a:t>
             </a:r>
-            <a:endParaRPr lang="en-US" sz="1800" b="1" dirty="0" smtClean="0">
-              <a:latin typeface="Arial" pitchFamily="34" charset="0"/>
-              <a:cs typeface="Arial" pitchFamily="34" charset="0"/>
-            </a:endParaRPr>
           </a:p>
           <a:p>
             <a:pPr marL="342900" indent="-342900">
@@ -4115,7 +8896,7 @@
 </p:sld>
 </file>
 
-<file path=ppt/slides/slide4.xml><?xml version="1.0" encoding="utf-8"?>
+<file path=ppt/slides/slide7.xml><?xml version="1.0" encoding="utf-8"?>
 <p:sld xmlns:a="http://schemas.openxmlformats.org/drawingml/2006/main" xmlns:r="http://schemas.openxmlformats.org/officeDocument/2006/relationships" xmlns:p="http://schemas.openxmlformats.org/presentationml/2006/main">
   <p:cSld>
     <p:spTree>
@@ -4516,7 +9297,7 @@
 </p:sld>
 </file>
 
-<file path=ppt/slides/slide5.xml><?xml version="1.0" encoding="utf-8"?>
+<file path=ppt/slides/slide8.xml><?xml version="1.0" encoding="utf-8"?>
 <p:sld xmlns:a="http://schemas.openxmlformats.org/drawingml/2006/main" xmlns:r="http://schemas.openxmlformats.org/officeDocument/2006/relationships" xmlns:p="http://schemas.openxmlformats.org/presentationml/2006/main">
   <p:cSld>
     <p:spTree>
@@ -4563,13 +9344,6 @@
               </a:rPr>
               <a:t>Схема базы данных</a:t>
             </a:r>
-            <a:r>
-              <a:rPr lang="ru-RU" sz="2800" dirty="0" smtClean="0">
-                <a:latin typeface="Arial" pitchFamily="34" charset="0"/>
-                <a:cs typeface="Arial" pitchFamily="34" charset="0"/>
-              </a:rPr>
-              <a:t/>
-            </a:r>
             <a:br>
               <a:rPr lang="ru-RU" sz="2800" dirty="0" smtClean="0">
                 <a:latin typeface="Arial" pitchFamily="34" charset="0"/>
@@ -4747,22 +9521,35 @@
                 <a:latin typeface="Arial" pitchFamily="34" charset="0"/>
                 <a:cs typeface="Arial" pitchFamily="34" charset="0"/>
               </a:rPr>
-              <a:t>(Записи </a:t>
-            </a:r>
+              <a:t>(Записи на приём)</a:t>
+            </a:r>
+          </a:p>
+          <a:p>
             <a:r>
               <a:rPr lang="ru-RU" dirty="0" smtClean="0">
                 <a:latin typeface="Arial" pitchFamily="34" charset="0"/>
                 <a:cs typeface="Arial" pitchFamily="34" charset="0"/>
               </a:rPr>
-              <a:t>на приём</a:t>
+              <a:t>Таблица </a:t>
+            </a:r>
+            <a:r>
+              <a:rPr lang="ru-RU" dirty="0" err="1" smtClean="0">
+                <a:latin typeface="Arial" pitchFamily="34" charset="0"/>
+                <a:cs typeface="Arial" pitchFamily="34" charset="0"/>
+              </a:rPr>
+              <a:t>AppointmentServices</a:t>
             </a:r>
             <a:r>
               <a:rPr lang="ru-RU" dirty="0" smtClean="0">
                 <a:latin typeface="Arial" pitchFamily="34" charset="0"/>
                 <a:cs typeface="Arial" pitchFamily="34" charset="0"/>
               </a:rPr>
-              <a:t>)</a:t>
-            </a:r>
+              <a:t> </a:t>
+            </a:r>
+            <a:endParaRPr lang="en-US" dirty="0" smtClean="0">
+              <a:latin typeface="Arial" pitchFamily="34" charset="0"/>
+              <a:cs typeface="Arial" pitchFamily="34" charset="0"/>
+            </a:endParaRPr>
           </a:p>
           <a:p>
             <a:r>
@@ -4770,6 +9557,15 @@
                 <a:latin typeface="Arial" pitchFamily="34" charset="0"/>
                 <a:cs typeface="Arial" pitchFamily="34" charset="0"/>
               </a:rPr>
+              <a:t>(Услуги в записи)</a:t>
+            </a:r>
+          </a:p>
+          <a:p>
+            <a:r>
+              <a:rPr lang="ru-RU" dirty="0" smtClean="0">
+                <a:latin typeface="Arial" pitchFamily="34" charset="0"/>
+                <a:cs typeface="Arial" pitchFamily="34" charset="0"/>
+              </a:rPr>
               <a:t>Таблица </a:t>
             </a:r>
             <a:r>
@@ -4777,14 +9573,20 @@
                 <a:latin typeface="Arial" pitchFamily="34" charset="0"/>
                 <a:cs typeface="Arial" pitchFamily="34" charset="0"/>
               </a:rPr>
-              <a:t>AppointmentServices</a:t>
-            </a:r>
+              <a:t>MasterServices</a:t>
+            </a:r>
+            <a:endParaRPr lang="en-US" dirty="0" smtClean="0">
+              <a:latin typeface="Arial" pitchFamily="34" charset="0"/>
+              <a:cs typeface="Arial" pitchFamily="34" charset="0"/>
+            </a:endParaRPr>
+          </a:p>
+          <a:p>
             <a:r>
               <a:rPr lang="ru-RU" dirty="0" smtClean="0">
                 <a:latin typeface="Arial" pitchFamily="34" charset="0"/>
                 <a:cs typeface="Arial" pitchFamily="34" charset="0"/>
               </a:rPr>
-              <a:t> </a:t>
+              <a:t> (Услуги мастера)</a:t>
             </a:r>
             <a:endParaRPr lang="en-US" dirty="0" smtClean="0">
               <a:latin typeface="Arial" pitchFamily="34" charset="0"/>
@@ -4797,6 +9599,26 @@
                 <a:latin typeface="Arial" pitchFamily="34" charset="0"/>
                 <a:cs typeface="Arial" pitchFamily="34" charset="0"/>
               </a:rPr>
+              <a:t>Таблица </a:t>
+            </a:r>
+            <a:r>
+              <a:rPr lang="en-US" dirty="0" err="1" smtClean="0">
+                <a:latin typeface="Arial" pitchFamily="34" charset="0"/>
+                <a:cs typeface="Arial" pitchFamily="34" charset="0"/>
+              </a:rPr>
+              <a:t>ServiceCategories</a:t>
+            </a:r>
+            <a:endParaRPr lang="en-US" dirty="0" smtClean="0">
+              <a:latin typeface="Arial" pitchFamily="34" charset="0"/>
+              <a:cs typeface="Arial" pitchFamily="34" charset="0"/>
+            </a:endParaRPr>
+          </a:p>
+          <a:p>
+            <a:r>
+              <a:rPr lang="en-US" dirty="0" smtClean="0">
+                <a:latin typeface="Arial" pitchFamily="34" charset="0"/>
+                <a:cs typeface="Arial" pitchFamily="34" charset="0"/>
+              </a:rPr>
               <a:t>(</a:t>
             </a:r>
             <a:r>
@@ -4804,14 +9626,40 @@
                 <a:latin typeface="Arial" pitchFamily="34" charset="0"/>
                 <a:cs typeface="Arial" pitchFamily="34" charset="0"/>
               </a:rPr>
-              <a:t>Услуги в </a:t>
+              <a:t>Категории услуг)</a:t>
+            </a:r>
+            <a:endParaRPr lang="en-US" dirty="0" smtClean="0">
+              <a:latin typeface="Arial" pitchFamily="34" charset="0"/>
+              <a:cs typeface="Arial" pitchFamily="34" charset="0"/>
+            </a:endParaRPr>
+          </a:p>
+          <a:p>
+            <a:endParaRPr lang="ru-RU" dirty="0" smtClean="0">
+              <a:latin typeface="Arial" pitchFamily="34" charset="0"/>
+              <a:cs typeface="Arial" pitchFamily="34" charset="0"/>
+            </a:endParaRPr>
+          </a:p>
+          <a:p>
+            <a:r>
+              <a:rPr lang="en-US" dirty="0" smtClean="0">
+                <a:latin typeface="Arial" pitchFamily="34" charset="0"/>
+                <a:cs typeface="Arial" pitchFamily="34" charset="0"/>
+              </a:rPr>
+              <a:t>–&gt; </a:t>
             </a:r>
             <a:r>
               <a:rPr lang="ru-RU" dirty="0" smtClean="0">
                 <a:latin typeface="Arial" pitchFamily="34" charset="0"/>
                 <a:cs typeface="Arial" pitchFamily="34" charset="0"/>
               </a:rPr>
-              <a:t>записи)</a:t>
+              <a:t>далее для </a:t>
+            </a:r>
+            <a:r>
+              <a:rPr lang="en-US" dirty="0" smtClean="0">
+                <a:latin typeface="Arial" pitchFamily="34" charset="0"/>
+                <a:cs typeface="Arial" pitchFamily="34" charset="0"/>
+              </a:rPr>
+              <a:t>Telegram </a:t>
             </a:r>
           </a:p>
           <a:p>
@@ -4823,11 +9671,11 @@
               <a:t>Таблица </a:t>
             </a:r>
             <a:r>
-              <a:rPr lang="ru-RU" dirty="0" err="1" smtClean="0">
-                <a:latin typeface="Arial" pitchFamily="34" charset="0"/>
-                <a:cs typeface="Arial" pitchFamily="34" charset="0"/>
-              </a:rPr>
-              <a:t>MasterServices</a:t>
+              <a:rPr lang="en-US" dirty="0" err="1" smtClean="0">
+                <a:latin typeface="Arial" pitchFamily="34" charset="0"/>
+                <a:cs typeface="Arial" pitchFamily="34" charset="0"/>
+              </a:rPr>
+              <a:t>TelegramUsers</a:t>
             </a:r>
             <a:endParaRPr lang="en-US" dirty="0" smtClean="0">
               <a:latin typeface="Arial" pitchFamily="34" charset="0"/>
@@ -4836,162 +9684,18 @@
           </a:p>
           <a:p>
             <a:r>
+              <a:rPr lang="en-US" dirty="0" smtClean="0">
+                <a:latin typeface="Arial" pitchFamily="34" charset="0"/>
+                <a:cs typeface="Arial" pitchFamily="34" charset="0"/>
+              </a:rPr>
+              <a:t>(</a:t>
+            </a:r>
+            <a:r>
               <a:rPr lang="ru-RU" dirty="0" smtClean="0">
                 <a:latin typeface="Arial" pitchFamily="34" charset="0"/>
                 <a:cs typeface="Arial" pitchFamily="34" charset="0"/>
               </a:rPr>
-              <a:t> </a:t>
-            </a:r>
-            <a:r>
-              <a:rPr lang="ru-RU" dirty="0" smtClean="0">
-                <a:latin typeface="Arial" pitchFamily="34" charset="0"/>
-                <a:cs typeface="Arial" pitchFamily="34" charset="0"/>
-              </a:rPr>
-              <a:t>(Услуги </a:t>
-            </a:r>
-            <a:r>
-              <a:rPr lang="ru-RU" dirty="0" smtClean="0">
-                <a:latin typeface="Arial" pitchFamily="34" charset="0"/>
-                <a:cs typeface="Arial" pitchFamily="34" charset="0"/>
-              </a:rPr>
-              <a:t>мастера)</a:t>
-            </a:r>
-            <a:endParaRPr lang="en-US" dirty="0" smtClean="0">
-              <a:latin typeface="Arial" pitchFamily="34" charset="0"/>
-              <a:cs typeface="Arial" pitchFamily="34" charset="0"/>
-            </a:endParaRPr>
-          </a:p>
-          <a:p>
-            <a:r>
-              <a:rPr lang="ru-RU" dirty="0" smtClean="0">
-                <a:latin typeface="Arial" pitchFamily="34" charset="0"/>
-                <a:cs typeface="Arial" pitchFamily="34" charset="0"/>
-              </a:rPr>
-              <a:t>Таблица </a:t>
-            </a:r>
-            <a:r>
-              <a:rPr lang="en-US" dirty="0" err="1" smtClean="0">
-                <a:latin typeface="Arial" pitchFamily="34" charset="0"/>
-                <a:cs typeface="Arial" pitchFamily="34" charset="0"/>
-              </a:rPr>
-              <a:t>ServiceCategories</a:t>
-            </a:r>
-            <a:endParaRPr lang="en-US" dirty="0" smtClean="0">
-              <a:latin typeface="Arial" pitchFamily="34" charset="0"/>
-              <a:cs typeface="Arial" pitchFamily="34" charset="0"/>
-            </a:endParaRPr>
-          </a:p>
-          <a:p>
-            <a:r>
-              <a:rPr lang="en-US" dirty="0" smtClean="0">
-                <a:latin typeface="Arial" pitchFamily="34" charset="0"/>
-                <a:cs typeface="Arial" pitchFamily="34" charset="0"/>
-              </a:rPr>
-              <a:t>(</a:t>
-            </a:r>
-            <a:r>
-              <a:rPr lang="ru-RU" dirty="0" smtClean="0">
-                <a:latin typeface="Arial" pitchFamily="34" charset="0"/>
-                <a:cs typeface="Arial" pitchFamily="34" charset="0"/>
-              </a:rPr>
-              <a:t>Категории </a:t>
-            </a:r>
-            <a:r>
-              <a:rPr lang="ru-RU" dirty="0" smtClean="0">
-                <a:latin typeface="Arial" pitchFamily="34" charset="0"/>
-                <a:cs typeface="Arial" pitchFamily="34" charset="0"/>
-              </a:rPr>
-              <a:t>услуг</a:t>
-            </a:r>
-            <a:r>
-              <a:rPr lang="ru-RU" dirty="0" smtClean="0">
-                <a:latin typeface="Arial" pitchFamily="34" charset="0"/>
-                <a:cs typeface="Arial" pitchFamily="34" charset="0"/>
-              </a:rPr>
-              <a:t>)</a:t>
-            </a:r>
-            <a:endParaRPr lang="en-US" dirty="0" smtClean="0">
-              <a:latin typeface="Arial" pitchFamily="34" charset="0"/>
-              <a:cs typeface="Arial" pitchFamily="34" charset="0"/>
-            </a:endParaRPr>
-          </a:p>
-          <a:p>
-            <a:endParaRPr lang="ru-RU" dirty="0" smtClean="0">
-              <a:latin typeface="Arial" pitchFamily="34" charset="0"/>
-              <a:cs typeface="Arial" pitchFamily="34" charset="0"/>
-            </a:endParaRPr>
-          </a:p>
-          <a:p>
-            <a:r>
-              <a:rPr lang="en-US" dirty="0" smtClean="0">
-                <a:latin typeface="Arial" pitchFamily="34" charset="0"/>
-                <a:cs typeface="Arial" pitchFamily="34" charset="0"/>
-              </a:rPr>
-              <a:t>–&gt; </a:t>
-            </a:r>
-            <a:r>
-              <a:rPr lang="ru-RU" dirty="0" smtClean="0">
-                <a:latin typeface="Arial" pitchFamily="34" charset="0"/>
-                <a:cs typeface="Arial" pitchFamily="34" charset="0"/>
-              </a:rPr>
-              <a:t>далее </a:t>
-            </a:r>
-            <a:r>
-              <a:rPr lang="ru-RU" dirty="0" smtClean="0">
-                <a:latin typeface="Arial" pitchFamily="34" charset="0"/>
-                <a:cs typeface="Arial" pitchFamily="34" charset="0"/>
-              </a:rPr>
-              <a:t>для </a:t>
-            </a:r>
-            <a:r>
-              <a:rPr lang="en-US" dirty="0" smtClean="0">
-                <a:latin typeface="Arial" pitchFamily="34" charset="0"/>
-                <a:cs typeface="Arial" pitchFamily="34" charset="0"/>
-              </a:rPr>
-              <a:t>Telegram </a:t>
-            </a:r>
-          </a:p>
-          <a:p>
-            <a:r>
-              <a:rPr lang="ru-RU" dirty="0" smtClean="0">
-                <a:latin typeface="Arial" pitchFamily="34" charset="0"/>
-                <a:cs typeface="Arial" pitchFamily="34" charset="0"/>
-              </a:rPr>
-              <a:t>Таблица </a:t>
-            </a:r>
-            <a:r>
-              <a:rPr lang="en-US" dirty="0" smtClean="0">
-                <a:latin typeface="Arial" pitchFamily="34" charset="0"/>
-                <a:cs typeface="Arial" pitchFamily="34" charset="0"/>
-              </a:rPr>
-              <a:t>Users </a:t>
-            </a:r>
-            <a:endParaRPr lang="en-US" dirty="0" smtClean="0">
-              <a:latin typeface="Arial" pitchFamily="34" charset="0"/>
-              <a:cs typeface="Arial" pitchFamily="34" charset="0"/>
-            </a:endParaRPr>
-          </a:p>
-          <a:p>
-            <a:r>
-              <a:rPr lang="en-US" dirty="0" smtClean="0">
-                <a:latin typeface="Arial" pitchFamily="34" charset="0"/>
-                <a:cs typeface="Arial" pitchFamily="34" charset="0"/>
-              </a:rPr>
-              <a:t>(</a:t>
-            </a:r>
-            <a:r>
-              <a:rPr lang="ru-RU" dirty="0" smtClean="0">
-                <a:latin typeface="Arial" pitchFamily="34" charset="0"/>
-                <a:cs typeface="Arial" pitchFamily="34" charset="0"/>
-              </a:rPr>
-              <a:t>Пользователи </a:t>
-            </a:r>
-            <a:r>
-              <a:rPr lang="ru-RU" dirty="0" smtClean="0">
-                <a:latin typeface="Arial" pitchFamily="34" charset="0"/>
-                <a:cs typeface="Arial" pitchFamily="34" charset="0"/>
-              </a:rPr>
-              <a:t>системы</a:t>
+              <a:t>Пользователи системы</a:t>
             </a:r>
             <a:r>
               <a:rPr lang="en-US" dirty="0" smtClean="0">
@@ -5018,7 +9722,7 @@
       </p:sp>
       <p:pic>
         <p:nvPicPr>
-          <p:cNvPr id="3074" name="Picture 2"/>
+          <p:cNvPr id="6" name="Picture 2" descr="B:\Проект\BaseImage\Снимок Диаграммы Базы 2.png"/>
           <p:cNvPicPr>
             <a:picLocks noChangeAspect="1" noChangeArrowheads="1"/>
           </p:cNvPicPr>
@@ -5033,8 +9737,334 @@
         </p:blipFill>
         <p:spPr bwMode="auto">
           <a:xfrm>
-            <a:off x="3059832" y="1196752"/>
-            <a:ext cx="5688180" cy="4896544"/>
+            <a:off x="2838515" y="1268760"/>
+            <a:ext cx="6305485" cy="4293096"/>
+          </a:xfrm>
+          <a:prstGeom prst="rect">
+            <a:avLst/>
+          </a:prstGeom>
+          <a:noFill/>
+        </p:spPr>
+      </p:pic>
+    </p:spTree>
+  </p:cSld>
+  <p:clrMapOvr>
+    <a:masterClrMapping/>
+  </p:clrMapOvr>
+</p:sld>
+</file>
+
+<file path=ppt/slides/slide9.xml><?xml version="1.0" encoding="utf-8"?>
+<p:sld xmlns:a="http://schemas.openxmlformats.org/drawingml/2006/main" xmlns:r="http://schemas.openxmlformats.org/officeDocument/2006/relationships" xmlns:p="http://schemas.openxmlformats.org/presentationml/2006/main">
+  <p:cSld>
+    <p:spTree>
+      <p:nvGrpSpPr>
+        <p:cNvPr id="1" name=""/>
+        <p:cNvGrpSpPr/>
+        <p:nvPr/>
+      </p:nvGrpSpPr>
+      <p:grpSpPr>
+        <a:xfrm>
+          <a:off x="0" y="0"/>
+          <a:ext cx="0" cy="0"/>
+          <a:chOff x="0" y="0"/>
+          <a:chExt cx="0" cy="0"/>
+        </a:xfrm>
+      </p:grpSpPr>
+      <p:sp>
+        <p:nvSpPr>
+          <p:cNvPr id="2" name="Заголовок 1"/>
+          <p:cNvSpPr>
+            <a:spLocks noGrp="1"/>
+          </p:cNvSpPr>
+          <p:nvPr>
+            <p:ph type="title"/>
+          </p:nvPr>
+        </p:nvSpPr>
+        <p:spPr>
+          <a:xfrm>
+            <a:off x="457200" y="273050"/>
+            <a:ext cx="3008313" cy="779686"/>
+          </a:xfrm>
+        </p:spPr>
+        <p:txBody>
+          <a:bodyPr>
+            <a:noAutofit/>
+          </a:bodyPr>
+          <a:lstStyle/>
+          <a:p>
+            <a:r>
+              <a:rPr lang="ru-RU" dirty="0" smtClean="0">
+                <a:latin typeface="Arial" pitchFamily="34" charset="0"/>
+                <a:cs typeface="Arial" pitchFamily="34" charset="0"/>
+              </a:rPr>
+              <a:t>Структура </a:t>
+            </a:r>
+            <a:r>
+              <a:rPr lang="en-US" dirty="0" smtClean="0">
+                <a:latin typeface="Arial" pitchFamily="34" charset="0"/>
+                <a:cs typeface="Arial" pitchFamily="34" charset="0"/>
+              </a:rPr>
+              <a:t>REST API</a:t>
+            </a:r>
+            <a:br>
+              <a:rPr lang="en-US" dirty="0" smtClean="0">
+                <a:latin typeface="Arial" pitchFamily="34" charset="0"/>
+                <a:cs typeface="Arial" pitchFamily="34" charset="0"/>
+              </a:rPr>
+            </a:br>
+            <a:endParaRPr lang="ru-RU" dirty="0">
+              <a:latin typeface="Arial" pitchFamily="34" charset="0"/>
+              <a:cs typeface="Arial" pitchFamily="34" charset="0"/>
+            </a:endParaRPr>
+          </a:p>
+        </p:txBody>
+      </p:sp>
+      <p:sp>
+        <p:nvSpPr>
+          <p:cNvPr id="3" name="Содержимое 2"/>
+          <p:cNvSpPr>
+            <a:spLocks noGrp="1"/>
+          </p:cNvSpPr>
+          <p:nvPr>
+            <p:ph idx="1"/>
+          </p:nvPr>
+        </p:nvSpPr>
+        <p:spPr/>
+        <p:txBody>
+          <a:bodyPr/>
+          <a:lstStyle/>
+          <a:p>
+            <a:pPr>
+              <a:buNone/>
+            </a:pPr>
+            <a:endParaRPr lang="ru-RU" dirty="0"/>
+          </a:p>
+        </p:txBody>
+      </p:sp>
+      <p:sp>
+        <p:nvSpPr>
+          <p:cNvPr id="4" name="Текст 3"/>
+          <p:cNvSpPr>
+            <a:spLocks noGrp="1"/>
+          </p:cNvSpPr>
+          <p:nvPr>
+            <p:ph type="body" sz="half" idx="2"/>
+          </p:nvPr>
+        </p:nvSpPr>
+        <p:spPr>
+          <a:xfrm>
+            <a:off x="457200" y="1124744"/>
+            <a:ext cx="3008313" cy="5001419"/>
+          </a:xfrm>
+        </p:spPr>
+        <p:txBody>
+          <a:bodyPr>
+            <a:normAutofit/>
+          </a:bodyPr>
+          <a:lstStyle/>
+          <a:p>
+            <a:r>
+              <a:rPr lang="en-US" sz="1600" b="1" dirty="0" smtClean="0">
+                <a:latin typeface="Arial" pitchFamily="34" charset="0"/>
+                <a:cs typeface="Arial" pitchFamily="34" charset="0"/>
+              </a:rPr>
+              <a:t>Controllers</a:t>
+            </a:r>
+            <a:endParaRPr lang="ru-RU" sz="1600" b="1" dirty="0" smtClean="0">
+              <a:latin typeface="Arial" pitchFamily="34" charset="0"/>
+              <a:cs typeface="Arial" pitchFamily="34" charset="0"/>
+            </a:endParaRPr>
+          </a:p>
+          <a:p>
+            <a:pPr algn="r">
+              <a:buFont typeface="Arial" pitchFamily="34" charset="0"/>
+              <a:buChar char="•"/>
+            </a:pPr>
+            <a:r>
+              <a:rPr lang="ru-RU" sz="1600" dirty="0" smtClean="0">
+                <a:latin typeface="Arial" pitchFamily="34" charset="0"/>
+                <a:cs typeface="Arial" pitchFamily="34" charset="0"/>
+              </a:rPr>
+              <a:t> </a:t>
+            </a:r>
+            <a:r>
+              <a:rPr lang="en-US" sz="1600" dirty="0" err="1" smtClean="0">
+                <a:latin typeface="Arial" pitchFamily="34" charset="0"/>
+                <a:cs typeface="Arial" pitchFamily="34" charset="0"/>
+              </a:rPr>
+              <a:t>AdminController</a:t>
+            </a:r>
+            <a:endParaRPr lang="ru-RU" sz="1600" dirty="0" smtClean="0">
+              <a:latin typeface="Arial" pitchFamily="34" charset="0"/>
+              <a:cs typeface="Arial" pitchFamily="34" charset="0"/>
+            </a:endParaRPr>
+          </a:p>
+          <a:p>
+            <a:r>
+              <a:rPr lang="en-US" sz="1600" dirty="0" smtClean="0">
+                <a:latin typeface="Arial" pitchFamily="34" charset="0"/>
+                <a:cs typeface="Arial" pitchFamily="34" charset="0"/>
+              </a:rPr>
+              <a:t>[</a:t>
+            </a:r>
+            <a:r>
+              <a:rPr lang="en-US" sz="1600" dirty="0" err="1" smtClean="0">
+                <a:latin typeface="Arial" pitchFamily="34" charset="0"/>
+                <a:cs typeface="Arial" pitchFamily="34" charset="0"/>
+              </a:rPr>
+              <a:t>HttpGet</a:t>
+            </a:r>
+            <a:r>
+              <a:rPr lang="en-US" sz="1600" dirty="0" smtClean="0">
+                <a:latin typeface="Arial" pitchFamily="34" charset="0"/>
+                <a:cs typeface="Arial" pitchFamily="34" charset="0"/>
+              </a:rPr>
+              <a:t>("status")]</a:t>
+            </a:r>
+            <a:endParaRPr lang="ru-RU" sz="1600" dirty="0" smtClean="0">
+              <a:latin typeface="Arial" pitchFamily="34" charset="0"/>
+              <a:cs typeface="Arial" pitchFamily="34" charset="0"/>
+            </a:endParaRPr>
+          </a:p>
+          <a:p>
+            <a:r>
+              <a:rPr lang="en-US" sz="1600" dirty="0" smtClean="0">
+                <a:latin typeface="Arial" pitchFamily="34" charset="0"/>
+                <a:cs typeface="Arial" pitchFamily="34" charset="0"/>
+              </a:rPr>
+              <a:t>/</a:t>
+            </a:r>
+            <a:r>
+              <a:rPr lang="en-US" sz="1600" dirty="0" err="1" smtClean="0">
+                <a:latin typeface="Arial" pitchFamily="34" charset="0"/>
+                <a:cs typeface="Arial" pitchFamily="34" charset="0"/>
+              </a:rPr>
+              <a:t>api</a:t>
+            </a:r>
+            <a:r>
+              <a:rPr lang="en-US" sz="1600" dirty="0" smtClean="0">
+                <a:latin typeface="Arial" pitchFamily="34" charset="0"/>
+                <a:cs typeface="Arial" pitchFamily="34" charset="0"/>
+              </a:rPr>
+              <a:t>/Admin/status</a:t>
+            </a:r>
+            <a:endParaRPr lang="ru-RU" sz="1600" dirty="0" smtClean="0">
+              <a:latin typeface="Arial" pitchFamily="34" charset="0"/>
+              <a:cs typeface="Arial" pitchFamily="34" charset="0"/>
+            </a:endParaRPr>
+          </a:p>
+          <a:p>
+            <a:endParaRPr lang="ru-RU" sz="1600" dirty="0" smtClean="0">
+              <a:latin typeface="Arial" pitchFamily="34" charset="0"/>
+              <a:cs typeface="Arial" pitchFamily="34" charset="0"/>
+            </a:endParaRPr>
+          </a:p>
+          <a:p>
+            <a:endParaRPr lang="ru-RU" sz="1600" dirty="0" smtClean="0">
+              <a:latin typeface="Arial" pitchFamily="34" charset="0"/>
+              <a:cs typeface="Arial" pitchFamily="34" charset="0"/>
+            </a:endParaRPr>
+          </a:p>
+          <a:p>
+            <a:endParaRPr lang="ru-RU" sz="1600" dirty="0" smtClean="0">
+              <a:latin typeface="Arial" pitchFamily="34" charset="0"/>
+              <a:cs typeface="Arial" pitchFamily="34" charset="0"/>
+            </a:endParaRPr>
+          </a:p>
+          <a:p>
+            <a:endParaRPr lang="ru-RU" sz="1600" dirty="0" smtClean="0">
+              <a:latin typeface="Arial" pitchFamily="34" charset="0"/>
+              <a:cs typeface="Arial" pitchFamily="34" charset="0"/>
+            </a:endParaRPr>
+          </a:p>
+          <a:p>
+            <a:r>
+              <a:rPr lang="en-US" sz="1600" dirty="0" smtClean="0">
+                <a:latin typeface="Arial" pitchFamily="34" charset="0"/>
+                <a:cs typeface="Arial" pitchFamily="34" charset="0"/>
+              </a:rPr>
+              <a:t>[</a:t>
+            </a:r>
+            <a:r>
+              <a:rPr lang="en-US" sz="1600" dirty="0" err="1" smtClean="0">
+                <a:latin typeface="Arial" pitchFamily="34" charset="0"/>
+                <a:cs typeface="Arial" pitchFamily="34" charset="0"/>
+              </a:rPr>
+              <a:t>HttpGet</a:t>
+            </a:r>
+            <a:r>
+              <a:rPr lang="en-US" sz="1600" dirty="0" smtClean="0">
+                <a:latin typeface="Arial" pitchFamily="34" charset="0"/>
+                <a:cs typeface="Arial" pitchFamily="34" charset="0"/>
+              </a:rPr>
+              <a:t>("statistics")]</a:t>
+            </a:r>
+            <a:endParaRPr lang="ru-RU" sz="1600" dirty="0" smtClean="0">
+              <a:latin typeface="Arial" pitchFamily="34" charset="0"/>
+              <a:cs typeface="Arial" pitchFamily="34" charset="0"/>
+            </a:endParaRPr>
+          </a:p>
+          <a:p>
+            <a:endParaRPr lang="ru-RU" sz="1600" dirty="0">
+              <a:latin typeface="Arial" pitchFamily="34" charset="0"/>
+              <a:cs typeface="Arial" pitchFamily="34" charset="0"/>
+            </a:endParaRPr>
+          </a:p>
+        </p:txBody>
+      </p:sp>
+      <p:pic>
+        <p:nvPicPr>
+          <p:cNvPr id="2050" name="Picture 2"/>
+          <p:cNvPicPr>
+            <a:picLocks noChangeAspect="1" noChangeArrowheads="1"/>
+          </p:cNvPicPr>
+          <p:nvPr/>
+        </p:nvPicPr>
+        <p:blipFill>
+          <a:blip r:embed="rId2" cstate="print"/>
+          <a:srcRect/>
+          <a:stretch>
+            <a:fillRect/>
+          </a:stretch>
+        </p:blipFill>
+        <p:spPr bwMode="auto">
+          <a:xfrm>
+            <a:off x="3563888" y="321532"/>
+            <a:ext cx="4320480" cy="3107470"/>
+          </a:xfrm>
+          <a:prstGeom prst="rect">
+            <a:avLst/>
+          </a:prstGeom>
+          <a:noFill/>
+          <a:ln w="9525">
+            <a:noFill/>
+            <a:miter lim="800000"/>
+            <a:headEnd/>
+            <a:tailEnd/>
+          </a:ln>
+          <a:effectLst/>
+        </p:spPr>
+      </p:pic>
+      <p:pic>
+        <p:nvPicPr>
+          <p:cNvPr id="2051" name="Picture 3"/>
+          <p:cNvPicPr>
+            <a:picLocks noChangeAspect="1" noChangeArrowheads="1"/>
+          </p:cNvPicPr>
+          <p:nvPr/>
+        </p:nvPicPr>
+        <p:blipFill>
+          <a:blip r:embed="rId3" cstate="print"/>
+          <a:srcRect/>
+          <a:stretch>
+            <a:fillRect/>
+          </a:stretch>
+        </p:blipFill>
+        <p:spPr bwMode="auto">
+          <a:xfrm>
+            <a:off x="3563888" y="3429000"/>
+            <a:ext cx="4320480" cy="3174194"/>
           </a:xfrm>
           <a:prstGeom prst="rect">
             <a:avLst/>

--- a/Проект «Маникюрная студия».pptx
+++ b/Проект «Маникюрная студия».pptx
@@ -305,7 +305,7 @@
             <a:fld id="{6940DC67-C7F6-414D-9708-96C5B560FED9}" type="datetimeFigureOut">
               <a:rPr lang="ru-RU" smtClean="0"/>
               <a:pPr/>
-              <a:t>03.07.2026</a:t>
+              <a:t>04.07.2026</a:t>
             </a:fld>
             <a:endParaRPr lang="ru-RU"/>
           </a:p>
@@ -472,7 +472,7 @@
             <a:fld id="{6940DC67-C7F6-414D-9708-96C5B560FED9}" type="datetimeFigureOut">
               <a:rPr lang="ru-RU" smtClean="0"/>
               <a:pPr/>
-              <a:t>03.07.2026</a:t>
+              <a:t>04.07.2026</a:t>
             </a:fld>
             <a:endParaRPr lang="ru-RU"/>
           </a:p>
@@ -649,7 +649,7 @@
             <a:fld id="{6940DC67-C7F6-414D-9708-96C5B560FED9}" type="datetimeFigureOut">
               <a:rPr lang="ru-RU" smtClean="0"/>
               <a:pPr/>
-              <a:t>03.07.2026</a:t>
+              <a:t>04.07.2026</a:t>
             </a:fld>
             <a:endParaRPr lang="ru-RU"/>
           </a:p>
@@ -816,7 +816,7 @@
             <a:fld id="{6940DC67-C7F6-414D-9708-96C5B560FED9}" type="datetimeFigureOut">
               <a:rPr lang="ru-RU" smtClean="0"/>
               <a:pPr/>
-              <a:t>03.07.2026</a:t>
+              <a:t>04.07.2026</a:t>
             </a:fld>
             <a:endParaRPr lang="ru-RU"/>
           </a:p>
@@ -1059,7 +1059,7 @@
             <a:fld id="{6940DC67-C7F6-414D-9708-96C5B560FED9}" type="datetimeFigureOut">
               <a:rPr lang="ru-RU" smtClean="0"/>
               <a:pPr/>
-              <a:t>03.07.2026</a:t>
+              <a:t>04.07.2026</a:t>
             </a:fld>
             <a:endParaRPr lang="ru-RU"/>
           </a:p>
@@ -1344,7 +1344,7 @@
             <a:fld id="{6940DC67-C7F6-414D-9708-96C5B560FED9}" type="datetimeFigureOut">
               <a:rPr lang="ru-RU" smtClean="0"/>
               <a:pPr/>
-              <a:t>03.07.2026</a:t>
+              <a:t>04.07.2026</a:t>
             </a:fld>
             <a:endParaRPr lang="ru-RU"/>
           </a:p>
@@ -1763,7 +1763,7 @@
             <a:fld id="{6940DC67-C7F6-414D-9708-96C5B560FED9}" type="datetimeFigureOut">
               <a:rPr lang="ru-RU" smtClean="0"/>
               <a:pPr/>
-              <a:t>03.07.2026</a:t>
+              <a:t>04.07.2026</a:t>
             </a:fld>
             <a:endParaRPr lang="ru-RU"/>
           </a:p>
@@ -1878,7 +1878,7 @@
             <a:fld id="{6940DC67-C7F6-414D-9708-96C5B560FED9}" type="datetimeFigureOut">
               <a:rPr lang="ru-RU" smtClean="0"/>
               <a:pPr/>
-              <a:t>03.07.2026</a:t>
+              <a:t>04.07.2026</a:t>
             </a:fld>
             <a:endParaRPr lang="ru-RU"/>
           </a:p>
@@ -1970,7 +1970,7 @@
             <a:fld id="{6940DC67-C7F6-414D-9708-96C5B560FED9}" type="datetimeFigureOut">
               <a:rPr lang="ru-RU" smtClean="0"/>
               <a:pPr/>
-              <a:t>03.07.2026</a:t>
+              <a:t>04.07.2026</a:t>
             </a:fld>
             <a:endParaRPr lang="ru-RU"/>
           </a:p>
@@ -2244,7 +2244,7 @@
             <a:fld id="{6940DC67-C7F6-414D-9708-96C5B560FED9}" type="datetimeFigureOut">
               <a:rPr lang="ru-RU" smtClean="0"/>
               <a:pPr/>
-              <a:t>03.07.2026</a:t>
+              <a:t>04.07.2026</a:t>
             </a:fld>
             <a:endParaRPr lang="ru-RU"/>
           </a:p>
@@ -2494,7 +2494,7 @@
             <a:fld id="{6940DC67-C7F6-414D-9708-96C5B560FED9}" type="datetimeFigureOut">
               <a:rPr lang="ru-RU" smtClean="0"/>
               <a:pPr/>
-              <a:t>03.07.2026</a:t>
+              <a:t>04.07.2026</a:t>
             </a:fld>
             <a:endParaRPr lang="ru-RU"/>
           </a:p>
@@ -2728,7 +2728,7 @@
             <a:fld id="{6940DC67-C7F6-414D-9708-96C5B560FED9}" type="datetimeFigureOut">
               <a:rPr lang="ru-RU" smtClean="0"/>
               <a:pPr/>
-              <a:t>03.07.2026</a:t>
+              <a:t>04.07.2026</a:t>
             </a:fld>
             <a:endParaRPr lang="ru-RU"/>
           </a:p>
@@ -5261,28 +5261,14 @@
                 <a:latin typeface="Arial" pitchFamily="34" charset="0"/>
                 <a:cs typeface="Arial" pitchFamily="34" charset="0"/>
               </a:rPr>
-              <a:t> </a:t>
-            </a:r>
-            <a:r>
-              <a:rPr lang="ru-RU" sz="1600" dirty="0" smtClean="0">
-                <a:latin typeface="Arial" pitchFamily="34" charset="0"/>
-                <a:cs typeface="Arial" pitchFamily="34" charset="0"/>
-              </a:rPr>
-              <a:t>           </a:t>
+              <a:t>            </a:t>
             </a:r>
             <a:r>
               <a:rPr lang="en-US" dirty="0" smtClean="0">
                 <a:latin typeface="Arial" pitchFamily="34" charset="0"/>
                 <a:cs typeface="Arial" pitchFamily="34" charset="0"/>
               </a:rPr>
-              <a:t> </a:t>
-            </a:r>
-            <a:r>
-              <a:rPr lang="en-US" dirty="0" smtClean="0">
-                <a:latin typeface="Arial" pitchFamily="34" charset="0"/>
-                <a:cs typeface="Arial" pitchFamily="34" charset="0"/>
-              </a:rPr>
-              <a:t>/</a:t>
+              <a:t> /</a:t>
             </a:r>
             <a:r>
               <a:rPr lang="en-US" dirty="0" err="1" smtClean="0">
@@ -5353,10 +5339,6 @@
               </a:rPr>
               <a:t> </a:t>
             </a:r>
-            <a:endParaRPr lang="ru-RU" sz="1600" dirty="0" smtClean="0">
-              <a:latin typeface="Arial" pitchFamily="34" charset="0"/>
-              <a:cs typeface="Arial" pitchFamily="34" charset="0"/>
-            </a:endParaRPr>
           </a:p>
           <a:p>
             <a:pPr algn="r"/>
@@ -5962,14 +5944,7 @@
                 <a:latin typeface="Arial" pitchFamily="34" charset="0"/>
                 <a:cs typeface="Arial" pitchFamily="34" charset="0"/>
               </a:rPr>
-              <a:t>26) </a:t>
-            </a:r>
-            <a:r>
-              <a:rPr lang="ru-RU" sz="1100" dirty="0" smtClean="0">
-                <a:latin typeface="Arial" pitchFamily="34" charset="0"/>
-                <a:cs typeface="Arial" pitchFamily="34" charset="0"/>
-              </a:rPr>
-              <a:t>FINISH</a:t>
+              <a:t>26) FINISH</a:t>
             </a:r>
           </a:p>
           <a:p>
@@ -6235,11 +6210,7 @@
           <a:p>
             <a:r>
               <a:rPr lang="ru-RU" sz="2000" b="1" u="sng" dirty="0" smtClean="0"/>
-              <a:t>Цель </a:t>
-            </a:r>
-            <a:r>
-              <a:rPr lang="ru-RU" sz="2000" b="1" u="sng" dirty="0" smtClean="0"/>
-              <a:t>проекта</a:t>
+              <a:t>Цель проекта</a:t>
             </a:r>
             <a:r>
               <a:rPr lang="ru-RU" sz="2000" dirty="0" smtClean="0"/>
@@ -6259,29 +6230,13 @@
             </a:r>
             <a:r>
               <a:rPr lang="ru-RU" sz="2000" dirty="0" smtClean="0"/>
-              <a:t>, Telegram-бота для удобного интерфейса и базу данных для </a:t>
-            </a:r>
+              <a:t>, Telegram-бота для удобного интерфейса и базу данных для хранения всей информации.</a:t>
+            </a:r>
+          </a:p>
+          <a:p>
             <a:r>
               <a:rPr lang="ru-RU" sz="2000" dirty="0" smtClean="0"/>
-              <a:t>хранения </a:t>
-            </a:r>
-            <a:r>
-              <a:rPr lang="ru-RU" sz="2000" dirty="0" smtClean="0"/>
-              <a:t>всей информации</a:t>
-            </a:r>
-            <a:r>
-              <a:rPr lang="ru-RU" sz="2000" dirty="0" smtClean="0"/>
-              <a:t>.</a:t>
-            </a:r>
-          </a:p>
-          <a:p>
-            <a:r>
-              <a:rPr lang="ru-RU" sz="2000" dirty="0" smtClean="0"/>
-              <a:t>Реализовали </a:t>
-            </a:r>
-            <a:r>
-              <a:rPr lang="ru-RU" sz="2000" dirty="0" smtClean="0"/>
-              <a:t>ключевой функционал: просмотр свободных слотов, выбор мастера и услуги, создание записи, а также заложили архитектуру, которая позволит легко расширять систему в будущем.</a:t>
+              <a:t>Реализовали ключевой функционал: просмотр свободных слотов, выбор мастера и услуги, создание записи, а также заложили архитектуру, которая позволит легко расширять систему в будущем.</a:t>
             </a:r>
             <a:endParaRPr lang="ru-RU" sz="2000" dirty="0">
               <a:latin typeface="Arial" pitchFamily="34" charset="0"/>
@@ -6571,21 +6526,7 @@
                 <a:latin typeface="Arial" pitchFamily="34" charset="0"/>
                 <a:cs typeface="Arial" pitchFamily="34" charset="0"/>
               </a:rPr>
-              <a:t>Локализация данных </a:t>
-            </a:r>
-            <a:r>
-              <a:rPr lang="ru-RU" sz="1600" dirty="0" smtClean="0">
-                <a:latin typeface="Arial" pitchFamily="34" charset="0"/>
-                <a:cs typeface="Arial" pitchFamily="34" charset="0"/>
-              </a:rPr>
-              <a:t>и соответствие </a:t>
-            </a:r>
-            <a:r>
-              <a:rPr lang="ru-RU" sz="1600" dirty="0" smtClean="0">
-                <a:latin typeface="Arial" pitchFamily="34" charset="0"/>
-                <a:cs typeface="Arial" pitchFamily="34" charset="0"/>
-              </a:rPr>
-              <a:t>152-ФЗ</a:t>
+              <a:t>Локализация данных и соответствие 152-ФЗ</a:t>
             </a:r>
           </a:p>
           <a:p>
@@ -6614,14 +6555,7 @@
                 <a:latin typeface="Arial" pitchFamily="34" charset="0"/>
                 <a:cs typeface="Arial" pitchFamily="34" charset="0"/>
               </a:rPr>
-              <a:t>А</a:t>
-            </a:r>
-            <a:r>
-              <a:rPr lang="ru-RU" sz="1600" dirty="0" smtClean="0">
-                <a:latin typeface="Arial" pitchFamily="34" charset="0"/>
-                <a:cs typeface="Arial" pitchFamily="34" charset="0"/>
-              </a:rPr>
-              <a:t>втоматические уведомления</a:t>
+              <a:t>Автоматические уведомления</a:t>
             </a:r>
           </a:p>
           <a:p>
@@ -6899,14 +6833,7 @@
                 <a:latin typeface="Arial" pitchFamily="34" charset="0"/>
                 <a:cs typeface="Arial" pitchFamily="34" charset="0"/>
               </a:rPr>
-              <a:t> </a:t>
-            </a:r>
-            <a:r>
-              <a:rPr lang="en-US" sz="1600" dirty="0" smtClean="0">
-                <a:latin typeface="Arial" pitchFamily="34" charset="0"/>
-                <a:cs typeface="Arial" pitchFamily="34" charset="0"/>
-              </a:rPr>
-              <a:t>Cloud</a:t>
+              <a:t> Cloud</a:t>
             </a:r>
             <a:r>
               <a:rPr lang="ru-RU" sz="1600" dirty="0" smtClean="0">
@@ -6940,21 +6867,7 @@
                 <a:latin typeface="Arial" pitchFamily="34" charset="0"/>
                 <a:cs typeface="Arial" pitchFamily="34" charset="0"/>
               </a:rPr>
-              <a:t>(</a:t>
-            </a:r>
-            <a:r>
-              <a:rPr lang="ru-RU" sz="1400" dirty="0" smtClean="0">
-                <a:latin typeface="Arial" pitchFamily="34" charset="0"/>
-                <a:cs typeface="Arial" pitchFamily="34" charset="0"/>
-              </a:rPr>
-              <a:t>К</a:t>
-            </a:r>
-            <a:r>
-              <a:rPr lang="ru-RU" sz="1400" dirty="0" smtClean="0">
-                <a:latin typeface="Arial" pitchFamily="34" charset="0"/>
-                <a:cs typeface="Arial" pitchFamily="34" charset="0"/>
-              </a:rPr>
-              <a:t>азахстан домен)</a:t>
+              <a:t>(Казахстан домен)</a:t>
             </a:r>
             <a:endParaRPr lang="ru-RU" sz="1600" dirty="0">
               <a:latin typeface="Arial" pitchFamily="34" charset="0"/>
@@ -7049,53 +6962,39 @@
                 <a:latin typeface="Arial" pitchFamily="34" charset="0"/>
                 <a:cs typeface="Arial" pitchFamily="34" charset="0"/>
               </a:rPr>
-              <a:t>Добавление автоматических </a:t>
-            </a:r>
+              <a:t>Добавление автоматических уведомлений</a:t>
+            </a:r>
+          </a:p>
+          <a:p>
             <a:r>
               <a:rPr lang="ru-RU" sz="2800" dirty="0" smtClean="0">
                 <a:latin typeface="Arial" pitchFamily="34" charset="0"/>
                 <a:cs typeface="Arial" pitchFamily="34" charset="0"/>
               </a:rPr>
-              <a:t>уведомлений</a:t>
-            </a:r>
-          </a:p>
-          <a:p>
+              <a:t>Синхронизация с </a:t>
+            </a:r>
+            <a:r>
+              <a:rPr lang="en-US" sz="2800" dirty="0" smtClean="0">
+                <a:latin typeface="Arial" pitchFamily="34" charset="0"/>
+                <a:cs typeface="Arial" pitchFamily="34" charset="0"/>
+              </a:rPr>
+              <a:t>Google-</a:t>
+            </a:r>
             <a:r>
               <a:rPr lang="ru-RU" sz="2800" dirty="0" smtClean="0">
                 <a:latin typeface="Arial" pitchFamily="34" charset="0"/>
                 <a:cs typeface="Arial" pitchFamily="34" charset="0"/>
               </a:rPr>
-              <a:t>Синхронизация с </a:t>
-            </a:r>
-            <a:r>
-              <a:rPr lang="en-US" sz="2800" dirty="0" smtClean="0">
-                <a:latin typeface="Arial" pitchFamily="34" charset="0"/>
-                <a:cs typeface="Arial" pitchFamily="34" charset="0"/>
-              </a:rPr>
-              <a:t>Google-</a:t>
-            </a:r>
+              <a:t>календарем</a:t>
+            </a:r>
+          </a:p>
+          <a:p>
             <a:r>
               <a:rPr lang="ru-RU" sz="2800" dirty="0" smtClean="0">
                 <a:latin typeface="Arial" pitchFamily="34" charset="0"/>
                 <a:cs typeface="Arial" pitchFamily="34" charset="0"/>
               </a:rPr>
-              <a:t>календарем</a:t>
-            </a:r>
-          </a:p>
-          <a:p>
-            <a:r>
-              <a:rPr lang="ru-RU" sz="2800" dirty="0" smtClean="0">
-                <a:latin typeface="Arial" pitchFamily="34" charset="0"/>
-                <a:cs typeface="Arial" pitchFamily="34" charset="0"/>
-              </a:rPr>
-              <a:t>Резервное копирование </a:t>
-            </a:r>
-            <a:r>
-              <a:rPr lang="ru-RU" sz="2800" dirty="0" smtClean="0">
-                <a:latin typeface="Arial" pitchFamily="34" charset="0"/>
-                <a:cs typeface="Arial" pitchFamily="34" charset="0"/>
-              </a:rPr>
-              <a:t>данных</a:t>
+              <a:t>Резервное копирование данных</a:t>
             </a:r>
           </a:p>
           <a:p>
@@ -7279,7 +7178,7 @@
         <p:spPr>
           <a:xfrm>
             <a:off x="323528" y="1196752"/>
-            <a:ext cx="8568952" cy="4525963"/>
+            <a:ext cx="8568952" cy="4680520"/>
           </a:xfrm>
         </p:spPr>
         <p:txBody>
@@ -7299,91 +7198,7 @@
                 <a:latin typeface="Arial" pitchFamily="34" charset="0"/>
                 <a:cs typeface="Arial" pitchFamily="34" charset="0"/>
               </a:rPr>
-              <a:t>Проект </a:t>
-            </a:r>
-            <a:r>
-              <a:rPr lang="ru-RU" sz="2800" kern="1000" dirty="0" smtClean="0">
-                <a:latin typeface="Arial" pitchFamily="34" charset="0"/>
-                <a:cs typeface="Arial" pitchFamily="34" charset="0"/>
-              </a:rPr>
-              <a:t>полностью работоспособен и готов к </a:t>
-            </a:r>
-            <a:r>
-              <a:rPr lang="ru-RU" sz="2800" kern="1000" dirty="0" smtClean="0">
-                <a:latin typeface="Arial" pitchFamily="34" charset="0"/>
-                <a:cs typeface="Arial" pitchFamily="34" charset="0"/>
-              </a:rPr>
-              <a:t> внедрению</a:t>
-            </a:r>
-            <a:r>
-              <a:rPr lang="ru-RU" sz="2800" kern="1000" dirty="0" smtClean="0">
-                <a:latin typeface="Arial" pitchFamily="34" charset="0"/>
-                <a:cs typeface="Arial" pitchFamily="34" charset="0"/>
-              </a:rPr>
-              <a:t>. Он решает реальную проблему </a:t>
-            </a:r>
-            <a:r>
-              <a:rPr lang="ru-RU" sz="2800" kern="1000" dirty="0" smtClean="0">
-                <a:latin typeface="Arial" pitchFamily="34" charset="0"/>
-                <a:cs typeface="Arial" pitchFamily="34" charset="0"/>
-              </a:rPr>
-              <a:t>бизнеса, </a:t>
-            </a:r>
-            <a:r>
-              <a:rPr lang="ru-RU" sz="2800" kern="1000" dirty="0" smtClean="0">
-                <a:latin typeface="Arial" pitchFamily="34" charset="0"/>
-                <a:cs typeface="Arial" pitchFamily="34" charset="0"/>
-              </a:rPr>
-              <a:t>имеет задел для </a:t>
-            </a:r>
-            <a:r>
-              <a:rPr lang="ru-RU" sz="2800" kern="1000" dirty="0" smtClean="0">
-                <a:latin typeface="Arial" pitchFamily="34" charset="0"/>
-                <a:cs typeface="Arial" pitchFamily="34" charset="0"/>
-              </a:rPr>
-              <a:t>масштабирования, будет </a:t>
-            </a:r>
-            <a:r>
-              <a:rPr lang="ru-RU" sz="2800" kern="1000" dirty="0" smtClean="0">
-                <a:latin typeface="Arial" pitchFamily="34" charset="0"/>
-                <a:cs typeface="Arial" pitchFamily="34" charset="0"/>
-              </a:rPr>
-              <a:t>развиваться дальше </a:t>
-            </a:r>
-            <a:r>
-              <a:rPr lang="ru-RU" sz="2800" kern="1000" dirty="0" smtClean="0">
-                <a:latin typeface="Arial" pitchFamily="34" charset="0"/>
-                <a:cs typeface="Arial" pitchFamily="34" charset="0"/>
-              </a:rPr>
-              <a:t>после </a:t>
-            </a:r>
-            <a:r>
-              <a:rPr lang="ru-RU" sz="2800" kern="1000" dirty="0" smtClean="0">
-                <a:latin typeface="Arial" pitchFamily="34" charset="0"/>
-                <a:cs typeface="Arial" pitchFamily="34" charset="0"/>
-              </a:rPr>
-              <a:t>тестирования </a:t>
-            </a:r>
-            <a:r>
-              <a:rPr lang="ru-RU" sz="2800" kern="1000" dirty="0" smtClean="0">
-                <a:latin typeface="Arial" pitchFamily="34" charset="0"/>
-                <a:cs typeface="Arial" pitchFamily="34" charset="0"/>
-              </a:rPr>
-              <a:t>и с </a:t>
-            </a:r>
-            <a:r>
-              <a:rPr lang="ru-RU" sz="2800" kern="1000" dirty="0" smtClean="0">
-                <a:latin typeface="Arial" pitchFamily="34" charset="0"/>
-                <a:cs typeface="Arial" pitchFamily="34" charset="0"/>
-              </a:rPr>
-              <a:t>учетом обратной </a:t>
-            </a:r>
-            <a:r>
-              <a:rPr lang="ru-RU" sz="2800" kern="1000" dirty="0" smtClean="0">
-                <a:latin typeface="Arial" pitchFamily="34" charset="0"/>
-                <a:cs typeface="Arial" pitchFamily="34" charset="0"/>
-              </a:rPr>
-              <a:t>связи.</a:t>
+              <a:t>Проект полностью работоспособен и готов к  внедрению. Он решает реальную проблему бизнеса, имеет задел для масштабирования, будет развиваться дальше после тестирования и с учетом обратной связи.</a:t>
             </a:r>
           </a:p>
           <a:p>
@@ -7394,12 +7209,32 @@
               <a:buNone/>
             </a:pPr>
             <a:r>
-              <a:rPr lang="en-US" b="1" u="sng" kern="1000" smtClean="0">
+              <a:rPr lang="en-US" b="1" u="sng" kern="1000" dirty="0" smtClean="0">
                 <a:latin typeface="Arial" pitchFamily="34" charset="0"/>
                 <a:cs typeface="Arial" pitchFamily="34" charset="0"/>
               </a:rPr>
               <a:t>GIT</a:t>
             </a:r>
+          </a:p>
+          <a:p>
+            <a:pPr marL="180000" indent="0">
+              <a:spcBef>
+                <a:spcPts val="600"/>
+              </a:spcBef>
+              <a:buNone/>
+            </a:pPr>
+            <a:r>
+              <a:rPr lang="en-US" kern="1000" dirty="0" smtClean="0">
+                <a:latin typeface="Arial" pitchFamily="34" charset="0"/>
+                <a:cs typeface="Arial" pitchFamily="34" charset="0"/>
+                <a:hlinkClick r:id="rId2"/>
+              </a:rPr>
+              <a:t>https://github.com/Vigitoreanec/ApiManicureStudio</a:t>
+            </a:r>
+            <a:endParaRPr lang="en-US" kern="1000" dirty="0" smtClean="0">
+              <a:latin typeface="Arial" pitchFamily="34" charset="0"/>
+              <a:cs typeface="Arial" pitchFamily="34" charset="0"/>
+            </a:endParaRPr>
           </a:p>
           <a:p>
             <a:pPr marL="180000" indent="0">

--- a/Проект «Маникюрная студия».pptx
+++ b/Проект «Маникюрная студия».pptx
@@ -4773,7 +4773,7 @@
                 <a:cs typeface="Arial" pitchFamily="34" charset="0"/>
                 <a:hlinkClick r:id="rId2" action="ppaction://hlinkfile"/>
               </a:rPr>
-              <a:t>DELETE</a:t>
+              <a:t>PUT</a:t>
             </a:r>
             <a:endParaRPr lang="ru-RU" sz="1800" dirty="0" smtClean="0">
               <a:latin typeface="Arial" pitchFamily="34" charset="0"/>
@@ -6177,7 +6177,14 @@
                 <a:latin typeface="Arial" pitchFamily="34" charset="0"/>
                 <a:cs typeface="Arial" pitchFamily="34" charset="0"/>
               </a:rPr>
-              <a:t>Заключение</a:t>
+              <a:t>Заключ</a:t>
+            </a:r>
+            <a:r>
+              <a:rPr lang="ru-RU" sz="4800" dirty="0" smtClean="0">
+                <a:latin typeface="Arial" pitchFamily="34" charset="0"/>
+                <a:cs typeface="Arial" pitchFamily="34" charset="0"/>
+              </a:rPr>
+              <a:t>ительная часть</a:t>
             </a:r>
             <a:endParaRPr lang="ru-RU" sz="4800" dirty="0">
               <a:latin typeface="Arial" pitchFamily="34" charset="0"/>
@@ -6222,7 +6229,15 @@
             </a:r>
             <a:r>
               <a:rPr lang="ru-RU" sz="2000" dirty="0" smtClean="0"/>
-              <a:t>. Мы создали работающее ядро системы: REST API на C# с полной </a:t>
+              <a:t>. </a:t>
+            </a:r>
+            <a:r>
+              <a:rPr lang="ru-RU" sz="2000" dirty="0" smtClean="0"/>
+              <a:t>Создали работающую систему: </a:t>
+            </a:r>
+            <a:r>
+              <a:rPr lang="ru-RU" sz="2000" dirty="0" smtClean="0"/>
+              <a:t>REST API на C# с полной </a:t>
             </a:r>
             <a:r>
               <a:rPr lang="ru-RU" sz="2000" dirty="0" err="1" smtClean="0"/>
